--- a/site/slides/m03-greedy-pair-merge/m03-greedy-pair-merge.pptx
+++ b/site/slides/m03-greedy-pair-merge/m03-greedy-pair-merge.pptx
@@ -4419,7 +4419,7 @@
         <p:spPr>
           <a:xfrm>
             <a:off x="563880" y="6512052"/>
-            <a:ext cx="1960626" cy="205740"/>
+            <a:ext cx="1951989" cy="205740"/>
           </a:xfrm>
           <a:prstGeom prst="rect">
             <a:avLst/>
@@ -4454,8 +4454,8 @@
         </p:nvSpPr>
         <p:spPr>
           <a:xfrm>
-            <a:off x="11108524" y="6499098"/>
-            <a:ext cx="561505" cy="222885"/>
+            <a:off x="11113770" y="6499098"/>
+            <a:ext cx="556260" cy="222885"/>
           </a:xfrm>
           <a:prstGeom prst="rect">
             <a:avLst/>
@@ -4485,42 +4485,6 @@
       <p:sp>
         <p:nvSpPr>
           <p:cNvPr id="7" name="TextBox 6"/>
-          <p:cNvSpPr txBox="1"/>
-          <p:nvPr/>
-        </p:nvSpPr>
-        <p:spPr>
-          <a:xfrm>
-            <a:off x="10855147" y="377952"/>
-            <a:ext cx="811072" cy="205740"/>
-          </a:xfrm>
-          <a:prstGeom prst="rect">
-            <a:avLst/>
-          </a:prstGeom>
-          <a:noFill/>
-        </p:spPr>
-        <p:txBody>
-          <a:bodyPr wrap="none" lIns="0" rIns="0" tIns="0" bIns="0">
-            <a:spAutoFit/>
-          </a:bodyPr>
-          <a:lstStyle/>
-          <a:p>
-            <a:pPr algn="r"/>
-            <a:r>
-              <a:rPr sz="1200" b="0">
-                <a:solidFill>
-                  <a:srgbClr val="6F8F8F"/>
-                </a:solidFill>
-                <a:latin typeface="Noto Sans SC"/>
-                <a:ea typeface="Noto Sans SC"/>
-              </a:rPr>
-              <a:t>影片 00:00</a:t>
-            </a:r>
-          </a:p>
-        </p:txBody>
-      </p:sp>
-      <p:sp>
-        <p:nvSpPr>
-          <p:cNvPr id="8" name="TextBox 7"/>
           <p:cNvSpPr txBox="1"/>
           <p:nvPr/>
         </p:nvSpPr>
@@ -4556,50 +4520,50 @@
       </p:sp>
       <p:sp>
         <p:nvSpPr>
+          <p:cNvPr id="8" name="TextBox 7"/>
+          <p:cNvSpPr txBox="1"/>
+          <p:nvPr/>
+        </p:nvSpPr>
+        <p:spPr>
+          <a:xfrm>
+            <a:off x="4405630" y="3335782"/>
+            <a:ext cx="3380740" cy="291465"/>
+          </a:xfrm>
+          <a:prstGeom prst="rect">
+            <a:avLst/>
+          </a:prstGeom>
+          <a:noFill/>
+        </p:spPr>
+        <p:txBody>
+          <a:bodyPr wrap="none" lIns="0" rIns="0" tIns="0" bIns="0">
+            <a:spAutoFit/>
+          </a:bodyPr>
+          <a:lstStyle/>
+          <a:p>
+            <a:pPr algn="ctr"/>
+            <a:r>
+              <a:rPr sz="1700" b="0">
+                <a:solidFill>
+                  <a:srgbClr val="BCD2D0"/>
+                </a:solidFill>
+                <a:latin typeface="Noto Sans SC"/>
+                <a:ea typeface="Noto Sans SC"/>
+              </a:rPr>
+              <a:t>Greedy pair merge · 凝聚式聚类</a:t>
+            </a:r>
+          </a:p>
+        </p:txBody>
+      </p:sp>
+      <p:sp>
+        <p:nvSpPr>
           <p:cNvPr id="9" name="TextBox 8"/>
           <p:cNvSpPr txBox="1"/>
           <p:nvPr/>
         </p:nvSpPr>
         <p:spPr>
           <a:xfrm>
-            <a:off x="4406150" y="3335782"/>
-            <a:ext cx="3379698" cy="291465"/>
-          </a:xfrm>
-          <a:prstGeom prst="rect">
-            <a:avLst/>
-          </a:prstGeom>
-          <a:noFill/>
-        </p:spPr>
-        <p:txBody>
-          <a:bodyPr wrap="none" lIns="0" rIns="0" tIns="0" bIns="0">
-            <a:spAutoFit/>
-          </a:bodyPr>
-          <a:lstStyle/>
-          <a:p>
-            <a:pPr algn="ctr"/>
-            <a:r>
-              <a:rPr sz="1700" b="0">
-                <a:solidFill>
-                  <a:srgbClr val="BCD2D0"/>
-                </a:solidFill>
-                <a:latin typeface="Noto Sans SC"/>
-                <a:ea typeface="Noto Sans SC"/>
-              </a:rPr>
-              <a:t>Greedy pair merge · 凝聚式聚类</a:t>
-            </a:r>
-          </a:p>
-        </p:txBody>
-      </p:sp>
-      <p:sp>
-        <p:nvSpPr>
-          <p:cNvPr id="10" name="TextBox 9"/>
-          <p:cNvSpPr txBox="1"/>
-          <p:nvPr/>
-        </p:nvSpPr>
-        <p:spPr>
-          <a:xfrm>
-            <a:off x="4028008" y="4136644"/>
-            <a:ext cx="4135983" cy="240030"/>
+            <a:off x="4013835" y="4136644"/>
+            <a:ext cx="4164329" cy="240030"/>
           </a:xfrm>
           <a:prstGeom prst="rect">
             <a:avLst/>
@@ -4852,7 +4816,7 @@
         <p:spPr>
           <a:xfrm>
             <a:off x="563880" y="6512052"/>
-            <a:ext cx="1960626" cy="205740"/>
+            <a:ext cx="1951989" cy="205740"/>
           </a:xfrm>
           <a:prstGeom prst="rect">
             <a:avLst/>
@@ -4887,8 +4851,8 @@
         </p:nvSpPr>
         <p:spPr>
           <a:xfrm>
-            <a:off x="11011115" y="6499098"/>
-            <a:ext cx="658914" cy="222885"/>
+            <a:off x="11018520" y="6499098"/>
+            <a:ext cx="651510" cy="222885"/>
           </a:xfrm>
           <a:prstGeom prst="rect">
             <a:avLst/>
@@ -5469,7 +5433,7 @@
         <p:spPr>
           <a:xfrm>
             <a:off x="563880" y="6512052"/>
-            <a:ext cx="1960626" cy="205740"/>
+            <a:ext cx="1951989" cy="205740"/>
           </a:xfrm>
           <a:prstGeom prst="rect">
             <a:avLst/>
@@ -5504,8 +5468,8 @@
         </p:nvSpPr>
         <p:spPr>
           <a:xfrm>
-            <a:off x="11011115" y="6499098"/>
-            <a:ext cx="658914" cy="222885"/>
+            <a:off x="11018520" y="6499098"/>
+            <a:ext cx="651510" cy="222885"/>
           </a:xfrm>
           <a:prstGeom prst="rect">
             <a:avLst/>
@@ -5534,43 +5498,7 @@
       </p:sp>
       <p:sp>
         <p:nvSpPr>
-          <p:cNvPr id="9" name="TextBox 8"/>
-          <p:cNvSpPr txBox="1"/>
-          <p:nvPr/>
-        </p:nvSpPr>
-        <p:spPr>
-          <a:xfrm>
-            <a:off x="10855147" y="377952"/>
-            <a:ext cx="811072" cy="205740"/>
-          </a:xfrm>
-          <a:prstGeom prst="rect">
-            <a:avLst/>
-          </a:prstGeom>
-          <a:noFill/>
-        </p:spPr>
-        <p:txBody>
-          <a:bodyPr wrap="none" lIns="0" rIns="0" tIns="0" bIns="0">
-            <a:spAutoFit/>
-          </a:bodyPr>
-          <a:lstStyle/>
-          <a:p>
-            <a:pPr algn="r"/>
-            <a:r>
-              <a:rPr sz="1200" b="0">
-                <a:solidFill>
-                  <a:srgbClr val="6F8F8F"/>
-                </a:solidFill>
-                <a:latin typeface="Noto Sans SC"/>
-                <a:ea typeface="Noto Sans SC"/>
-              </a:rPr>
-              <a:t>影片 02:59</a:t>
-            </a:r>
-          </a:p>
-        </p:txBody>
-      </p:sp>
-      <p:sp>
-        <p:nvSpPr>
-          <p:cNvPr id="10" name="Oval 9"/>
+          <p:cNvPr id="9" name="Oval 8"/>
           <p:cNvSpPr/>
           <p:nvPr/>
         </p:nvSpPr>
@@ -5612,7 +5540,7 @@
       </p:sp>
       <p:sp>
         <p:nvSpPr>
-          <p:cNvPr id="11" name="TextBox 10"/>
+          <p:cNvPr id="10" name="TextBox 9"/>
           <p:cNvSpPr txBox="1"/>
           <p:nvPr/>
         </p:nvSpPr>
@@ -5652,7 +5580,7 @@
       </p:sp>
       <p:sp>
         <p:nvSpPr>
-          <p:cNvPr id="12" name="Oval 11"/>
+          <p:cNvPr id="11" name="Oval 10"/>
           <p:cNvSpPr/>
           <p:nvPr/>
         </p:nvSpPr>
@@ -5694,7 +5622,7 @@
       </p:sp>
       <p:sp>
         <p:nvSpPr>
-          <p:cNvPr id="13" name="TextBox 12"/>
+          <p:cNvPr id="12" name="TextBox 11"/>
           <p:cNvSpPr txBox="1"/>
           <p:nvPr/>
         </p:nvSpPr>
@@ -5734,7 +5662,7 @@
       </p:sp>
       <p:sp>
         <p:nvSpPr>
-          <p:cNvPr id="14" name="Oval 13"/>
+          <p:cNvPr id="13" name="Oval 12"/>
           <p:cNvSpPr/>
           <p:nvPr/>
         </p:nvSpPr>
@@ -5776,7 +5704,7 @@
       </p:sp>
       <p:sp>
         <p:nvSpPr>
-          <p:cNvPr id="15" name="TextBox 14"/>
+          <p:cNvPr id="14" name="TextBox 13"/>
           <p:cNvSpPr txBox="1"/>
           <p:nvPr/>
         </p:nvSpPr>
@@ -5816,7 +5744,7 @@
       </p:sp>
       <p:sp>
         <p:nvSpPr>
-          <p:cNvPr id="16" name="Oval 15"/>
+          <p:cNvPr id="15" name="Oval 14"/>
           <p:cNvSpPr/>
           <p:nvPr/>
         </p:nvSpPr>
@@ -5858,7 +5786,7 @@
       </p:sp>
       <p:sp>
         <p:nvSpPr>
-          <p:cNvPr id="17" name="TextBox 16"/>
+          <p:cNvPr id="16" name="TextBox 15"/>
           <p:cNvSpPr txBox="1"/>
           <p:nvPr/>
         </p:nvSpPr>
@@ -6122,7 +6050,7 @@
         <p:spPr>
           <a:xfrm>
             <a:off x="563880" y="6512052"/>
-            <a:ext cx="1960626" cy="205740"/>
+            <a:ext cx="1951989" cy="205740"/>
           </a:xfrm>
           <a:prstGeom prst="rect">
             <a:avLst/>
@@ -6157,8 +6085,8 @@
         </p:nvSpPr>
         <p:spPr>
           <a:xfrm>
-            <a:off x="11011115" y="6499098"/>
-            <a:ext cx="658914" cy="222885"/>
+            <a:off x="11018520" y="6499098"/>
+            <a:ext cx="651510" cy="222885"/>
           </a:xfrm>
           <a:prstGeom prst="rect">
             <a:avLst/>
@@ -6531,7 +6459,7 @@
         <p:spPr>
           <a:xfrm>
             <a:off x="563880" y="6512052"/>
-            <a:ext cx="1960626" cy="205740"/>
+            <a:ext cx="1951989" cy="205740"/>
           </a:xfrm>
           <a:prstGeom prst="rect">
             <a:avLst/>
@@ -6566,8 +6494,8 @@
         </p:nvSpPr>
         <p:spPr>
           <a:xfrm>
-            <a:off x="11108524" y="6499098"/>
-            <a:ext cx="561505" cy="222885"/>
+            <a:off x="11113770" y="6499098"/>
+            <a:ext cx="556260" cy="222885"/>
           </a:xfrm>
           <a:prstGeom prst="rect">
             <a:avLst/>
@@ -6596,43 +6524,7 @@
       </p:sp>
       <p:sp>
         <p:nvSpPr>
-          <p:cNvPr id="9" name="TextBox 8"/>
-          <p:cNvSpPr txBox="1"/>
-          <p:nvPr/>
-        </p:nvSpPr>
-        <p:spPr>
-          <a:xfrm>
-            <a:off x="10855147" y="377952"/>
-            <a:ext cx="811072" cy="205740"/>
-          </a:xfrm>
-          <a:prstGeom prst="rect">
-            <a:avLst/>
-          </a:prstGeom>
-          <a:noFill/>
-        </p:spPr>
-        <p:txBody>
-          <a:bodyPr wrap="none" lIns="0" rIns="0" tIns="0" bIns="0">
-            <a:spAutoFit/>
-          </a:bodyPr>
-          <a:lstStyle/>
-          <a:p>
-            <a:pPr algn="r"/>
-            <a:r>
-              <a:rPr sz="1200" b="0">
-                <a:solidFill>
-                  <a:srgbClr val="6F8F8F"/>
-                </a:solidFill>
-                <a:latin typeface="Noto Sans SC"/>
-                <a:ea typeface="Noto Sans SC"/>
-              </a:rPr>
-              <a:t>影片 00:03</a:t>
-            </a:r>
-          </a:p>
-        </p:txBody>
-      </p:sp>
-      <p:sp>
-        <p:nvSpPr>
-          <p:cNvPr id="10" name="Oval 9"/>
+          <p:cNvPr id="9" name="Oval 8"/>
           <p:cNvSpPr/>
           <p:nvPr/>
         </p:nvSpPr>
@@ -6674,7 +6566,7 @@
       </p:sp>
       <p:sp>
         <p:nvSpPr>
-          <p:cNvPr id="11" name="TextBox 10"/>
+          <p:cNvPr id="10" name="TextBox 9"/>
           <p:cNvSpPr txBox="1"/>
           <p:nvPr/>
         </p:nvSpPr>
@@ -6714,7 +6606,7 @@
       </p:sp>
       <p:sp>
         <p:nvSpPr>
-          <p:cNvPr id="12" name="Oval 11"/>
+          <p:cNvPr id="11" name="Oval 10"/>
           <p:cNvSpPr/>
           <p:nvPr/>
         </p:nvSpPr>
@@ -6756,7 +6648,7 @@
       </p:sp>
       <p:sp>
         <p:nvSpPr>
-          <p:cNvPr id="13" name="TextBox 12"/>
+          <p:cNvPr id="12" name="TextBox 11"/>
           <p:cNvSpPr txBox="1"/>
           <p:nvPr/>
         </p:nvSpPr>
@@ -6796,7 +6688,7 @@
       </p:sp>
       <p:sp>
         <p:nvSpPr>
-          <p:cNvPr id="14" name="Oval 13"/>
+          <p:cNvPr id="13" name="Oval 12"/>
           <p:cNvSpPr/>
           <p:nvPr/>
         </p:nvSpPr>
@@ -6838,7 +6730,7 @@
       </p:sp>
       <p:sp>
         <p:nvSpPr>
-          <p:cNvPr id="15" name="TextBox 14"/>
+          <p:cNvPr id="14" name="TextBox 13"/>
           <p:cNvSpPr txBox="1"/>
           <p:nvPr/>
         </p:nvSpPr>
@@ -6878,7 +6770,7 @@
       </p:sp>
       <p:sp>
         <p:nvSpPr>
-          <p:cNvPr id="16" name="Oval 15"/>
+          <p:cNvPr id="15" name="Oval 14"/>
           <p:cNvSpPr/>
           <p:nvPr/>
         </p:nvSpPr>
@@ -6920,7 +6812,7 @@
       </p:sp>
       <p:sp>
         <p:nvSpPr>
-          <p:cNvPr id="17" name="TextBox 16"/>
+          <p:cNvPr id="16" name="TextBox 15"/>
           <p:cNvSpPr txBox="1"/>
           <p:nvPr/>
         </p:nvSpPr>
@@ -6960,7 +6852,7 @@
       </p:sp>
       <p:sp>
         <p:nvSpPr>
-          <p:cNvPr id="18" name="Oval 17"/>
+          <p:cNvPr id="17" name="Oval 16"/>
           <p:cNvSpPr/>
           <p:nvPr/>
         </p:nvSpPr>
@@ -7002,7 +6894,7 @@
       </p:sp>
       <p:sp>
         <p:nvSpPr>
-          <p:cNvPr id="19" name="TextBox 18"/>
+          <p:cNvPr id="18" name="TextBox 17"/>
           <p:cNvSpPr txBox="1"/>
           <p:nvPr/>
         </p:nvSpPr>
@@ -7042,7 +6934,7 @@
       </p:sp>
       <p:cxnSp>
         <p:nvCxnSpPr>
-          <p:cNvPr id="20" name="Connector 19"/>
+          <p:cNvPr id="19" name="Connector 18"/>
           <p:cNvCxnSpPr/>
           <p:nvPr/>
         </p:nvCxnSpPr>
@@ -7056,8 +6948,9 @@
           </a:prstGeom>
           <a:ln w="25400">
             <a:solidFill>
-              <a:srgbClr val="5D7C80"/>
+              <a:srgbClr val="DB7B72"/>
             </a:solidFill>
+            <a:prstDash val="dash"/>
           </a:ln>
         </p:spPr>
         <p:style>
@@ -7077,7 +6970,7 @@
       </p:cxnSp>
       <p:sp>
         <p:nvSpPr>
-          <p:cNvPr id="21" name="Oval 20"/>
+          <p:cNvPr id="20" name="Oval 19"/>
           <p:cNvSpPr/>
           <p:nvPr/>
         </p:nvSpPr>
@@ -7121,14 +7014,14 @@
       </p:sp>
       <p:sp>
         <p:nvSpPr>
-          <p:cNvPr id="22" name="TextBox 21"/>
-          <p:cNvSpPr txBox="1"/>
-          <p:nvPr/>
-        </p:nvSpPr>
-        <p:spPr>
-          <a:xfrm>
-            <a:off x="7625567" y="1555974"/>
-            <a:ext cx="241808" cy="274320"/>
+          <p:cNvPr id="21" name="TextBox 20"/>
+          <p:cNvSpPr txBox="1"/>
+          <p:nvPr/>
+        </p:nvSpPr>
+        <p:spPr>
+          <a:xfrm>
+            <a:off x="7625186" y="1555974"/>
+            <a:ext cx="242570" cy="274320"/>
           </a:xfrm>
           <a:prstGeom prst="rect">
             <a:avLst/>
@@ -7157,7 +7050,7 @@
       </p:sp>
       <p:cxnSp>
         <p:nvCxnSpPr>
-          <p:cNvPr id="23" name="Connector 22"/>
+          <p:cNvPr id="22" name="Connector 21"/>
           <p:cNvCxnSpPr/>
           <p:nvPr/>
         </p:nvCxnSpPr>
@@ -7171,8 +7064,9 @@
           </a:prstGeom>
           <a:ln w="25400">
             <a:solidFill>
-              <a:srgbClr val="5D7C80"/>
+              <a:srgbClr val="DB7B72"/>
             </a:solidFill>
+            <a:prstDash val="dash"/>
           </a:ln>
         </p:spPr>
         <p:style>
@@ -7192,7 +7086,7 @@
       </p:cxnSp>
       <p:sp>
         <p:nvSpPr>
-          <p:cNvPr id="24" name="Oval 23"/>
+          <p:cNvPr id="23" name="Oval 22"/>
           <p:cNvSpPr/>
           <p:nvPr/>
         </p:nvSpPr>
@@ -7236,14 +7130,14 @@
       </p:sp>
       <p:sp>
         <p:nvSpPr>
-          <p:cNvPr id="25" name="TextBox 24"/>
-          <p:cNvSpPr txBox="1"/>
-          <p:nvPr/>
-        </p:nvSpPr>
-        <p:spPr>
-          <a:xfrm>
-            <a:off x="7337163" y="2523263"/>
-            <a:ext cx="241808" cy="274320"/>
+          <p:cNvPr id="24" name="TextBox 23"/>
+          <p:cNvSpPr txBox="1"/>
+          <p:nvPr/>
+        </p:nvSpPr>
+        <p:spPr>
+          <a:xfrm>
+            <a:off x="7336782" y="2523263"/>
+            <a:ext cx="242570" cy="274320"/>
           </a:xfrm>
           <a:prstGeom prst="rect">
             <a:avLst/>
@@ -7272,7 +7166,7 @@
       </p:sp>
       <p:cxnSp>
         <p:nvCxnSpPr>
-          <p:cNvPr id="26" name="Connector 25"/>
+          <p:cNvPr id="25" name="Connector 24"/>
           <p:cNvCxnSpPr/>
           <p:nvPr/>
         </p:nvCxnSpPr>
@@ -7286,8 +7180,9 @@
           </a:prstGeom>
           <a:ln w="25400">
             <a:solidFill>
-              <a:srgbClr val="5D7C80"/>
+              <a:srgbClr val="DB7B72"/>
             </a:solidFill>
+            <a:prstDash val="dash"/>
           </a:ln>
         </p:spPr>
         <p:style>
@@ -7307,7 +7202,7 @@
       </p:cxnSp>
       <p:sp>
         <p:nvSpPr>
-          <p:cNvPr id="27" name="Oval 26"/>
+          <p:cNvPr id="26" name="Oval 25"/>
           <p:cNvSpPr/>
           <p:nvPr/>
         </p:nvSpPr>
@@ -7351,14 +7246,14 @@
       </p:sp>
       <p:sp>
         <p:nvSpPr>
-          <p:cNvPr id="28" name="TextBox 27"/>
-          <p:cNvSpPr txBox="1"/>
-          <p:nvPr/>
-        </p:nvSpPr>
-        <p:spPr>
-          <a:xfrm>
-            <a:off x="8438483" y="2607880"/>
-            <a:ext cx="241808" cy="274320"/>
+          <p:cNvPr id="27" name="TextBox 26"/>
+          <p:cNvSpPr txBox="1"/>
+          <p:nvPr/>
+        </p:nvSpPr>
+        <p:spPr>
+          <a:xfrm>
+            <a:off x="8438102" y="2607880"/>
+            <a:ext cx="242570" cy="274320"/>
           </a:xfrm>
           <a:prstGeom prst="rect">
             <a:avLst/>
@@ -7387,7 +7282,7 @@
       </p:sp>
       <p:cxnSp>
         <p:nvCxnSpPr>
-          <p:cNvPr id="29" name="Connector 28"/>
+          <p:cNvPr id="28" name="Connector 27"/>
           <p:cNvCxnSpPr/>
           <p:nvPr/>
         </p:nvCxnSpPr>
@@ -7401,8 +7296,9 @@
           </a:prstGeom>
           <a:ln w="25400">
             <a:solidFill>
-              <a:srgbClr val="5D7C80"/>
+              <a:srgbClr val="DB7B72"/>
             </a:solidFill>
+            <a:prstDash val="dash"/>
           </a:ln>
         </p:spPr>
         <p:style>
@@ -7422,7 +7318,7 @@
       </p:cxnSp>
       <p:sp>
         <p:nvSpPr>
-          <p:cNvPr id="30" name="Oval 29"/>
+          <p:cNvPr id="29" name="Oval 28"/>
           <p:cNvSpPr/>
           <p:nvPr/>
         </p:nvSpPr>
@@ -7466,14 +7362,14 @@
       </p:sp>
       <p:sp>
         <p:nvSpPr>
-          <p:cNvPr id="31" name="TextBox 30"/>
-          <p:cNvSpPr txBox="1"/>
-          <p:nvPr/>
-        </p:nvSpPr>
-        <p:spPr>
-          <a:xfrm>
-            <a:off x="9053110" y="3832665"/>
-            <a:ext cx="241808" cy="274320"/>
+          <p:cNvPr id="30" name="TextBox 29"/>
+          <p:cNvSpPr txBox="1"/>
+          <p:nvPr/>
+        </p:nvSpPr>
+        <p:spPr>
+          <a:xfrm>
+            <a:off x="9052729" y="3832665"/>
+            <a:ext cx="242570" cy="274320"/>
           </a:xfrm>
           <a:prstGeom prst="rect">
             <a:avLst/>
@@ -7502,7 +7398,7 @@
       </p:sp>
       <p:cxnSp>
         <p:nvCxnSpPr>
-          <p:cNvPr id="32" name="Connector 31"/>
+          <p:cNvPr id="31" name="Connector 30"/>
           <p:cNvCxnSpPr/>
           <p:nvPr/>
         </p:nvCxnSpPr>
@@ -7516,8 +7412,9 @@
           </a:prstGeom>
           <a:ln w="25400">
             <a:solidFill>
-              <a:srgbClr val="5D7C80"/>
+              <a:srgbClr val="DB7B72"/>
             </a:solidFill>
+            <a:prstDash val="dash"/>
           </a:ln>
         </p:spPr>
         <p:style>
@@ -7537,7 +7434,7 @@
       </p:cxnSp>
       <p:sp>
         <p:nvSpPr>
-          <p:cNvPr id="33" name="Oval 32"/>
+          <p:cNvPr id="32" name="Oval 31"/>
           <p:cNvSpPr/>
           <p:nvPr/>
         </p:nvSpPr>
@@ -7581,14 +7478,14 @@
       </p:sp>
       <p:sp>
         <p:nvSpPr>
-          <p:cNvPr id="34" name="TextBox 33"/>
-          <p:cNvSpPr txBox="1"/>
-          <p:nvPr/>
-        </p:nvSpPr>
-        <p:spPr>
-          <a:xfrm>
-            <a:off x="7909687" y="4312676"/>
-            <a:ext cx="241808" cy="274320"/>
+          <p:cNvPr id="33" name="TextBox 32"/>
+          <p:cNvSpPr txBox="1"/>
+          <p:nvPr/>
+        </p:nvSpPr>
+        <p:spPr>
+          <a:xfrm>
+            <a:off x="7909306" y="4312676"/>
+            <a:ext cx="242570" cy="274320"/>
           </a:xfrm>
           <a:prstGeom prst="rect">
             <a:avLst/>
@@ -7617,7 +7514,7 @@
       </p:sp>
       <p:cxnSp>
         <p:nvCxnSpPr>
-          <p:cNvPr id="35" name="Connector 34"/>
+          <p:cNvPr id="34" name="Connector 33"/>
           <p:cNvCxnSpPr/>
           <p:nvPr/>
         </p:nvCxnSpPr>
@@ -7631,8 +7528,9 @@
           </a:prstGeom>
           <a:ln w="25400">
             <a:solidFill>
-              <a:srgbClr val="5D7C80"/>
+              <a:srgbClr val="DB7B72"/>
             </a:solidFill>
+            <a:prstDash val="dash"/>
           </a:ln>
         </p:spPr>
         <p:style>
@@ -7652,7 +7550,7 @@
       </p:cxnSp>
       <p:sp>
         <p:nvSpPr>
-          <p:cNvPr id="36" name="Oval 35"/>
+          <p:cNvPr id="35" name="Oval 34"/>
           <p:cNvSpPr/>
           <p:nvPr/>
         </p:nvSpPr>
@@ -7696,14 +7594,14 @@
       </p:sp>
       <p:sp>
         <p:nvSpPr>
-          <p:cNvPr id="37" name="TextBox 36"/>
-          <p:cNvSpPr txBox="1"/>
-          <p:nvPr/>
-        </p:nvSpPr>
-        <p:spPr>
-          <a:xfrm>
-            <a:off x="8904036" y="4954496"/>
-            <a:ext cx="241808" cy="274320"/>
+          <p:cNvPr id="36" name="TextBox 35"/>
+          <p:cNvSpPr txBox="1"/>
+          <p:nvPr/>
+        </p:nvSpPr>
+        <p:spPr>
+          <a:xfrm>
+            <a:off x="8903655" y="4954496"/>
+            <a:ext cx="242570" cy="274320"/>
           </a:xfrm>
           <a:prstGeom prst="rect">
             <a:avLst/>
@@ -7732,7 +7630,7 @@
       </p:sp>
       <p:sp>
         <p:nvSpPr>
-          <p:cNvPr id="38" name="Oval 37"/>
+          <p:cNvPr id="37" name="Oval 36"/>
           <p:cNvSpPr/>
           <p:nvPr/>
         </p:nvSpPr>
@@ -7776,14 +7674,14 @@
       </p:sp>
       <p:sp>
         <p:nvSpPr>
-          <p:cNvPr id="39" name="TextBox 38"/>
-          <p:cNvSpPr txBox="1"/>
-          <p:nvPr/>
-        </p:nvSpPr>
-        <p:spPr>
-          <a:xfrm>
-            <a:off x="6539825" y="1846576"/>
-            <a:ext cx="269659" cy="291465"/>
+          <p:cNvPr id="38" name="TextBox 37"/>
+          <p:cNvSpPr txBox="1"/>
+          <p:nvPr/>
+        </p:nvSpPr>
+        <p:spPr>
+          <a:xfrm>
+            <a:off x="6540034" y="1846576"/>
+            <a:ext cx="269240" cy="291465"/>
           </a:xfrm>
           <a:prstGeom prst="rect">
             <a:avLst/>
@@ -7812,7 +7710,7 @@
       </p:sp>
       <p:sp>
         <p:nvSpPr>
-          <p:cNvPr id="40" name="Oval 39"/>
+          <p:cNvPr id="39" name="Oval 38"/>
           <p:cNvSpPr/>
           <p:nvPr/>
         </p:nvSpPr>
@@ -7856,14 +7754,14 @@
       </p:sp>
       <p:sp>
         <p:nvSpPr>
-          <p:cNvPr id="41" name="TextBox 40"/>
-          <p:cNvSpPr txBox="1"/>
-          <p:nvPr/>
-        </p:nvSpPr>
-        <p:spPr>
-          <a:xfrm>
-            <a:off x="8700737" y="1699006"/>
-            <a:ext cx="276567" cy="291465"/>
+          <p:cNvPr id="40" name="TextBox 39"/>
+          <p:cNvSpPr txBox="1"/>
+          <p:nvPr/>
+        </p:nvSpPr>
+        <p:spPr>
+          <a:xfrm>
+            <a:off x="8701226" y="1699006"/>
+            <a:ext cx="275590" cy="291465"/>
           </a:xfrm>
           <a:prstGeom prst="rect">
             <a:avLst/>
@@ -7892,7 +7790,7 @@
       </p:sp>
       <p:sp>
         <p:nvSpPr>
-          <p:cNvPr id="42" name="Oval 41"/>
+          <p:cNvPr id="41" name="Oval 40"/>
           <p:cNvSpPr/>
           <p:nvPr/>
         </p:nvSpPr>
@@ -7936,14 +7834,14 @@
       </p:sp>
       <p:sp>
         <p:nvSpPr>
-          <p:cNvPr id="43" name="TextBox 42"/>
-          <p:cNvSpPr txBox="1"/>
-          <p:nvPr/>
-        </p:nvSpPr>
-        <p:spPr>
-          <a:xfrm>
-            <a:off x="7867203" y="3519041"/>
-            <a:ext cx="271170" cy="291465"/>
+          <p:cNvPr id="42" name="TextBox 41"/>
+          <p:cNvSpPr txBox="1"/>
+          <p:nvPr/>
+        </p:nvSpPr>
+        <p:spPr>
+          <a:xfrm>
+            <a:off x="7868168" y="3519041"/>
+            <a:ext cx="269240" cy="291465"/>
           </a:xfrm>
           <a:prstGeom prst="rect">
             <a:avLst/>
@@ -7972,7 +7870,7 @@
       </p:sp>
       <p:sp>
         <p:nvSpPr>
-          <p:cNvPr id="44" name="Oval 43"/>
+          <p:cNvPr id="43" name="Oval 42"/>
           <p:cNvSpPr/>
           <p:nvPr/>
         </p:nvSpPr>
@@ -8016,14 +7914,14 @@
       </p:sp>
       <p:sp>
         <p:nvSpPr>
-          <p:cNvPr id="45" name="TextBox 44"/>
-          <p:cNvSpPr txBox="1"/>
-          <p:nvPr/>
-        </p:nvSpPr>
-        <p:spPr>
-          <a:xfrm>
-            <a:off x="10074498" y="4552034"/>
-            <a:ext cx="283692" cy="291465"/>
+          <p:cNvPr id="44" name="TextBox 43"/>
+          <p:cNvSpPr txBox="1"/>
+          <p:nvPr/>
+        </p:nvSpPr>
+        <p:spPr>
+          <a:xfrm>
+            <a:off x="10075375" y="4552034"/>
+            <a:ext cx="281939" cy="291465"/>
           </a:xfrm>
           <a:prstGeom prst="rect">
             <a:avLst/>
@@ -8052,7 +7950,7 @@
       </p:sp>
       <p:sp>
         <p:nvSpPr>
-          <p:cNvPr id="46" name="Oval 45"/>
+          <p:cNvPr id="45" name="Oval 44"/>
           <p:cNvSpPr/>
           <p:nvPr/>
         </p:nvSpPr>
@@ -8096,14 +7994,14 @@
       </p:sp>
       <p:sp>
         <p:nvSpPr>
-          <p:cNvPr id="47" name="TextBox 46"/>
-          <p:cNvSpPr txBox="1"/>
-          <p:nvPr/>
-        </p:nvSpPr>
-        <p:spPr>
-          <a:xfrm>
-            <a:off x="7625678" y="5191506"/>
-            <a:ext cx="262318" cy="291465"/>
+          <p:cNvPr id="46" name="TextBox 45"/>
+          <p:cNvSpPr txBox="1"/>
+          <p:nvPr/>
+        </p:nvSpPr>
+        <p:spPr>
+          <a:xfrm>
+            <a:off x="7625393" y="5191506"/>
+            <a:ext cx="262890" cy="291465"/>
           </a:xfrm>
           <a:prstGeom prst="rect">
             <a:avLst/>
@@ -8132,14 +8030,14 @@
       </p:sp>
       <p:sp>
         <p:nvSpPr>
-          <p:cNvPr id="48" name="Rounded Rectangle 47"/>
+          <p:cNvPr id="47" name="Rounded Rectangle 46"/>
           <p:cNvSpPr/>
           <p:nvPr/>
         </p:nvSpPr>
         <p:spPr>
           <a:xfrm>
-            <a:off x="7832617" y="5880100"/>
-            <a:ext cx="1479765" cy="292100"/>
+            <a:off x="7832725" y="5880100"/>
+            <a:ext cx="1479550" cy="292100"/>
           </a:xfrm>
           <a:prstGeom prst="roundRect">
             <a:avLst>
@@ -8178,14 +8076,14 @@
       </p:sp>
       <p:sp>
         <p:nvSpPr>
-          <p:cNvPr id="49" name="TextBox 48"/>
-          <p:cNvSpPr txBox="1"/>
-          <p:nvPr/>
-        </p:nvSpPr>
-        <p:spPr>
-          <a:xfrm>
-            <a:off x="7878337" y="5940298"/>
-            <a:ext cx="1388325" cy="222885"/>
+          <p:cNvPr id="48" name="TextBox 47"/>
+          <p:cNvSpPr txBox="1"/>
+          <p:nvPr/>
+        </p:nvSpPr>
+        <p:spPr>
+          <a:xfrm>
+            <a:off x="7878445" y="5940298"/>
+            <a:ext cx="1388110" cy="222885"/>
           </a:xfrm>
           <a:prstGeom prst="rect">
             <a:avLst/>
@@ -8325,7 +8223,7 @@
         <p:spPr>
           <a:xfrm>
             <a:off x="553720" y="450088"/>
-            <a:ext cx="4078732" cy="480060"/>
+            <a:ext cx="4080510" cy="480060"/>
           </a:xfrm>
           <a:prstGeom prst="rect">
             <a:avLst/>
@@ -8438,7 +8336,7 @@
         <p:spPr>
           <a:xfrm>
             <a:off x="563880" y="6512052"/>
-            <a:ext cx="1960626" cy="205740"/>
+            <a:ext cx="1951989" cy="205740"/>
           </a:xfrm>
           <a:prstGeom prst="rect">
             <a:avLst/>
@@ -8473,8 +8371,8 @@
         </p:nvSpPr>
         <p:spPr>
           <a:xfrm>
-            <a:off x="11108524" y="6499098"/>
-            <a:ext cx="561505" cy="222885"/>
+            <a:off x="11113770" y="6499098"/>
+            <a:ext cx="556260" cy="222885"/>
           </a:xfrm>
           <a:prstGeom prst="rect">
             <a:avLst/>
@@ -8503,43 +8401,7 @@
       </p:sp>
       <p:sp>
         <p:nvSpPr>
-          <p:cNvPr id="9" name="TextBox 8"/>
-          <p:cNvSpPr txBox="1"/>
-          <p:nvPr/>
-        </p:nvSpPr>
-        <p:spPr>
-          <a:xfrm>
-            <a:off x="10855147" y="377952"/>
-            <a:ext cx="811072" cy="205740"/>
-          </a:xfrm>
-          <a:prstGeom prst="rect">
-            <a:avLst/>
-          </a:prstGeom>
-          <a:noFill/>
-        </p:spPr>
-        <p:txBody>
-          <a:bodyPr wrap="none" lIns="0" rIns="0" tIns="0" bIns="0">
-            <a:spAutoFit/>
-          </a:bodyPr>
-          <a:lstStyle/>
-          <a:p>
-            <a:pPr algn="r"/>
-            <a:r>
-              <a:rPr sz="1200" b="0">
-                <a:solidFill>
-                  <a:srgbClr val="6F8F8F"/>
-                </a:solidFill>
-                <a:latin typeface="Noto Sans SC"/>
-                <a:ea typeface="Noto Sans SC"/>
-              </a:rPr>
-              <a:t>影片 00:19</a:t>
-            </a:r>
-          </a:p>
-        </p:txBody>
-      </p:sp>
-      <p:sp>
-        <p:nvSpPr>
-          <p:cNvPr id="10" name="Oval 9"/>
+          <p:cNvPr id="9" name="Oval 8"/>
           <p:cNvSpPr/>
           <p:nvPr/>
         </p:nvSpPr>
@@ -8581,7 +8443,7 @@
       </p:sp>
       <p:sp>
         <p:nvSpPr>
-          <p:cNvPr id="11" name="TextBox 10"/>
+          <p:cNvPr id="10" name="TextBox 9"/>
           <p:cNvSpPr txBox="1"/>
           <p:nvPr/>
         </p:nvSpPr>
@@ -8621,7 +8483,7 @@
       </p:sp>
       <p:sp>
         <p:nvSpPr>
-          <p:cNvPr id="12" name="Oval 11"/>
+          <p:cNvPr id="11" name="Oval 10"/>
           <p:cNvSpPr/>
           <p:nvPr/>
         </p:nvSpPr>
@@ -8663,7 +8525,7 @@
       </p:sp>
       <p:sp>
         <p:nvSpPr>
-          <p:cNvPr id="13" name="TextBox 12"/>
+          <p:cNvPr id="12" name="TextBox 11"/>
           <p:cNvSpPr txBox="1"/>
           <p:nvPr/>
         </p:nvSpPr>
@@ -8703,7 +8565,7 @@
       </p:sp>
       <p:sp>
         <p:nvSpPr>
-          <p:cNvPr id="14" name="Oval 13"/>
+          <p:cNvPr id="13" name="Oval 12"/>
           <p:cNvSpPr/>
           <p:nvPr/>
         </p:nvSpPr>
@@ -8745,7 +8607,7 @@
       </p:sp>
       <p:sp>
         <p:nvSpPr>
-          <p:cNvPr id="15" name="TextBox 14"/>
+          <p:cNvPr id="14" name="TextBox 13"/>
           <p:cNvSpPr txBox="1"/>
           <p:nvPr/>
         </p:nvSpPr>
@@ -8785,7 +8647,7 @@
       </p:sp>
       <p:sp>
         <p:nvSpPr>
-          <p:cNvPr id="16" name="Oval 15"/>
+          <p:cNvPr id="15" name="Oval 14"/>
           <p:cNvSpPr/>
           <p:nvPr/>
         </p:nvSpPr>
@@ -8827,7 +8689,7 @@
       </p:sp>
       <p:sp>
         <p:nvSpPr>
-          <p:cNvPr id="17" name="TextBox 16"/>
+          <p:cNvPr id="16" name="TextBox 15"/>
           <p:cNvSpPr txBox="1"/>
           <p:nvPr/>
         </p:nvSpPr>
@@ -8867,7 +8729,7 @@
       </p:sp>
       <p:cxnSp>
         <p:nvCxnSpPr>
-          <p:cNvPr id="18" name="Connector 17"/>
+          <p:cNvPr id="17" name="Connector 16"/>
           <p:cNvCxnSpPr/>
           <p:nvPr/>
         </p:nvCxnSpPr>
@@ -8881,8 +8743,9 @@
           </a:prstGeom>
           <a:ln w="25400">
             <a:solidFill>
-              <a:srgbClr val="5D7C80"/>
+              <a:srgbClr val="DB7B72"/>
             </a:solidFill>
+            <a:prstDash val="dash"/>
           </a:ln>
         </p:spPr>
         <p:style>
@@ -8902,7 +8765,7 @@
       </p:cxnSp>
       <p:sp>
         <p:nvSpPr>
-          <p:cNvPr id="19" name="Oval 18"/>
+          <p:cNvPr id="18" name="Oval 17"/>
           <p:cNvSpPr/>
           <p:nvPr/>
         </p:nvSpPr>
@@ -8946,14 +8809,14 @@
       </p:sp>
       <p:sp>
         <p:nvSpPr>
-          <p:cNvPr id="20" name="TextBox 19"/>
-          <p:cNvSpPr txBox="1"/>
-          <p:nvPr/>
-        </p:nvSpPr>
-        <p:spPr>
-          <a:xfrm>
-            <a:off x="7625567" y="1555974"/>
-            <a:ext cx="241808" cy="274320"/>
+          <p:cNvPr id="19" name="TextBox 18"/>
+          <p:cNvSpPr txBox="1"/>
+          <p:nvPr/>
+        </p:nvSpPr>
+        <p:spPr>
+          <a:xfrm>
+            <a:off x="7625186" y="1555974"/>
+            <a:ext cx="242570" cy="274320"/>
           </a:xfrm>
           <a:prstGeom prst="rect">
             <a:avLst/>
@@ -8982,7 +8845,7 @@
       </p:sp>
       <p:cxnSp>
         <p:nvCxnSpPr>
-          <p:cNvPr id="21" name="Connector 20"/>
+          <p:cNvPr id="20" name="Connector 19"/>
           <p:cNvCxnSpPr/>
           <p:nvPr/>
         </p:nvCxnSpPr>
@@ -8996,8 +8859,9 @@
           </a:prstGeom>
           <a:ln w="25400">
             <a:solidFill>
-              <a:srgbClr val="5D7C80"/>
+              <a:srgbClr val="DB7B72"/>
             </a:solidFill>
+            <a:prstDash val="dash"/>
           </a:ln>
         </p:spPr>
         <p:style>
@@ -9017,7 +8881,7 @@
       </p:cxnSp>
       <p:sp>
         <p:nvSpPr>
-          <p:cNvPr id="22" name="Oval 21"/>
+          <p:cNvPr id="21" name="Oval 20"/>
           <p:cNvSpPr/>
           <p:nvPr/>
         </p:nvSpPr>
@@ -9061,14 +8925,14 @@
       </p:sp>
       <p:sp>
         <p:nvSpPr>
-          <p:cNvPr id="23" name="TextBox 22"/>
-          <p:cNvSpPr txBox="1"/>
-          <p:nvPr/>
-        </p:nvSpPr>
-        <p:spPr>
-          <a:xfrm>
-            <a:off x="7337163" y="2523263"/>
-            <a:ext cx="241808" cy="274320"/>
+          <p:cNvPr id="22" name="TextBox 21"/>
+          <p:cNvSpPr txBox="1"/>
+          <p:nvPr/>
+        </p:nvSpPr>
+        <p:spPr>
+          <a:xfrm>
+            <a:off x="7336782" y="2523263"/>
+            <a:ext cx="242570" cy="274320"/>
           </a:xfrm>
           <a:prstGeom prst="rect">
             <a:avLst/>
@@ -9097,7 +8961,7 @@
       </p:sp>
       <p:cxnSp>
         <p:nvCxnSpPr>
-          <p:cNvPr id="24" name="Connector 23"/>
+          <p:cNvPr id="23" name="Connector 22"/>
           <p:cNvCxnSpPr/>
           <p:nvPr/>
         </p:nvCxnSpPr>
@@ -9111,8 +8975,9 @@
           </a:prstGeom>
           <a:ln w="25400">
             <a:solidFill>
-              <a:srgbClr val="5D7C80"/>
+              <a:srgbClr val="DB7B72"/>
             </a:solidFill>
+            <a:prstDash val="dash"/>
           </a:ln>
         </p:spPr>
         <p:style>
@@ -9132,7 +8997,7 @@
       </p:cxnSp>
       <p:sp>
         <p:nvSpPr>
-          <p:cNvPr id="25" name="Oval 24"/>
+          <p:cNvPr id="24" name="Oval 23"/>
           <p:cNvSpPr/>
           <p:nvPr/>
         </p:nvSpPr>
@@ -9176,14 +9041,14 @@
       </p:sp>
       <p:sp>
         <p:nvSpPr>
-          <p:cNvPr id="26" name="TextBox 25"/>
-          <p:cNvSpPr txBox="1"/>
-          <p:nvPr/>
-        </p:nvSpPr>
-        <p:spPr>
-          <a:xfrm>
-            <a:off x="8438483" y="2607880"/>
-            <a:ext cx="241808" cy="274320"/>
+          <p:cNvPr id="25" name="TextBox 24"/>
+          <p:cNvSpPr txBox="1"/>
+          <p:nvPr/>
+        </p:nvSpPr>
+        <p:spPr>
+          <a:xfrm>
+            <a:off x="8438102" y="2607880"/>
+            <a:ext cx="242570" cy="274320"/>
           </a:xfrm>
           <a:prstGeom prst="rect">
             <a:avLst/>
@@ -9212,7 +9077,7 @@
       </p:sp>
       <p:cxnSp>
         <p:nvCxnSpPr>
-          <p:cNvPr id="27" name="Connector 26"/>
+          <p:cNvPr id="26" name="Connector 25"/>
           <p:cNvCxnSpPr/>
           <p:nvPr/>
         </p:nvCxnSpPr>
@@ -9226,8 +9091,9 @@
           </a:prstGeom>
           <a:ln w="25400">
             <a:solidFill>
-              <a:srgbClr val="5D7C80"/>
+              <a:srgbClr val="DB7B72"/>
             </a:solidFill>
+            <a:prstDash val="dash"/>
           </a:ln>
         </p:spPr>
         <p:style>
@@ -9247,7 +9113,7 @@
       </p:cxnSp>
       <p:sp>
         <p:nvSpPr>
-          <p:cNvPr id="28" name="Oval 27"/>
+          <p:cNvPr id="27" name="Oval 26"/>
           <p:cNvSpPr/>
           <p:nvPr/>
         </p:nvSpPr>
@@ -9291,14 +9157,14 @@
       </p:sp>
       <p:sp>
         <p:nvSpPr>
-          <p:cNvPr id="29" name="TextBox 28"/>
-          <p:cNvSpPr txBox="1"/>
-          <p:nvPr/>
-        </p:nvSpPr>
-        <p:spPr>
-          <a:xfrm>
-            <a:off x="9053110" y="3832665"/>
-            <a:ext cx="241808" cy="274320"/>
+          <p:cNvPr id="28" name="TextBox 27"/>
+          <p:cNvSpPr txBox="1"/>
+          <p:nvPr/>
+        </p:nvSpPr>
+        <p:spPr>
+          <a:xfrm>
+            <a:off x="9052729" y="3832665"/>
+            <a:ext cx="242570" cy="274320"/>
           </a:xfrm>
           <a:prstGeom prst="rect">
             <a:avLst/>
@@ -9327,7 +9193,7 @@
       </p:sp>
       <p:cxnSp>
         <p:nvCxnSpPr>
-          <p:cNvPr id="30" name="Connector 29"/>
+          <p:cNvPr id="29" name="Connector 28"/>
           <p:cNvCxnSpPr/>
           <p:nvPr/>
         </p:nvCxnSpPr>
@@ -9341,8 +9207,9 @@
           </a:prstGeom>
           <a:ln w="25400">
             <a:solidFill>
-              <a:srgbClr val="5D7C80"/>
+              <a:srgbClr val="DB7B72"/>
             </a:solidFill>
+            <a:prstDash val="dash"/>
           </a:ln>
         </p:spPr>
         <p:style>
@@ -9362,7 +9229,7 @@
       </p:cxnSp>
       <p:sp>
         <p:nvSpPr>
-          <p:cNvPr id="31" name="Oval 30"/>
+          <p:cNvPr id="30" name="Oval 29"/>
           <p:cNvSpPr/>
           <p:nvPr/>
         </p:nvSpPr>
@@ -9406,14 +9273,14 @@
       </p:sp>
       <p:sp>
         <p:nvSpPr>
-          <p:cNvPr id="32" name="TextBox 31"/>
-          <p:cNvSpPr txBox="1"/>
-          <p:nvPr/>
-        </p:nvSpPr>
-        <p:spPr>
-          <a:xfrm>
-            <a:off x="7909687" y="4312676"/>
-            <a:ext cx="241808" cy="274320"/>
+          <p:cNvPr id="31" name="TextBox 30"/>
+          <p:cNvSpPr txBox="1"/>
+          <p:nvPr/>
+        </p:nvSpPr>
+        <p:spPr>
+          <a:xfrm>
+            <a:off x="7909306" y="4312676"/>
+            <a:ext cx="242570" cy="274320"/>
           </a:xfrm>
           <a:prstGeom prst="rect">
             <a:avLst/>
@@ -9442,7 +9309,7 @@
       </p:sp>
       <p:cxnSp>
         <p:nvCxnSpPr>
-          <p:cNvPr id="33" name="Connector 32"/>
+          <p:cNvPr id="32" name="Connector 31"/>
           <p:cNvCxnSpPr/>
           <p:nvPr/>
         </p:nvCxnSpPr>
@@ -9456,8 +9323,9 @@
           </a:prstGeom>
           <a:ln w="25400">
             <a:solidFill>
-              <a:srgbClr val="5D7C80"/>
+              <a:srgbClr val="DB7B72"/>
             </a:solidFill>
+            <a:prstDash val="dash"/>
           </a:ln>
         </p:spPr>
         <p:style>
@@ -9477,7 +9345,7 @@
       </p:cxnSp>
       <p:sp>
         <p:nvSpPr>
-          <p:cNvPr id="34" name="Oval 33"/>
+          <p:cNvPr id="33" name="Oval 32"/>
           <p:cNvSpPr/>
           <p:nvPr/>
         </p:nvSpPr>
@@ -9521,14 +9389,14 @@
       </p:sp>
       <p:sp>
         <p:nvSpPr>
-          <p:cNvPr id="35" name="TextBox 34"/>
-          <p:cNvSpPr txBox="1"/>
-          <p:nvPr/>
-        </p:nvSpPr>
-        <p:spPr>
-          <a:xfrm>
-            <a:off x="8904036" y="4954496"/>
-            <a:ext cx="241808" cy="274320"/>
+          <p:cNvPr id="34" name="TextBox 33"/>
+          <p:cNvSpPr txBox="1"/>
+          <p:nvPr/>
+        </p:nvSpPr>
+        <p:spPr>
+          <a:xfrm>
+            <a:off x="8903655" y="4954496"/>
+            <a:ext cx="242570" cy="274320"/>
           </a:xfrm>
           <a:prstGeom prst="rect">
             <a:avLst/>
@@ -9557,7 +9425,7 @@
       </p:sp>
       <p:sp>
         <p:nvSpPr>
-          <p:cNvPr id="36" name="Oval 35"/>
+          <p:cNvPr id="35" name="Oval 34"/>
           <p:cNvSpPr/>
           <p:nvPr/>
         </p:nvSpPr>
@@ -9601,14 +9469,14 @@
       </p:sp>
       <p:sp>
         <p:nvSpPr>
-          <p:cNvPr id="37" name="TextBox 36"/>
-          <p:cNvSpPr txBox="1"/>
-          <p:nvPr/>
-        </p:nvSpPr>
-        <p:spPr>
-          <a:xfrm>
-            <a:off x="6539825" y="1846576"/>
-            <a:ext cx="269659" cy="291465"/>
+          <p:cNvPr id="36" name="TextBox 35"/>
+          <p:cNvSpPr txBox="1"/>
+          <p:nvPr/>
+        </p:nvSpPr>
+        <p:spPr>
+          <a:xfrm>
+            <a:off x="6540034" y="1846576"/>
+            <a:ext cx="269240" cy="291465"/>
           </a:xfrm>
           <a:prstGeom prst="rect">
             <a:avLst/>
@@ -9637,7 +9505,7 @@
       </p:sp>
       <p:sp>
         <p:nvSpPr>
-          <p:cNvPr id="38" name="Oval 37"/>
+          <p:cNvPr id="37" name="Oval 36"/>
           <p:cNvSpPr/>
           <p:nvPr/>
         </p:nvSpPr>
@@ -9681,14 +9549,14 @@
       </p:sp>
       <p:sp>
         <p:nvSpPr>
-          <p:cNvPr id="39" name="TextBox 38"/>
-          <p:cNvSpPr txBox="1"/>
-          <p:nvPr/>
-        </p:nvSpPr>
-        <p:spPr>
-          <a:xfrm>
-            <a:off x="8700737" y="1699006"/>
-            <a:ext cx="276567" cy="291465"/>
+          <p:cNvPr id="38" name="TextBox 37"/>
+          <p:cNvSpPr txBox="1"/>
+          <p:nvPr/>
+        </p:nvSpPr>
+        <p:spPr>
+          <a:xfrm>
+            <a:off x="8701226" y="1699006"/>
+            <a:ext cx="275590" cy="291465"/>
           </a:xfrm>
           <a:prstGeom prst="rect">
             <a:avLst/>
@@ -9717,7 +9585,7 @@
       </p:sp>
       <p:sp>
         <p:nvSpPr>
-          <p:cNvPr id="40" name="Oval 39"/>
+          <p:cNvPr id="39" name="Oval 38"/>
           <p:cNvSpPr/>
           <p:nvPr/>
         </p:nvSpPr>
@@ -9761,14 +9629,14 @@
       </p:sp>
       <p:sp>
         <p:nvSpPr>
-          <p:cNvPr id="41" name="TextBox 40"/>
-          <p:cNvSpPr txBox="1"/>
-          <p:nvPr/>
-        </p:nvSpPr>
-        <p:spPr>
-          <a:xfrm>
-            <a:off x="7867203" y="3519041"/>
-            <a:ext cx="271170" cy="291465"/>
+          <p:cNvPr id="40" name="TextBox 39"/>
+          <p:cNvSpPr txBox="1"/>
+          <p:nvPr/>
+        </p:nvSpPr>
+        <p:spPr>
+          <a:xfrm>
+            <a:off x="7868168" y="3519041"/>
+            <a:ext cx="269240" cy="291465"/>
           </a:xfrm>
           <a:prstGeom prst="rect">
             <a:avLst/>
@@ -9797,7 +9665,7 @@
       </p:sp>
       <p:sp>
         <p:nvSpPr>
-          <p:cNvPr id="42" name="Oval 41"/>
+          <p:cNvPr id="41" name="Oval 40"/>
           <p:cNvSpPr/>
           <p:nvPr/>
         </p:nvSpPr>
@@ -9841,14 +9709,14 @@
       </p:sp>
       <p:sp>
         <p:nvSpPr>
-          <p:cNvPr id="43" name="TextBox 42"/>
-          <p:cNvSpPr txBox="1"/>
-          <p:nvPr/>
-        </p:nvSpPr>
-        <p:spPr>
-          <a:xfrm>
-            <a:off x="10074498" y="4552034"/>
-            <a:ext cx="283692" cy="291465"/>
+          <p:cNvPr id="42" name="TextBox 41"/>
+          <p:cNvSpPr txBox="1"/>
+          <p:nvPr/>
+        </p:nvSpPr>
+        <p:spPr>
+          <a:xfrm>
+            <a:off x="10075375" y="4552034"/>
+            <a:ext cx="281939" cy="291465"/>
           </a:xfrm>
           <a:prstGeom prst="rect">
             <a:avLst/>
@@ -9877,7 +9745,7 @@
       </p:sp>
       <p:sp>
         <p:nvSpPr>
-          <p:cNvPr id="44" name="Oval 43"/>
+          <p:cNvPr id="43" name="Oval 42"/>
           <p:cNvSpPr/>
           <p:nvPr/>
         </p:nvSpPr>
@@ -9921,14 +9789,14 @@
       </p:sp>
       <p:sp>
         <p:nvSpPr>
-          <p:cNvPr id="45" name="TextBox 44"/>
-          <p:cNvSpPr txBox="1"/>
-          <p:nvPr/>
-        </p:nvSpPr>
-        <p:spPr>
-          <a:xfrm>
-            <a:off x="7625678" y="5191506"/>
-            <a:ext cx="262318" cy="291465"/>
+          <p:cNvPr id="44" name="TextBox 43"/>
+          <p:cNvSpPr txBox="1"/>
+          <p:nvPr/>
+        </p:nvSpPr>
+        <p:spPr>
+          <a:xfrm>
+            <a:off x="7625393" y="5191506"/>
+            <a:ext cx="262890" cy="291465"/>
           </a:xfrm>
           <a:prstGeom prst="rect">
             <a:avLst/>
@@ -9957,14 +9825,14 @@
       </p:sp>
       <p:sp>
         <p:nvSpPr>
-          <p:cNvPr id="46" name="Rounded Rectangle 45"/>
+          <p:cNvPr id="45" name="Rounded Rectangle 44"/>
           <p:cNvSpPr/>
           <p:nvPr/>
         </p:nvSpPr>
         <p:spPr>
           <a:xfrm>
-            <a:off x="7832617" y="5880100"/>
-            <a:ext cx="1479765" cy="292100"/>
+            <a:off x="7832725" y="5880100"/>
+            <a:ext cx="1479550" cy="292100"/>
           </a:xfrm>
           <a:prstGeom prst="roundRect">
             <a:avLst>
@@ -10003,14 +9871,14 @@
       </p:sp>
       <p:sp>
         <p:nvSpPr>
-          <p:cNvPr id="47" name="TextBox 46"/>
-          <p:cNvSpPr txBox="1"/>
-          <p:nvPr/>
-        </p:nvSpPr>
-        <p:spPr>
-          <a:xfrm>
-            <a:off x="7878337" y="5940298"/>
-            <a:ext cx="1388325" cy="222885"/>
+          <p:cNvPr id="46" name="TextBox 45"/>
+          <p:cNvSpPr txBox="1"/>
+          <p:nvPr/>
+        </p:nvSpPr>
+        <p:spPr>
+          <a:xfrm>
+            <a:off x="7878445" y="5940298"/>
+            <a:ext cx="1388110" cy="222885"/>
           </a:xfrm>
           <a:prstGeom prst="rect">
             <a:avLst/>
@@ -10263,7 +10131,7 @@
         <p:spPr>
           <a:xfrm>
             <a:off x="563880" y="6512052"/>
-            <a:ext cx="1960626" cy="205740"/>
+            <a:ext cx="1951989" cy="205740"/>
           </a:xfrm>
           <a:prstGeom prst="rect">
             <a:avLst/>
@@ -10298,8 +10166,8 @@
         </p:nvSpPr>
         <p:spPr>
           <a:xfrm>
-            <a:off x="11108524" y="6499098"/>
-            <a:ext cx="561505" cy="222885"/>
+            <a:off x="11113770" y="6499098"/>
+            <a:ext cx="556260" cy="222885"/>
           </a:xfrm>
           <a:prstGeom prst="rect">
             <a:avLst/>
@@ -10328,43 +10196,7 @@
       </p:sp>
       <p:sp>
         <p:nvSpPr>
-          <p:cNvPr id="9" name="TextBox 8"/>
-          <p:cNvSpPr txBox="1"/>
-          <p:nvPr/>
-        </p:nvSpPr>
-        <p:spPr>
-          <a:xfrm>
-            <a:off x="10855147" y="377952"/>
-            <a:ext cx="811072" cy="205740"/>
-          </a:xfrm>
-          <a:prstGeom prst="rect">
-            <a:avLst/>
-          </a:prstGeom>
-          <a:noFill/>
-        </p:spPr>
-        <p:txBody>
-          <a:bodyPr wrap="none" lIns="0" rIns="0" tIns="0" bIns="0">
-            <a:spAutoFit/>
-          </a:bodyPr>
-          <a:lstStyle/>
-          <a:p>
-            <a:pPr algn="r"/>
-            <a:r>
-              <a:rPr sz="1200" b="0">
-                <a:solidFill>
-                  <a:srgbClr val="6F8F8F"/>
-                </a:solidFill>
-                <a:latin typeface="Noto Sans SC"/>
-                <a:ea typeface="Noto Sans SC"/>
-              </a:rPr>
-              <a:t>影片 00:42</a:t>
-            </a:r>
-          </a:p>
-        </p:txBody>
-      </p:sp>
-      <p:sp>
-        <p:nvSpPr>
-          <p:cNvPr id="10" name="Oval 9"/>
+          <p:cNvPr id="9" name="Oval 8"/>
           <p:cNvSpPr/>
           <p:nvPr/>
         </p:nvSpPr>
@@ -10406,7 +10238,7 @@
       </p:sp>
       <p:sp>
         <p:nvSpPr>
-          <p:cNvPr id="11" name="TextBox 10"/>
+          <p:cNvPr id="10" name="TextBox 9"/>
           <p:cNvSpPr txBox="1"/>
           <p:nvPr/>
         </p:nvSpPr>
@@ -10446,7 +10278,7 @@
       </p:sp>
       <p:sp>
         <p:nvSpPr>
-          <p:cNvPr id="12" name="Oval 11"/>
+          <p:cNvPr id="11" name="Oval 10"/>
           <p:cNvSpPr/>
           <p:nvPr/>
         </p:nvSpPr>
@@ -10488,7 +10320,7 @@
       </p:sp>
       <p:sp>
         <p:nvSpPr>
-          <p:cNvPr id="13" name="TextBox 12"/>
+          <p:cNvPr id="12" name="TextBox 11"/>
           <p:cNvSpPr txBox="1"/>
           <p:nvPr/>
         </p:nvSpPr>
@@ -10528,7 +10360,7 @@
       </p:sp>
       <p:sp>
         <p:nvSpPr>
-          <p:cNvPr id="14" name="Oval 13"/>
+          <p:cNvPr id="13" name="Oval 12"/>
           <p:cNvSpPr/>
           <p:nvPr/>
         </p:nvSpPr>
@@ -10570,7 +10402,7 @@
       </p:sp>
       <p:sp>
         <p:nvSpPr>
-          <p:cNvPr id="15" name="TextBox 14"/>
+          <p:cNvPr id="14" name="TextBox 13"/>
           <p:cNvSpPr txBox="1"/>
           <p:nvPr/>
         </p:nvSpPr>
@@ -10610,7 +10442,7 @@
       </p:sp>
       <p:sp>
         <p:nvSpPr>
-          <p:cNvPr id="16" name="Oval 15"/>
+          <p:cNvPr id="15" name="Oval 14"/>
           <p:cNvSpPr/>
           <p:nvPr/>
         </p:nvSpPr>
@@ -10652,7 +10484,7 @@
       </p:sp>
       <p:sp>
         <p:nvSpPr>
-          <p:cNvPr id="17" name="TextBox 16"/>
+          <p:cNvPr id="16" name="TextBox 15"/>
           <p:cNvSpPr txBox="1"/>
           <p:nvPr/>
         </p:nvSpPr>
@@ -10692,14 +10524,14 @@
       </p:sp>
       <p:sp>
         <p:nvSpPr>
-          <p:cNvPr id="18" name="Rounded Rectangle 17"/>
+          <p:cNvPr id="17" name="Rounded Rectangle 16"/>
           <p:cNvSpPr/>
           <p:nvPr/>
         </p:nvSpPr>
         <p:spPr>
           <a:xfrm>
-            <a:off x="6876980" y="1483360"/>
-            <a:ext cx="841380" cy="182880"/>
+            <a:off x="6876030" y="1483360"/>
+            <a:ext cx="843280" cy="182880"/>
           </a:xfrm>
           <a:prstGeom prst="roundRect">
             <a:avLst>
@@ -10738,14 +10570,14 @@
       </p:sp>
       <p:sp>
         <p:nvSpPr>
-          <p:cNvPr id="19" name="TextBox 18"/>
-          <p:cNvSpPr txBox="1"/>
-          <p:nvPr/>
-        </p:nvSpPr>
-        <p:spPr>
-          <a:xfrm>
-            <a:off x="6888156" y="1480718"/>
-            <a:ext cx="819028" cy="178308"/>
+          <p:cNvPr id="18" name="TextBox 17"/>
+          <p:cNvSpPr txBox="1"/>
+          <p:nvPr/>
+        </p:nvSpPr>
+        <p:spPr>
+          <a:xfrm>
+            <a:off x="6887206" y="1480718"/>
+            <a:ext cx="820928" cy="178308"/>
           </a:xfrm>
           <a:prstGeom prst="rect">
             <a:avLst/>
@@ -10774,7 +10606,7 @@
       </p:sp>
       <p:sp>
         <p:nvSpPr>
-          <p:cNvPr id="20" name="Rounded Rectangle 19"/>
+          <p:cNvPr id="19" name="Rounded Rectangle 18"/>
           <p:cNvSpPr/>
           <p:nvPr/>
         </p:nvSpPr>
@@ -10819,7 +10651,7 @@
       </p:sp>
       <p:cxnSp>
         <p:nvCxnSpPr>
-          <p:cNvPr id="21" name="Connector 20"/>
+          <p:cNvPr id="20" name="Connector 19"/>
           <p:cNvCxnSpPr/>
           <p:nvPr/>
         </p:nvCxnSpPr>
@@ -10854,7 +10686,7 @@
       </p:cxnSp>
       <p:sp>
         <p:nvSpPr>
-          <p:cNvPr id="22" name="Oval 21"/>
+          <p:cNvPr id="21" name="Oval 20"/>
           <p:cNvSpPr/>
           <p:nvPr/>
         </p:nvSpPr>
@@ -10898,14 +10730,14 @@
       </p:sp>
       <p:sp>
         <p:nvSpPr>
-          <p:cNvPr id="23" name="TextBox 22"/>
-          <p:cNvSpPr txBox="1"/>
-          <p:nvPr/>
-        </p:nvSpPr>
-        <p:spPr>
-          <a:xfrm>
-            <a:off x="7192653" y="1803579"/>
-            <a:ext cx="193446" cy="219456"/>
+          <p:cNvPr id="22" name="TextBox 21"/>
+          <p:cNvSpPr txBox="1"/>
+          <p:nvPr/>
+        </p:nvSpPr>
+        <p:spPr>
+          <a:xfrm>
+            <a:off x="7192348" y="1803579"/>
+            <a:ext cx="194056" cy="219456"/>
           </a:xfrm>
           <a:prstGeom prst="rect">
             <a:avLst/>
@@ -10934,7 +10766,7 @@
       </p:sp>
       <p:cxnSp>
         <p:nvCxnSpPr>
-          <p:cNvPr id="24" name="Connector 23"/>
+          <p:cNvPr id="23" name="Connector 22"/>
           <p:cNvCxnSpPr/>
           <p:nvPr/>
         </p:nvCxnSpPr>
@@ -10948,8 +10780,9 @@
           </a:prstGeom>
           <a:ln w="20320">
             <a:solidFill>
-              <a:srgbClr val="5D7C80"/>
+              <a:srgbClr val="DB7B72"/>
             </a:solidFill>
+            <a:prstDash val="dash"/>
           </a:ln>
         </p:spPr>
         <p:style>
@@ -10969,7 +10802,7 @@
       </p:cxnSp>
       <p:sp>
         <p:nvSpPr>
-          <p:cNvPr id="25" name="Oval 24"/>
+          <p:cNvPr id="24" name="Oval 23"/>
           <p:cNvSpPr/>
           <p:nvPr/>
         </p:nvSpPr>
@@ -11013,14 +10846,14 @@
       </p:sp>
       <p:sp>
         <p:nvSpPr>
-          <p:cNvPr id="26" name="TextBox 25"/>
-          <p:cNvSpPr txBox="1"/>
-          <p:nvPr/>
-        </p:nvSpPr>
-        <p:spPr>
-          <a:xfrm>
-            <a:off x="6961931" y="2577411"/>
-            <a:ext cx="193446" cy="219456"/>
+          <p:cNvPr id="25" name="TextBox 24"/>
+          <p:cNvSpPr txBox="1"/>
+          <p:nvPr/>
+        </p:nvSpPr>
+        <p:spPr>
+          <a:xfrm>
+            <a:off x="6961626" y="2577411"/>
+            <a:ext cx="194056" cy="219456"/>
           </a:xfrm>
           <a:prstGeom prst="rect">
             <a:avLst/>
@@ -11049,7 +10882,7 @@
       </p:sp>
       <p:cxnSp>
         <p:nvCxnSpPr>
-          <p:cNvPr id="27" name="Connector 26"/>
+          <p:cNvPr id="26" name="Connector 25"/>
           <p:cNvCxnSpPr/>
           <p:nvPr/>
         </p:nvCxnSpPr>
@@ -11063,8 +10896,9 @@
           </a:prstGeom>
           <a:ln w="20320">
             <a:solidFill>
-              <a:srgbClr val="5D7C80"/>
+              <a:srgbClr val="DB7B72"/>
             </a:solidFill>
+            <a:prstDash val="dash"/>
           </a:ln>
         </p:spPr>
         <p:style>
@@ -11084,7 +10918,7 @@
       </p:cxnSp>
       <p:sp>
         <p:nvSpPr>
-          <p:cNvPr id="28" name="Oval 27"/>
+          <p:cNvPr id="27" name="Oval 26"/>
           <p:cNvSpPr/>
           <p:nvPr/>
         </p:nvSpPr>
@@ -11128,14 +10962,14 @@
       </p:sp>
       <p:sp>
         <p:nvSpPr>
-          <p:cNvPr id="29" name="TextBox 28"/>
-          <p:cNvSpPr txBox="1"/>
-          <p:nvPr/>
-        </p:nvSpPr>
-        <p:spPr>
-          <a:xfrm>
-            <a:off x="7842986" y="2645104"/>
-            <a:ext cx="193446" cy="219456"/>
+          <p:cNvPr id="28" name="TextBox 27"/>
+          <p:cNvSpPr txBox="1"/>
+          <p:nvPr/>
+        </p:nvSpPr>
+        <p:spPr>
+          <a:xfrm>
+            <a:off x="7842681" y="2645104"/>
+            <a:ext cx="194056" cy="219456"/>
           </a:xfrm>
           <a:prstGeom prst="rect">
             <a:avLst/>
@@ -11164,7 +10998,7 @@
       </p:sp>
       <p:cxnSp>
         <p:nvCxnSpPr>
-          <p:cNvPr id="30" name="Connector 29"/>
+          <p:cNvPr id="29" name="Connector 28"/>
           <p:cNvCxnSpPr/>
           <p:nvPr/>
         </p:nvCxnSpPr>
@@ -11178,8 +11012,9 @@
           </a:prstGeom>
           <a:ln w="20320">
             <a:solidFill>
-              <a:srgbClr val="5D7C80"/>
+              <a:srgbClr val="DB7B72"/>
             </a:solidFill>
+            <a:prstDash val="dash"/>
           </a:ln>
         </p:spPr>
         <p:style>
@@ -11199,7 +11034,7 @@
       </p:cxnSp>
       <p:sp>
         <p:nvSpPr>
-          <p:cNvPr id="31" name="Oval 30"/>
+          <p:cNvPr id="30" name="Oval 29"/>
           <p:cNvSpPr/>
           <p:nvPr/>
         </p:nvSpPr>
@@ -11243,14 +11078,14 @@
       </p:sp>
       <p:sp>
         <p:nvSpPr>
-          <p:cNvPr id="32" name="TextBox 31"/>
-          <p:cNvSpPr txBox="1"/>
-          <p:nvPr/>
-        </p:nvSpPr>
-        <p:spPr>
-          <a:xfrm>
-            <a:off x="8334688" y="3624932"/>
-            <a:ext cx="193446" cy="219456"/>
+          <p:cNvPr id="31" name="TextBox 30"/>
+          <p:cNvSpPr txBox="1"/>
+          <p:nvPr/>
+        </p:nvSpPr>
+        <p:spPr>
+          <a:xfrm>
+            <a:off x="8334383" y="3624932"/>
+            <a:ext cx="194056" cy="219456"/>
           </a:xfrm>
           <a:prstGeom prst="rect">
             <a:avLst/>
@@ -11279,7 +11114,7 @@
       </p:sp>
       <p:cxnSp>
         <p:nvCxnSpPr>
-          <p:cNvPr id="33" name="Connector 32"/>
+          <p:cNvPr id="32" name="Connector 31"/>
           <p:cNvCxnSpPr/>
           <p:nvPr/>
         </p:nvCxnSpPr>
@@ -11293,8 +11128,9 @@
           </a:prstGeom>
           <a:ln w="20320">
             <a:solidFill>
-              <a:srgbClr val="5D7C80"/>
+              <a:srgbClr val="DB7B72"/>
             </a:solidFill>
+            <a:prstDash val="dash"/>
           </a:ln>
         </p:spPr>
         <p:style>
@@ -11314,7 +11150,7 @@
       </p:cxnSp>
       <p:sp>
         <p:nvSpPr>
-          <p:cNvPr id="34" name="Oval 33"/>
+          <p:cNvPr id="33" name="Oval 32"/>
           <p:cNvSpPr/>
           <p:nvPr/>
         </p:nvSpPr>
@@ -11358,14 +11194,14 @@
       </p:sp>
       <p:sp>
         <p:nvSpPr>
-          <p:cNvPr id="35" name="TextBox 34"/>
-          <p:cNvSpPr txBox="1"/>
-          <p:nvPr/>
-        </p:nvSpPr>
-        <p:spPr>
-          <a:xfrm>
-            <a:off x="7419950" y="4008941"/>
-            <a:ext cx="193446" cy="219456"/>
+          <p:cNvPr id="34" name="TextBox 33"/>
+          <p:cNvSpPr txBox="1"/>
+          <p:nvPr/>
+        </p:nvSpPr>
+        <p:spPr>
+          <a:xfrm>
+            <a:off x="7419645" y="4008941"/>
+            <a:ext cx="194056" cy="219456"/>
           </a:xfrm>
           <a:prstGeom prst="rect">
             <a:avLst/>
@@ -11394,7 +11230,7 @@
       </p:sp>
       <p:cxnSp>
         <p:nvCxnSpPr>
-          <p:cNvPr id="36" name="Connector 35"/>
+          <p:cNvPr id="35" name="Connector 34"/>
           <p:cNvCxnSpPr/>
           <p:nvPr/>
         </p:nvCxnSpPr>
@@ -11408,8 +11244,9 @@
           </a:prstGeom>
           <a:ln w="20320">
             <a:solidFill>
-              <a:srgbClr val="5D7C80"/>
+              <a:srgbClr val="DB7B72"/>
             </a:solidFill>
+            <a:prstDash val="dash"/>
           </a:ln>
         </p:spPr>
         <p:style>
@@ -11429,7 +11266,7 @@
       </p:cxnSp>
       <p:sp>
         <p:nvSpPr>
-          <p:cNvPr id="37" name="Oval 36"/>
+          <p:cNvPr id="36" name="Oval 35"/>
           <p:cNvSpPr/>
           <p:nvPr/>
         </p:nvSpPr>
@@ -11473,14 +11310,14 @@
       </p:sp>
       <p:sp>
         <p:nvSpPr>
-          <p:cNvPr id="38" name="TextBox 37"/>
-          <p:cNvSpPr txBox="1"/>
-          <p:nvPr/>
-        </p:nvSpPr>
-        <p:spPr>
-          <a:xfrm>
-            <a:off x="8215429" y="4522396"/>
-            <a:ext cx="193446" cy="219456"/>
+          <p:cNvPr id="37" name="TextBox 36"/>
+          <p:cNvSpPr txBox="1"/>
+          <p:nvPr/>
+        </p:nvSpPr>
+        <p:spPr>
+          <a:xfrm>
+            <a:off x="8215124" y="4522396"/>
+            <a:ext cx="194056" cy="219456"/>
           </a:xfrm>
           <a:prstGeom prst="rect">
             <a:avLst/>
@@ -11509,7 +11346,7 @@
       </p:sp>
       <p:sp>
         <p:nvSpPr>
-          <p:cNvPr id="39" name="Oval 38"/>
+          <p:cNvPr id="38" name="Oval 37"/>
           <p:cNvSpPr/>
           <p:nvPr/>
         </p:nvSpPr>
@@ -11551,7 +11388,7 @@
       </p:sp>
       <p:sp>
         <p:nvSpPr>
-          <p:cNvPr id="40" name="Oval 39"/>
+          <p:cNvPr id="39" name="Oval 38"/>
           <p:cNvSpPr/>
           <p:nvPr/>
         </p:nvSpPr>
@@ -11595,14 +11432,14 @@
       </p:sp>
       <p:sp>
         <p:nvSpPr>
-          <p:cNvPr id="41" name="TextBox 40"/>
-          <p:cNvSpPr txBox="1"/>
-          <p:nvPr/>
-        </p:nvSpPr>
-        <p:spPr>
-          <a:xfrm>
-            <a:off x="6324060" y="2036061"/>
-            <a:ext cx="215727" cy="233172"/>
+          <p:cNvPr id="40" name="TextBox 39"/>
+          <p:cNvSpPr txBox="1"/>
+          <p:nvPr/>
+        </p:nvSpPr>
+        <p:spPr>
+          <a:xfrm>
+            <a:off x="6324227" y="2036061"/>
+            <a:ext cx="215392" cy="233172"/>
           </a:xfrm>
           <a:prstGeom prst="rect">
             <a:avLst/>
@@ -11631,7 +11468,7 @@
       </p:sp>
       <p:sp>
         <p:nvSpPr>
-          <p:cNvPr id="42" name="Oval 41"/>
+          <p:cNvPr id="41" name="Oval 40"/>
           <p:cNvSpPr/>
           <p:nvPr/>
         </p:nvSpPr>
@@ -11673,7 +11510,7 @@
       </p:sp>
       <p:sp>
         <p:nvSpPr>
-          <p:cNvPr id="43" name="Oval 42"/>
+          <p:cNvPr id="42" name="Oval 41"/>
           <p:cNvSpPr/>
           <p:nvPr/>
         </p:nvSpPr>
@@ -11717,14 +11554,14 @@
       </p:sp>
       <p:sp>
         <p:nvSpPr>
-          <p:cNvPr id="44" name="TextBox 43"/>
-          <p:cNvSpPr txBox="1"/>
-          <p:nvPr/>
-        </p:nvSpPr>
-        <p:spPr>
-          <a:xfrm>
-            <a:off x="8052789" y="1918004"/>
-            <a:ext cx="221254" cy="233172"/>
+          <p:cNvPr id="43" name="TextBox 42"/>
+          <p:cNvSpPr txBox="1"/>
+          <p:nvPr/>
+        </p:nvSpPr>
+        <p:spPr>
+          <a:xfrm>
+            <a:off x="8053180" y="1918004"/>
+            <a:ext cx="220472" cy="233172"/>
           </a:xfrm>
           <a:prstGeom prst="rect">
             <a:avLst/>
@@ -11753,7 +11590,7 @@
       </p:sp>
       <p:sp>
         <p:nvSpPr>
-          <p:cNvPr id="45" name="Oval 44"/>
+          <p:cNvPr id="44" name="Oval 43"/>
           <p:cNvSpPr/>
           <p:nvPr/>
         </p:nvSpPr>
@@ -11797,14 +11634,14 @@
       </p:sp>
       <p:sp>
         <p:nvSpPr>
-          <p:cNvPr id="46" name="TextBox 45"/>
-          <p:cNvSpPr txBox="1"/>
-          <p:nvPr/>
-        </p:nvSpPr>
-        <p:spPr>
-          <a:xfrm>
-            <a:off x="7385962" y="3374032"/>
-            <a:ext cx="216936" cy="233172"/>
+          <p:cNvPr id="45" name="TextBox 44"/>
+          <p:cNvSpPr txBox="1"/>
+          <p:nvPr/>
+        </p:nvSpPr>
+        <p:spPr>
+          <a:xfrm>
+            <a:off x="7386734" y="3374032"/>
+            <a:ext cx="215392" cy="233172"/>
           </a:xfrm>
           <a:prstGeom prst="rect">
             <a:avLst/>
@@ -11833,7 +11670,7 @@
       </p:sp>
       <p:sp>
         <p:nvSpPr>
-          <p:cNvPr id="47" name="Oval 46"/>
+          <p:cNvPr id="46" name="Oval 45"/>
           <p:cNvSpPr/>
           <p:nvPr/>
         </p:nvSpPr>
@@ -11877,14 +11714,14 @@
       </p:sp>
       <p:sp>
         <p:nvSpPr>
-          <p:cNvPr id="48" name="TextBox 47"/>
-          <p:cNvSpPr txBox="1"/>
-          <p:nvPr/>
-        </p:nvSpPr>
-        <p:spPr>
-          <a:xfrm>
-            <a:off x="9151799" y="4200427"/>
-            <a:ext cx="226954" cy="233172"/>
+          <p:cNvPr id="47" name="TextBox 46"/>
+          <p:cNvSpPr txBox="1"/>
+          <p:nvPr/>
+        </p:nvSpPr>
+        <p:spPr>
+          <a:xfrm>
+            <a:off x="9152500" y="4200427"/>
+            <a:ext cx="225551" cy="233172"/>
           </a:xfrm>
           <a:prstGeom prst="rect">
             <a:avLst/>
@@ -11913,7 +11750,7 @@
       </p:sp>
       <p:sp>
         <p:nvSpPr>
-          <p:cNvPr id="49" name="Oval 48"/>
+          <p:cNvPr id="48" name="Oval 47"/>
           <p:cNvSpPr/>
           <p:nvPr/>
         </p:nvSpPr>
@@ -11957,43 +11794,43 @@
       </p:sp>
       <p:sp>
         <p:nvSpPr>
+          <p:cNvPr id="49" name="TextBox 48"/>
+          <p:cNvSpPr txBox="1"/>
+          <p:nvPr/>
+        </p:nvSpPr>
+        <p:spPr>
+          <a:xfrm>
+            <a:off x="7192514" y="4712004"/>
+            <a:ext cx="210312" cy="233172"/>
+          </a:xfrm>
+          <a:prstGeom prst="rect">
+            <a:avLst/>
+          </a:prstGeom>
+          <a:noFill/>
+        </p:spPr>
+        <p:txBody>
+          <a:bodyPr wrap="none" lIns="0" rIns="0" tIns="0" bIns="0">
+            <a:spAutoFit/>
+          </a:bodyPr>
+          <a:lstStyle/>
+          <a:p>
+            <a:pPr algn="ctr"/>
+            <a:r>
+              <a:rPr sz="1360" b="1">
+                <a:solidFill>
+                  <a:srgbClr val="0B1B1F"/>
+                </a:solidFill>
+                <a:latin typeface="Noto Sans SC"/>
+                <a:ea typeface="Noto Sans SC"/>
+              </a:rPr>
+              <a:t>E</a:t>
+            </a:r>
+          </a:p>
+        </p:txBody>
+      </p:sp>
+      <p:sp>
+        <p:nvSpPr>
           <p:cNvPr id="50" name="TextBox 49"/>
-          <p:cNvSpPr txBox="1"/>
-          <p:nvPr/>
-        </p:nvSpPr>
-        <p:spPr>
-          <a:xfrm>
-            <a:off x="7192743" y="4712004"/>
-            <a:ext cx="209854" cy="233172"/>
-          </a:xfrm>
-          <a:prstGeom prst="rect">
-            <a:avLst/>
-          </a:prstGeom>
-          <a:noFill/>
-        </p:spPr>
-        <p:txBody>
-          <a:bodyPr wrap="none" lIns="0" rIns="0" tIns="0" bIns="0">
-            <a:spAutoFit/>
-          </a:bodyPr>
-          <a:lstStyle/>
-          <a:p>
-            <a:pPr algn="ctr"/>
-            <a:r>
-              <a:rPr sz="1360" b="1">
-                <a:solidFill>
-                  <a:srgbClr val="0B1B1F"/>
-                </a:solidFill>
-                <a:latin typeface="Noto Sans SC"/>
-                <a:ea typeface="Noto Sans SC"/>
-              </a:rPr>
-              <a:t>E</a:t>
-            </a:r>
-          </a:p>
-        </p:txBody>
-      </p:sp>
-      <p:sp>
-        <p:nvSpPr>
-          <p:cNvPr id="51" name="TextBox 50"/>
           <p:cNvSpPr txBox="1"/>
           <p:nvPr/>
         </p:nvSpPr>
@@ -12029,7 +11866,7 @@
       </p:sp>
       <p:sp>
         <p:nvSpPr>
-          <p:cNvPr id="52" name="TextBox 51"/>
+          <p:cNvPr id="51" name="TextBox 50"/>
           <p:cNvSpPr txBox="1"/>
           <p:nvPr/>
         </p:nvSpPr>
@@ -12065,7 +11902,7 @@
       </p:sp>
       <p:cxnSp>
         <p:nvCxnSpPr>
-          <p:cNvPr id="53" name="Connector 52"/>
+          <p:cNvPr id="52" name="Connector 51"/>
           <p:cNvCxnSpPr/>
           <p:nvPr/>
         </p:nvCxnSpPr>
@@ -12100,7 +11937,7 @@
       </p:cxnSp>
       <p:sp>
         <p:nvSpPr>
-          <p:cNvPr id="54" name="Rounded Rectangle 53"/>
+          <p:cNvPr id="53" name="Rounded Rectangle 52"/>
           <p:cNvSpPr/>
           <p:nvPr/>
         </p:nvSpPr>
@@ -12146,14 +11983,50 @@
       </p:sp>
       <p:sp>
         <p:nvSpPr>
+          <p:cNvPr id="54" name="TextBox 53"/>
+          <p:cNvSpPr txBox="1"/>
+          <p:nvPr/>
+        </p:nvSpPr>
+        <p:spPr>
+          <a:xfrm>
+            <a:off x="10024110" y="2079244"/>
+            <a:ext cx="424180" cy="240030"/>
+          </a:xfrm>
+          <a:prstGeom prst="rect">
+            <a:avLst/>
+          </a:prstGeom>
+          <a:noFill/>
+        </p:spPr>
+        <p:txBody>
+          <a:bodyPr wrap="none" lIns="0" rIns="0" tIns="0" bIns="0">
+            <a:spAutoFit/>
+          </a:bodyPr>
+          <a:lstStyle/>
+          <a:p>
+            <a:pPr algn="l"/>
+            <a:r>
+              <a:rPr sz="1400" b="0">
+                <a:solidFill>
+                  <a:srgbClr val="F2F3E9"/>
+                </a:solidFill>
+                <a:latin typeface="Noto Sans SC"/>
+                <a:ea typeface="Noto Sans SC"/>
+              </a:rPr>
+              <a:t>A–B</a:t>
+            </a:r>
+          </a:p>
+        </p:txBody>
+      </p:sp>
+      <p:sp>
+        <p:nvSpPr>
           <p:cNvPr id="55" name="TextBox 54"/>
           <p:cNvSpPr txBox="1"/>
           <p:nvPr/>
         </p:nvSpPr>
         <p:spPr>
           <a:xfrm>
-            <a:off x="10024110" y="2079244"/>
-            <a:ext cx="426897" cy="240030"/>
+            <a:off x="10976610" y="2079244"/>
+            <a:ext cx="208279" cy="240030"/>
           </a:xfrm>
           <a:prstGeom prst="rect">
             <a:avLst/>
@@ -12175,7 +12048,7 @@
                 <a:latin typeface="Noto Sans SC"/>
                 <a:ea typeface="Noto Sans SC"/>
               </a:rPr>
-              <a:t>A–B</a:t>
+              <a:t>5</a:t>
             </a:r>
           </a:p>
         </p:txBody>
@@ -12188,8 +12061,8 @@
         </p:nvSpPr>
         <p:spPr>
           <a:xfrm>
-            <a:off x="10976610" y="2079244"/>
-            <a:ext cx="205359" cy="240030"/>
+            <a:off x="10024110" y="2434844"/>
+            <a:ext cx="424180" cy="240030"/>
           </a:xfrm>
           <a:prstGeom prst="rect">
             <a:avLst/>
@@ -12211,6 +12084,42 @@
                 <a:latin typeface="Noto Sans SC"/>
                 <a:ea typeface="Noto Sans SC"/>
               </a:rPr>
+              <a:t>D–E</a:t>
+            </a:r>
+          </a:p>
+        </p:txBody>
+      </p:sp>
+      <p:sp>
+        <p:nvSpPr>
+          <p:cNvPr id="57" name="TextBox 56"/>
+          <p:cNvSpPr txBox="1"/>
+          <p:nvPr/>
+        </p:nvSpPr>
+        <p:spPr>
+          <a:xfrm>
+            <a:off x="10976610" y="2434844"/>
+            <a:ext cx="208279" cy="240030"/>
+          </a:xfrm>
+          <a:prstGeom prst="rect">
+            <a:avLst/>
+          </a:prstGeom>
+          <a:noFill/>
+        </p:spPr>
+        <p:txBody>
+          <a:bodyPr wrap="none" lIns="0" rIns="0" tIns="0" bIns="0">
+            <a:spAutoFit/>
+          </a:bodyPr>
+          <a:lstStyle/>
+          <a:p>
+            <a:pPr algn="l"/>
+            <a:r>
+              <a:rPr sz="1400" b="0">
+                <a:solidFill>
+                  <a:srgbClr val="F2F3E9"/>
+                </a:solidFill>
+                <a:latin typeface="Noto Sans SC"/>
+                <a:ea typeface="Noto Sans SC"/>
+              </a:rPr>
               <a:t>5</a:t>
             </a:r>
           </a:p>
@@ -12218,14 +12127,14 @@
       </p:sp>
       <p:sp>
         <p:nvSpPr>
-          <p:cNvPr id="57" name="TextBox 56"/>
-          <p:cNvSpPr txBox="1"/>
-          <p:nvPr/>
-        </p:nvSpPr>
-        <p:spPr>
-          <a:xfrm>
-            <a:off x="10024110" y="2434844"/>
-            <a:ext cx="429031" cy="240030"/>
+          <p:cNvPr id="58" name="TextBox 57"/>
+          <p:cNvSpPr txBox="1"/>
+          <p:nvPr/>
+        </p:nvSpPr>
+        <p:spPr>
+          <a:xfrm>
+            <a:off x="10024110" y="2790444"/>
+            <a:ext cx="430530" cy="240030"/>
           </a:xfrm>
           <a:prstGeom prst="rect">
             <a:avLst/>
@@ -12247,21 +12156,21 @@
                 <a:latin typeface="Noto Sans SC"/>
                 <a:ea typeface="Noto Sans SC"/>
               </a:rPr>
-              <a:t>D–E</a:t>
-            </a:r>
-          </a:p>
-        </p:txBody>
-      </p:sp>
-      <p:sp>
-        <p:nvSpPr>
-          <p:cNvPr id="58" name="TextBox 57"/>
-          <p:cNvSpPr txBox="1"/>
-          <p:nvPr/>
-        </p:nvSpPr>
-        <p:spPr>
-          <a:xfrm>
-            <a:off x="10976610" y="2434844"/>
-            <a:ext cx="205359" cy="240030"/>
+              <a:t>B–C</a:t>
+            </a:r>
+          </a:p>
+        </p:txBody>
+      </p:sp>
+      <p:sp>
+        <p:nvSpPr>
+          <p:cNvPr id="59" name="TextBox 58"/>
+          <p:cNvSpPr txBox="1"/>
+          <p:nvPr/>
+        </p:nvSpPr>
+        <p:spPr>
+          <a:xfrm>
+            <a:off x="10976610" y="2790444"/>
+            <a:ext cx="208279" cy="240030"/>
           </a:xfrm>
           <a:prstGeom prst="rect">
             <a:avLst/>
@@ -12283,21 +12192,21 @@
                 <a:latin typeface="Noto Sans SC"/>
                 <a:ea typeface="Noto Sans SC"/>
               </a:rPr>
-              <a:t>5</a:t>
-            </a:r>
-          </a:p>
-        </p:txBody>
-      </p:sp>
-      <p:sp>
-        <p:nvSpPr>
-          <p:cNvPr id="59" name="TextBox 58"/>
-          <p:cNvSpPr txBox="1"/>
-          <p:nvPr/>
-        </p:nvSpPr>
-        <p:spPr>
-          <a:xfrm>
-            <a:off x="10024110" y="2790444"/>
-            <a:ext cx="432231" cy="240030"/>
+              <a:t>4</a:t>
+            </a:r>
+          </a:p>
+        </p:txBody>
+      </p:sp>
+      <p:sp>
+        <p:nvSpPr>
+          <p:cNvPr id="60" name="TextBox 59"/>
+          <p:cNvSpPr txBox="1"/>
+          <p:nvPr/>
+        </p:nvSpPr>
+        <p:spPr>
+          <a:xfrm>
+            <a:off x="10024110" y="3146044"/>
+            <a:ext cx="436880" cy="240030"/>
           </a:xfrm>
           <a:prstGeom prst="rect">
             <a:avLst/>
@@ -12319,21 +12228,21 @@
                 <a:latin typeface="Noto Sans SC"/>
                 <a:ea typeface="Noto Sans SC"/>
               </a:rPr>
-              <a:t>B–C</a:t>
-            </a:r>
-          </a:p>
-        </p:txBody>
-      </p:sp>
-      <p:sp>
-        <p:nvSpPr>
-          <p:cNvPr id="60" name="TextBox 59"/>
-          <p:cNvSpPr txBox="1"/>
-          <p:nvPr/>
-        </p:nvSpPr>
-        <p:spPr>
-          <a:xfrm>
-            <a:off x="10976610" y="2790444"/>
-            <a:ext cx="205359" cy="240030"/>
+              <a:t>C–D</a:t>
+            </a:r>
+          </a:p>
+        </p:txBody>
+      </p:sp>
+      <p:sp>
+        <p:nvSpPr>
+          <p:cNvPr id="61" name="TextBox 60"/>
+          <p:cNvSpPr txBox="1"/>
+          <p:nvPr/>
+        </p:nvSpPr>
+        <p:spPr>
+          <a:xfrm>
+            <a:off x="10976610" y="3146044"/>
+            <a:ext cx="208279" cy="240030"/>
           </a:xfrm>
           <a:prstGeom prst="rect">
             <a:avLst/>
@@ -12355,78 +12264,6 @@
                 <a:latin typeface="Noto Sans SC"/>
                 <a:ea typeface="Noto Sans SC"/>
               </a:rPr>
-              <a:t>4</a:t>
-            </a:r>
-          </a:p>
-        </p:txBody>
-      </p:sp>
-      <p:sp>
-        <p:nvSpPr>
-          <p:cNvPr id="61" name="TextBox 60"/>
-          <p:cNvSpPr txBox="1"/>
-          <p:nvPr/>
-        </p:nvSpPr>
-        <p:spPr>
-          <a:xfrm>
-            <a:off x="10024110" y="3146044"/>
-            <a:ext cx="437743" cy="240030"/>
-          </a:xfrm>
-          <a:prstGeom prst="rect">
-            <a:avLst/>
-          </a:prstGeom>
-          <a:noFill/>
-        </p:spPr>
-        <p:txBody>
-          <a:bodyPr wrap="none" lIns="0" rIns="0" tIns="0" bIns="0">
-            <a:spAutoFit/>
-          </a:bodyPr>
-          <a:lstStyle/>
-          <a:p>
-            <a:pPr algn="l"/>
-            <a:r>
-              <a:rPr sz="1400" b="0">
-                <a:solidFill>
-                  <a:srgbClr val="F2F3E9"/>
-                </a:solidFill>
-                <a:latin typeface="Noto Sans SC"/>
-                <a:ea typeface="Noto Sans SC"/>
-              </a:rPr>
-              <a:t>C–D</a:t>
-            </a:r>
-          </a:p>
-        </p:txBody>
-      </p:sp>
-      <p:sp>
-        <p:nvSpPr>
-          <p:cNvPr id="62" name="TextBox 61"/>
-          <p:cNvSpPr txBox="1"/>
-          <p:nvPr/>
-        </p:nvSpPr>
-        <p:spPr>
-          <a:xfrm>
-            <a:off x="10976610" y="3146044"/>
-            <a:ext cx="205359" cy="240030"/>
-          </a:xfrm>
-          <a:prstGeom prst="rect">
-            <a:avLst/>
-          </a:prstGeom>
-          <a:noFill/>
-        </p:spPr>
-        <p:txBody>
-          <a:bodyPr wrap="none" lIns="0" rIns="0" tIns="0" bIns="0">
-            <a:spAutoFit/>
-          </a:bodyPr>
-          <a:lstStyle/>
-          <a:p>
-            <a:pPr algn="l"/>
-            <a:r>
-              <a:rPr sz="1400" b="0">
-                <a:solidFill>
-                  <a:srgbClr val="F2F3E9"/>
-                </a:solidFill>
-                <a:latin typeface="Noto Sans SC"/>
-                <a:ea typeface="Noto Sans SC"/>
-              </a:rPr>
               <a:t>2</a:t>
             </a:r>
           </a:p>
@@ -12434,14 +12271,14 @@
       </p:sp>
       <p:sp>
         <p:nvSpPr>
-          <p:cNvPr id="63" name="Rounded Rectangle 62"/>
+          <p:cNvPr id="62" name="Rounded Rectangle 61"/>
           <p:cNvSpPr/>
           <p:nvPr/>
         </p:nvSpPr>
         <p:spPr>
           <a:xfrm>
-            <a:off x="8012823" y="5880100"/>
-            <a:ext cx="1119352" cy="292100"/>
+            <a:off x="8013700" y="5880100"/>
+            <a:ext cx="1117600" cy="292100"/>
           </a:xfrm>
           <a:prstGeom prst="roundRect">
             <a:avLst>
@@ -12480,14 +12317,14 @@
       </p:sp>
       <p:sp>
         <p:nvSpPr>
-          <p:cNvPr id="64" name="TextBox 63"/>
-          <p:cNvSpPr txBox="1"/>
-          <p:nvPr/>
-        </p:nvSpPr>
-        <p:spPr>
-          <a:xfrm>
-            <a:off x="8058543" y="5940298"/>
-            <a:ext cx="1027912" cy="222885"/>
+          <p:cNvPr id="63" name="TextBox 62"/>
+          <p:cNvSpPr txBox="1"/>
+          <p:nvPr/>
+        </p:nvSpPr>
+        <p:spPr>
+          <a:xfrm>
+            <a:off x="8059420" y="5940298"/>
+            <a:ext cx="1026160" cy="222885"/>
           </a:xfrm>
           <a:prstGeom prst="rect">
             <a:avLst/>
@@ -12740,7 +12577,7 @@
         <p:spPr>
           <a:xfrm>
             <a:off x="563880" y="6512052"/>
-            <a:ext cx="1960626" cy="205740"/>
+            <a:ext cx="1951989" cy="205740"/>
           </a:xfrm>
           <a:prstGeom prst="rect">
             <a:avLst/>
@@ -12775,8 +12612,8 @@
         </p:nvSpPr>
         <p:spPr>
           <a:xfrm>
-            <a:off x="11108524" y="6499098"/>
-            <a:ext cx="561505" cy="222885"/>
+            <a:off x="11113770" y="6499098"/>
+            <a:ext cx="556260" cy="222885"/>
           </a:xfrm>
           <a:prstGeom prst="rect">
             <a:avLst/>
@@ -12805,43 +12642,7 @@
       </p:sp>
       <p:sp>
         <p:nvSpPr>
-          <p:cNvPr id="9" name="TextBox 8"/>
-          <p:cNvSpPr txBox="1"/>
-          <p:nvPr/>
-        </p:nvSpPr>
-        <p:spPr>
-          <a:xfrm>
-            <a:off x="10855147" y="377952"/>
-            <a:ext cx="811072" cy="205740"/>
-          </a:xfrm>
-          <a:prstGeom prst="rect">
-            <a:avLst/>
-          </a:prstGeom>
-          <a:noFill/>
-        </p:spPr>
-        <p:txBody>
-          <a:bodyPr wrap="none" lIns="0" rIns="0" tIns="0" bIns="0">
-            <a:spAutoFit/>
-          </a:bodyPr>
-          <a:lstStyle/>
-          <a:p>
-            <a:pPr algn="r"/>
-            <a:r>
-              <a:rPr sz="1200" b="0">
-                <a:solidFill>
-                  <a:srgbClr val="6F8F8F"/>
-                </a:solidFill>
-                <a:latin typeface="Noto Sans SC"/>
-                <a:ea typeface="Noto Sans SC"/>
-              </a:rPr>
-              <a:t>影片 00:58</a:t>
-            </a:r>
-          </a:p>
-        </p:txBody>
-      </p:sp>
-      <p:sp>
-        <p:nvSpPr>
-          <p:cNvPr id="10" name="Oval 9"/>
+          <p:cNvPr id="9" name="Oval 8"/>
           <p:cNvSpPr/>
           <p:nvPr/>
         </p:nvSpPr>
@@ -12883,7 +12684,7 @@
       </p:sp>
       <p:sp>
         <p:nvSpPr>
-          <p:cNvPr id="11" name="TextBox 10"/>
+          <p:cNvPr id="10" name="TextBox 9"/>
           <p:cNvSpPr txBox="1"/>
           <p:nvPr/>
         </p:nvSpPr>
@@ -12923,7 +12724,7 @@
       </p:sp>
       <p:sp>
         <p:nvSpPr>
-          <p:cNvPr id="12" name="Oval 11"/>
+          <p:cNvPr id="11" name="Oval 10"/>
           <p:cNvSpPr/>
           <p:nvPr/>
         </p:nvSpPr>
@@ -12965,7 +12766,7 @@
       </p:sp>
       <p:sp>
         <p:nvSpPr>
-          <p:cNvPr id="13" name="TextBox 12"/>
+          <p:cNvPr id="12" name="TextBox 11"/>
           <p:cNvSpPr txBox="1"/>
           <p:nvPr/>
         </p:nvSpPr>
@@ -13005,7 +12806,7 @@
       </p:sp>
       <p:sp>
         <p:nvSpPr>
-          <p:cNvPr id="14" name="Oval 13"/>
+          <p:cNvPr id="13" name="Oval 12"/>
           <p:cNvSpPr/>
           <p:nvPr/>
         </p:nvSpPr>
@@ -13047,7 +12848,7 @@
       </p:sp>
       <p:sp>
         <p:nvSpPr>
-          <p:cNvPr id="15" name="TextBox 14"/>
+          <p:cNvPr id="14" name="TextBox 13"/>
           <p:cNvSpPr txBox="1"/>
           <p:nvPr/>
         </p:nvSpPr>
@@ -13087,7 +12888,7 @@
       </p:sp>
       <p:sp>
         <p:nvSpPr>
-          <p:cNvPr id="16" name="Oval 15"/>
+          <p:cNvPr id="15" name="Oval 14"/>
           <p:cNvSpPr/>
           <p:nvPr/>
         </p:nvSpPr>
@@ -13129,7 +12930,7 @@
       </p:sp>
       <p:sp>
         <p:nvSpPr>
-          <p:cNvPr id="17" name="TextBox 16"/>
+          <p:cNvPr id="16" name="TextBox 15"/>
           <p:cNvSpPr txBox="1"/>
           <p:nvPr/>
         </p:nvSpPr>
@@ -13169,14 +12970,14 @@
       </p:sp>
       <p:sp>
         <p:nvSpPr>
-          <p:cNvPr id="18" name="Rounded Rectangle 17"/>
+          <p:cNvPr id="17" name="Rounded Rectangle 16"/>
           <p:cNvSpPr/>
           <p:nvPr/>
         </p:nvSpPr>
         <p:spPr>
           <a:xfrm>
-            <a:off x="6899244" y="1483360"/>
-            <a:ext cx="928024" cy="182880"/>
+            <a:off x="6898437" y="1483360"/>
+            <a:ext cx="929640" cy="182880"/>
           </a:xfrm>
           <a:prstGeom prst="roundRect">
             <a:avLst>
@@ -13215,14 +13016,14 @@
       </p:sp>
       <p:sp>
         <p:nvSpPr>
-          <p:cNvPr id="19" name="TextBox 18"/>
-          <p:cNvSpPr txBox="1"/>
-          <p:nvPr/>
-        </p:nvSpPr>
-        <p:spPr>
-          <a:xfrm>
-            <a:off x="6910420" y="1480718"/>
-            <a:ext cx="905672" cy="178308"/>
+          <p:cNvPr id="18" name="TextBox 17"/>
+          <p:cNvSpPr txBox="1"/>
+          <p:nvPr/>
+        </p:nvSpPr>
+        <p:spPr>
+          <a:xfrm>
+            <a:off x="6909613" y="1480718"/>
+            <a:ext cx="907288" cy="178308"/>
           </a:xfrm>
           <a:prstGeom prst="rect">
             <a:avLst/>
@@ -13251,7 +13052,7 @@
       </p:sp>
       <p:sp>
         <p:nvSpPr>
-          <p:cNvPr id="20" name="Rounded Rectangle 19"/>
+          <p:cNvPr id="19" name="Rounded Rectangle 18"/>
           <p:cNvSpPr/>
           <p:nvPr/>
         </p:nvSpPr>
@@ -13296,7 +13097,7 @@
       </p:sp>
       <p:cxnSp>
         <p:nvCxnSpPr>
-          <p:cNvPr id="21" name="Connector 20"/>
+          <p:cNvPr id="20" name="Connector 19"/>
           <p:cNvCxnSpPr/>
           <p:nvPr/>
         </p:nvCxnSpPr>
@@ -13331,7 +13132,7 @@
       </p:cxnSp>
       <p:sp>
         <p:nvSpPr>
-          <p:cNvPr id="22" name="Oval 21"/>
+          <p:cNvPr id="21" name="Oval 20"/>
           <p:cNvSpPr/>
           <p:nvPr/>
         </p:nvSpPr>
@@ -13375,14 +13176,14 @@
       </p:sp>
       <p:sp>
         <p:nvSpPr>
-          <p:cNvPr id="23" name="TextBox 22"/>
-          <p:cNvSpPr txBox="1"/>
-          <p:nvPr/>
-        </p:nvSpPr>
-        <p:spPr>
-          <a:xfrm>
-            <a:off x="7192653" y="1803579"/>
-            <a:ext cx="193446" cy="219456"/>
+          <p:cNvPr id="22" name="TextBox 21"/>
+          <p:cNvSpPr txBox="1"/>
+          <p:nvPr/>
+        </p:nvSpPr>
+        <p:spPr>
+          <a:xfrm>
+            <a:off x="7192348" y="1803579"/>
+            <a:ext cx="194056" cy="219456"/>
           </a:xfrm>
           <a:prstGeom prst="rect">
             <a:avLst/>
@@ -13411,7 +13212,7 @@
       </p:sp>
       <p:cxnSp>
         <p:nvCxnSpPr>
-          <p:cNvPr id="24" name="Connector 23"/>
+          <p:cNvPr id="23" name="Connector 22"/>
           <p:cNvCxnSpPr/>
           <p:nvPr/>
         </p:nvCxnSpPr>
@@ -13446,7 +13247,7 @@
       </p:cxnSp>
       <p:sp>
         <p:nvSpPr>
-          <p:cNvPr id="25" name="Oval 24"/>
+          <p:cNvPr id="24" name="Oval 23"/>
           <p:cNvSpPr/>
           <p:nvPr/>
         </p:nvSpPr>
@@ -13490,14 +13291,14 @@
       </p:sp>
       <p:sp>
         <p:nvSpPr>
-          <p:cNvPr id="26" name="TextBox 25"/>
-          <p:cNvSpPr txBox="1"/>
-          <p:nvPr/>
-        </p:nvSpPr>
-        <p:spPr>
-          <a:xfrm>
-            <a:off x="6961931" y="2577411"/>
-            <a:ext cx="193446" cy="219456"/>
+          <p:cNvPr id="25" name="TextBox 24"/>
+          <p:cNvSpPr txBox="1"/>
+          <p:nvPr/>
+        </p:nvSpPr>
+        <p:spPr>
+          <a:xfrm>
+            <a:off x="6961626" y="2577411"/>
+            <a:ext cx="194056" cy="219456"/>
           </a:xfrm>
           <a:prstGeom prst="rect">
             <a:avLst/>
@@ -13526,7 +13327,7 @@
       </p:sp>
       <p:cxnSp>
         <p:nvCxnSpPr>
-          <p:cNvPr id="27" name="Connector 26"/>
+          <p:cNvPr id="26" name="Connector 25"/>
           <p:cNvCxnSpPr/>
           <p:nvPr/>
         </p:nvCxnSpPr>
@@ -13561,7 +13362,7 @@
       </p:cxnSp>
       <p:sp>
         <p:nvSpPr>
-          <p:cNvPr id="28" name="Oval 27"/>
+          <p:cNvPr id="27" name="Oval 26"/>
           <p:cNvSpPr/>
           <p:nvPr/>
         </p:nvSpPr>
@@ -13605,14 +13406,14 @@
       </p:sp>
       <p:sp>
         <p:nvSpPr>
-          <p:cNvPr id="29" name="TextBox 28"/>
-          <p:cNvSpPr txBox="1"/>
-          <p:nvPr/>
-        </p:nvSpPr>
-        <p:spPr>
-          <a:xfrm>
-            <a:off x="7842986" y="2645104"/>
-            <a:ext cx="193446" cy="219456"/>
+          <p:cNvPr id="28" name="TextBox 27"/>
+          <p:cNvSpPr txBox="1"/>
+          <p:nvPr/>
+        </p:nvSpPr>
+        <p:spPr>
+          <a:xfrm>
+            <a:off x="7842681" y="2645104"/>
+            <a:ext cx="194056" cy="219456"/>
           </a:xfrm>
           <a:prstGeom prst="rect">
             <a:avLst/>
@@ -13641,7 +13442,7 @@
       </p:sp>
       <p:cxnSp>
         <p:nvCxnSpPr>
-          <p:cNvPr id="30" name="Connector 29"/>
+          <p:cNvPr id="29" name="Connector 28"/>
           <p:cNvCxnSpPr/>
           <p:nvPr/>
         </p:nvCxnSpPr>
@@ -13655,8 +13456,9 @@
           </a:prstGeom>
           <a:ln w="20320">
             <a:solidFill>
-              <a:srgbClr val="5D7C80"/>
+              <a:srgbClr val="DB7B72"/>
             </a:solidFill>
+            <a:prstDash val="dash"/>
           </a:ln>
         </p:spPr>
         <p:style>
@@ -13676,7 +13478,7 @@
       </p:cxnSp>
       <p:sp>
         <p:nvSpPr>
-          <p:cNvPr id="31" name="Oval 30"/>
+          <p:cNvPr id="30" name="Oval 29"/>
           <p:cNvSpPr/>
           <p:nvPr/>
         </p:nvSpPr>
@@ -13720,14 +13522,14 @@
       </p:sp>
       <p:sp>
         <p:nvSpPr>
-          <p:cNvPr id="32" name="TextBox 31"/>
-          <p:cNvSpPr txBox="1"/>
-          <p:nvPr/>
-        </p:nvSpPr>
-        <p:spPr>
-          <a:xfrm>
-            <a:off x="8334688" y="3624932"/>
-            <a:ext cx="193446" cy="219456"/>
+          <p:cNvPr id="31" name="TextBox 30"/>
+          <p:cNvSpPr txBox="1"/>
+          <p:nvPr/>
+        </p:nvSpPr>
+        <p:spPr>
+          <a:xfrm>
+            <a:off x="8334383" y="3624932"/>
+            <a:ext cx="194056" cy="219456"/>
           </a:xfrm>
           <a:prstGeom prst="rect">
             <a:avLst/>
@@ -13756,7 +13558,7 @@
       </p:sp>
       <p:cxnSp>
         <p:nvCxnSpPr>
-          <p:cNvPr id="33" name="Connector 32"/>
+          <p:cNvPr id="32" name="Connector 31"/>
           <p:cNvCxnSpPr/>
           <p:nvPr/>
         </p:nvCxnSpPr>
@@ -13770,8 +13572,9 @@
           </a:prstGeom>
           <a:ln w="20320">
             <a:solidFill>
-              <a:srgbClr val="5D7C80"/>
+              <a:srgbClr val="DB7B72"/>
             </a:solidFill>
+            <a:prstDash val="dash"/>
           </a:ln>
         </p:spPr>
         <p:style>
@@ -13791,7 +13594,7 @@
       </p:cxnSp>
       <p:sp>
         <p:nvSpPr>
-          <p:cNvPr id="34" name="Oval 33"/>
+          <p:cNvPr id="33" name="Oval 32"/>
           <p:cNvSpPr/>
           <p:nvPr/>
         </p:nvSpPr>
@@ -13835,14 +13638,14 @@
       </p:sp>
       <p:sp>
         <p:nvSpPr>
-          <p:cNvPr id="35" name="TextBox 34"/>
-          <p:cNvSpPr txBox="1"/>
-          <p:nvPr/>
-        </p:nvSpPr>
-        <p:spPr>
-          <a:xfrm>
-            <a:off x="7419950" y="4008941"/>
-            <a:ext cx="193446" cy="219456"/>
+          <p:cNvPr id="34" name="TextBox 33"/>
+          <p:cNvSpPr txBox="1"/>
+          <p:nvPr/>
+        </p:nvSpPr>
+        <p:spPr>
+          <a:xfrm>
+            <a:off x="7419645" y="4008941"/>
+            <a:ext cx="194056" cy="219456"/>
           </a:xfrm>
           <a:prstGeom prst="rect">
             <a:avLst/>
@@ -13871,7 +13674,7 @@
       </p:sp>
       <p:cxnSp>
         <p:nvCxnSpPr>
-          <p:cNvPr id="36" name="Connector 35"/>
+          <p:cNvPr id="35" name="Connector 34"/>
           <p:cNvCxnSpPr/>
           <p:nvPr/>
         </p:nvCxnSpPr>
@@ -13885,8 +13688,9 @@
           </a:prstGeom>
           <a:ln w="20320">
             <a:solidFill>
-              <a:srgbClr val="5D7C80"/>
+              <a:srgbClr val="DB7B72"/>
             </a:solidFill>
+            <a:prstDash val="dash"/>
           </a:ln>
         </p:spPr>
         <p:style>
@@ -13906,7 +13710,7 @@
       </p:cxnSp>
       <p:sp>
         <p:nvSpPr>
-          <p:cNvPr id="37" name="Oval 36"/>
+          <p:cNvPr id="36" name="Oval 35"/>
           <p:cNvSpPr/>
           <p:nvPr/>
         </p:nvSpPr>
@@ -13950,14 +13754,14 @@
       </p:sp>
       <p:sp>
         <p:nvSpPr>
-          <p:cNvPr id="38" name="TextBox 37"/>
-          <p:cNvSpPr txBox="1"/>
-          <p:nvPr/>
-        </p:nvSpPr>
-        <p:spPr>
-          <a:xfrm>
-            <a:off x="8215429" y="4522396"/>
-            <a:ext cx="193446" cy="219456"/>
+          <p:cNvPr id="37" name="TextBox 36"/>
+          <p:cNvSpPr txBox="1"/>
+          <p:nvPr/>
+        </p:nvSpPr>
+        <p:spPr>
+          <a:xfrm>
+            <a:off x="8215124" y="4522396"/>
+            <a:ext cx="194056" cy="219456"/>
           </a:xfrm>
           <a:prstGeom prst="rect">
             <a:avLst/>
@@ -13986,7 +13790,7 @@
       </p:sp>
       <p:sp>
         <p:nvSpPr>
-          <p:cNvPr id="39" name="Oval 38"/>
+          <p:cNvPr id="38" name="Oval 37"/>
           <p:cNvSpPr/>
           <p:nvPr/>
         </p:nvSpPr>
@@ -14028,7 +13832,7 @@
       </p:sp>
       <p:sp>
         <p:nvSpPr>
-          <p:cNvPr id="40" name="Oval 39"/>
+          <p:cNvPr id="39" name="Oval 38"/>
           <p:cNvSpPr/>
           <p:nvPr/>
         </p:nvSpPr>
@@ -14072,14 +13876,14 @@
       </p:sp>
       <p:sp>
         <p:nvSpPr>
-          <p:cNvPr id="41" name="TextBox 40"/>
-          <p:cNvSpPr txBox="1"/>
-          <p:nvPr/>
-        </p:nvSpPr>
-        <p:spPr>
-          <a:xfrm>
-            <a:off x="6324060" y="2036061"/>
-            <a:ext cx="215727" cy="233172"/>
+          <p:cNvPr id="40" name="TextBox 39"/>
+          <p:cNvSpPr txBox="1"/>
+          <p:nvPr/>
+        </p:nvSpPr>
+        <p:spPr>
+          <a:xfrm>
+            <a:off x="6324227" y="2036061"/>
+            <a:ext cx="215392" cy="233172"/>
           </a:xfrm>
           <a:prstGeom prst="rect">
             <a:avLst/>
@@ -14108,7 +13912,7 @@
       </p:sp>
       <p:sp>
         <p:nvSpPr>
-          <p:cNvPr id="42" name="Oval 41"/>
+          <p:cNvPr id="41" name="Oval 40"/>
           <p:cNvSpPr/>
           <p:nvPr/>
         </p:nvSpPr>
@@ -14150,7 +13954,7 @@
       </p:sp>
       <p:sp>
         <p:nvSpPr>
-          <p:cNvPr id="43" name="Oval 42"/>
+          <p:cNvPr id="42" name="Oval 41"/>
           <p:cNvSpPr/>
           <p:nvPr/>
         </p:nvSpPr>
@@ -14194,14 +13998,14 @@
       </p:sp>
       <p:sp>
         <p:nvSpPr>
-          <p:cNvPr id="44" name="TextBox 43"/>
-          <p:cNvSpPr txBox="1"/>
-          <p:nvPr/>
-        </p:nvSpPr>
-        <p:spPr>
-          <a:xfrm>
-            <a:off x="8052789" y="1918004"/>
-            <a:ext cx="221254" cy="233172"/>
+          <p:cNvPr id="43" name="TextBox 42"/>
+          <p:cNvSpPr txBox="1"/>
+          <p:nvPr/>
+        </p:nvSpPr>
+        <p:spPr>
+          <a:xfrm>
+            <a:off x="8053180" y="1918004"/>
+            <a:ext cx="220472" cy="233172"/>
           </a:xfrm>
           <a:prstGeom prst="rect">
             <a:avLst/>
@@ -14230,7 +14034,7 @@
       </p:sp>
       <p:sp>
         <p:nvSpPr>
-          <p:cNvPr id="45" name="Oval 44"/>
+          <p:cNvPr id="44" name="Oval 43"/>
           <p:cNvSpPr/>
           <p:nvPr/>
         </p:nvSpPr>
@@ -14272,7 +14076,7 @@
       </p:sp>
       <p:sp>
         <p:nvSpPr>
-          <p:cNvPr id="46" name="Oval 45"/>
+          <p:cNvPr id="45" name="Oval 44"/>
           <p:cNvSpPr/>
           <p:nvPr/>
         </p:nvSpPr>
@@ -14316,14 +14120,14 @@
       </p:sp>
       <p:sp>
         <p:nvSpPr>
-          <p:cNvPr id="47" name="TextBox 46"/>
-          <p:cNvSpPr txBox="1"/>
-          <p:nvPr/>
-        </p:nvSpPr>
-        <p:spPr>
-          <a:xfrm>
-            <a:off x="7385962" y="3374032"/>
-            <a:ext cx="216936" cy="233172"/>
+          <p:cNvPr id="46" name="TextBox 45"/>
+          <p:cNvSpPr txBox="1"/>
+          <p:nvPr/>
+        </p:nvSpPr>
+        <p:spPr>
+          <a:xfrm>
+            <a:off x="7386734" y="3374032"/>
+            <a:ext cx="215392" cy="233172"/>
           </a:xfrm>
           <a:prstGeom prst="rect">
             <a:avLst/>
@@ -14352,7 +14156,7 @@
       </p:sp>
       <p:sp>
         <p:nvSpPr>
-          <p:cNvPr id="48" name="Oval 47"/>
+          <p:cNvPr id="47" name="Oval 46"/>
           <p:cNvSpPr/>
           <p:nvPr/>
         </p:nvSpPr>
@@ -14396,14 +14200,14 @@
       </p:sp>
       <p:sp>
         <p:nvSpPr>
-          <p:cNvPr id="49" name="TextBox 48"/>
-          <p:cNvSpPr txBox="1"/>
-          <p:nvPr/>
-        </p:nvSpPr>
-        <p:spPr>
-          <a:xfrm>
-            <a:off x="9151799" y="4200427"/>
-            <a:ext cx="226954" cy="233172"/>
+          <p:cNvPr id="48" name="TextBox 47"/>
+          <p:cNvSpPr txBox="1"/>
+          <p:nvPr/>
+        </p:nvSpPr>
+        <p:spPr>
+          <a:xfrm>
+            <a:off x="9152500" y="4200427"/>
+            <a:ext cx="225551" cy="233172"/>
           </a:xfrm>
           <a:prstGeom prst="rect">
             <a:avLst/>
@@ -14432,7 +14236,7 @@
       </p:sp>
       <p:sp>
         <p:nvSpPr>
-          <p:cNvPr id="50" name="Oval 49"/>
+          <p:cNvPr id="49" name="Oval 48"/>
           <p:cNvSpPr/>
           <p:nvPr/>
         </p:nvSpPr>
@@ -14476,43 +14280,43 @@
       </p:sp>
       <p:sp>
         <p:nvSpPr>
+          <p:cNvPr id="50" name="TextBox 49"/>
+          <p:cNvSpPr txBox="1"/>
+          <p:nvPr/>
+        </p:nvSpPr>
+        <p:spPr>
+          <a:xfrm>
+            <a:off x="7192514" y="4712004"/>
+            <a:ext cx="210312" cy="233172"/>
+          </a:xfrm>
+          <a:prstGeom prst="rect">
+            <a:avLst/>
+          </a:prstGeom>
+          <a:noFill/>
+        </p:spPr>
+        <p:txBody>
+          <a:bodyPr wrap="none" lIns="0" rIns="0" tIns="0" bIns="0">
+            <a:spAutoFit/>
+          </a:bodyPr>
+          <a:lstStyle/>
+          <a:p>
+            <a:pPr algn="ctr"/>
+            <a:r>
+              <a:rPr sz="1360" b="1">
+                <a:solidFill>
+                  <a:srgbClr val="0B1B1F"/>
+                </a:solidFill>
+                <a:latin typeface="Noto Sans SC"/>
+                <a:ea typeface="Noto Sans SC"/>
+              </a:rPr>
+              <a:t>E</a:t>
+            </a:r>
+          </a:p>
+        </p:txBody>
+      </p:sp>
+      <p:sp>
+        <p:nvSpPr>
           <p:cNvPr id="51" name="TextBox 50"/>
-          <p:cNvSpPr txBox="1"/>
-          <p:nvPr/>
-        </p:nvSpPr>
-        <p:spPr>
-          <a:xfrm>
-            <a:off x="7192743" y="4712004"/>
-            <a:ext cx="209854" cy="233172"/>
-          </a:xfrm>
-          <a:prstGeom prst="rect">
-            <a:avLst/>
-          </a:prstGeom>
-          <a:noFill/>
-        </p:spPr>
-        <p:txBody>
-          <a:bodyPr wrap="none" lIns="0" rIns="0" tIns="0" bIns="0">
-            <a:spAutoFit/>
-          </a:bodyPr>
-          <a:lstStyle/>
-          <a:p>
-            <a:pPr algn="ctr"/>
-            <a:r>
-              <a:rPr sz="1360" b="1">
-                <a:solidFill>
-                  <a:srgbClr val="0B1B1F"/>
-                </a:solidFill>
-                <a:latin typeface="Noto Sans SC"/>
-                <a:ea typeface="Noto Sans SC"/>
-              </a:rPr>
-              <a:t>E</a:t>
-            </a:r>
-          </a:p>
-        </p:txBody>
-      </p:sp>
-      <p:sp>
-        <p:nvSpPr>
-          <p:cNvPr id="52" name="TextBox 51"/>
           <p:cNvSpPr txBox="1"/>
           <p:nvPr/>
         </p:nvSpPr>
@@ -14548,7 +14352,7 @@
       </p:sp>
       <p:sp>
         <p:nvSpPr>
-          <p:cNvPr id="53" name="TextBox 52"/>
+          <p:cNvPr id="52" name="TextBox 51"/>
           <p:cNvSpPr txBox="1"/>
           <p:nvPr/>
         </p:nvSpPr>
@@ -14584,7 +14388,7 @@
       </p:sp>
       <p:cxnSp>
         <p:nvCxnSpPr>
-          <p:cNvPr id="54" name="Connector 53"/>
+          <p:cNvPr id="53" name="Connector 52"/>
           <p:cNvCxnSpPr/>
           <p:nvPr/>
         </p:nvCxnSpPr>
@@ -14619,7 +14423,7 @@
       </p:cxnSp>
       <p:sp>
         <p:nvSpPr>
-          <p:cNvPr id="55" name="Rounded Rectangle 54"/>
+          <p:cNvPr id="54" name="Rounded Rectangle 53"/>
           <p:cNvSpPr/>
           <p:nvPr/>
         </p:nvSpPr>
@@ -14665,14 +14469,50 @@
       </p:sp>
       <p:sp>
         <p:nvSpPr>
+          <p:cNvPr id="55" name="TextBox 54"/>
+          <p:cNvSpPr txBox="1"/>
+          <p:nvPr/>
+        </p:nvSpPr>
+        <p:spPr>
+          <a:xfrm>
+            <a:off x="10024110" y="2079244"/>
+            <a:ext cx="538480" cy="240030"/>
+          </a:xfrm>
+          <a:prstGeom prst="rect">
+            <a:avLst/>
+          </a:prstGeom>
+          <a:noFill/>
+        </p:spPr>
+        <p:txBody>
+          <a:bodyPr wrap="none" lIns="0" rIns="0" tIns="0" bIns="0">
+            <a:spAutoFit/>
+          </a:bodyPr>
+          <a:lstStyle/>
+          <a:p>
+            <a:pPr algn="l"/>
+            <a:r>
+              <a:rPr sz="1400" b="0">
+                <a:solidFill>
+                  <a:srgbClr val="F2F3E9"/>
+                </a:solidFill>
+                <a:latin typeface="Noto Sans SC"/>
+                <a:ea typeface="Noto Sans SC"/>
+              </a:rPr>
+              <a:t>AB–C</a:t>
+            </a:r>
+          </a:p>
+        </p:txBody>
+      </p:sp>
+      <p:sp>
+        <p:nvSpPr>
           <p:cNvPr id="56" name="TextBox 55"/>
           <p:cNvSpPr txBox="1"/>
           <p:nvPr/>
         </p:nvSpPr>
         <p:spPr>
           <a:xfrm>
-            <a:off x="10024110" y="2079244"/>
-            <a:ext cx="540334" cy="240030"/>
+            <a:off x="10976610" y="2079244"/>
+            <a:ext cx="208279" cy="240030"/>
           </a:xfrm>
           <a:prstGeom prst="rect">
             <a:avLst/>
@@ -14694,7 +14534,7 @@
                 <a:latin typeface="Noto Sans SC"/>
                 <a:ea typeface="Noto Sans SC"/>
               </a:rPr>
-              <a:t>AB–C</a:t>
+              <a:t>5</a:t>
             </a:r>
           </a:p>
         </p:txBody>
@@ -14707,8 +14547,8 @@
         </p:nvSpPr>
         <p:spPr>
           <a:xfrm>
-            <a:off x="10976610" y="2079244"/>
-            <a:ext cx="205359" cy="240030"/>
+            <a:off x="10024110" y="2434844"/>
+            <a:ext cx="424180" cy="240030"/>
           </a:xfrm>
           <a:prstGeom prst="rect">
             <a:avLst/>
@@ -14730,6 +14570,42 @@
                 <a:latin typeface="Noto Sans SC"/>
                 <a:ea typeface="Noto Sans SC"/>
               </a:rPr>
+              <a:t>D–E</a:t>
+            </a:r>
+          </a:p>
+        </p:txBody>
+      </p:sp>
+      <p:sp>
+        <p:nvSpPr>
+          <p:cNvPr id="58" name="TextBox 57"/>
+          <p:cNvSpPr txBox="1"/>
+          <p:nvPr/>
+        </p:nvSpPr>
+        <p:spPr>
+          <a:xfrm>
+            <a:off x="10976610" y="2434844"/>
+            <a:ext cx="208279" cy="240030"/>
+          </a:xfrm>
+          <a:prstGeom prst="rect">
+            <a:avLst/>
+          </a:prstGeom>
+          <a:noFill/>
+        </p:spPr>
+        <p:txBody>
+          <a:bodyPr wrap="none" lIns="0" rIns="0" tIns="0" bIns="0">
+            <a:spAutoFit/>
+          </a:bodyPr>
+          <a:lstStyle/>
+          <a:p>
+            <a:pPr algn="l"/>
+            <a:r>
+              <a:rPr sz="1400" b="0">
+                <a:solidFill>
+                  <a:srgbClr val="F2F3E9"/>
+                </a:solidFill>
+                <a:latin typeface="Noto Sans SC"/>
+                <a:ea typeface="Noto Sans SC"/>
+              </a:rPr>
               <a:t>5</a:t>
             </a:r>
           </a:p>
@@ -14737,14 +14613,14 @@
       </p:sp>
       <p:sp>
         <p:nvSpPr>
-          <p:cNvPr id="58" name="TextBox 57"/>
-          <p:cNvSpPr txBox="1"/>
-          <p:nvPr/>
-        </p:nvSpPr>
-        <p:spPr>
-          <a:xfrm>
-            <a:off x="10024110" y="2434844"/>
-            <a:ext cx="429031" cy="240030"/>
+          <p:cNvPr id="59" name="TextBox 58"/>
+          <p:cNvSpPr txBox="1"/>
+          <p:nvPr/>
+        </p:nvSpPr>
+        <p:spPr>
+          <a:xfrm>
+            <a:off x="10024110" y="2790444"/>
+            <a:ext cx="436880" cy="240030"/>
           </a:xfrm>
           <a:prstGeom prst="rect">
             <a:avLst/>
@@ -14766,21 +14642,21 @@
                 <a:latin typeface="Noto Sans SC"/>
                 <a:ea typeface="Noto Sans SC"/>
               </a:rPr>
-              <a:t>D–E</a:t>
-            </a:r>
-          </a:p>
-        </p:txBody>
-      </p:sp>
-      <p:sp>
-        <p:nvSpPr>
-          <p:cNvPr id="59" name="TextBox 58"/>
-          <p:cNvSpPr txBox="1"/>
-          <p:nvPr/>
-        </p:nvSpPr>
-        <p:spPr>
-          <a:xfrm>
-            <a:off x="10976610" y="2434844"/>
-            <a:ext cx="205359" cy="240030"/>
+              <a:t>C–D</a:t>
+            </a:r>
+          </a:p>
+        </p:txBody>
+      </p:sp>
+      <p:sp>
+        <p:nvSpPr>
+          <p:cNvPr id="60" name="TextBox 59"/>
+          <p:cNvSpPr txBox="1"/>
+          <p:nvPr/>
+        </p:nvSpPr>
+        <p:spPr>
+          <a:xfrm>
+            <a:off x="10976610" y="2790444"/>
+            <a:ext cx="208279" cy="240030"/>
           </a:xfrm>
           <a:prstGeom prst="rect">
             <a:avLst/>
@@ -14802,21 +14678,21 @@
                 <a:latin typeface="Noto Sans SC"/>
                 <a:ea typeface="Noto Sans SC"/>
               </a:rPr>
-              <a:t>5</a:t>
-            </a:r>
-          </a:p>
-        </p:txBody>
-      </p:sp>
-      <p:sp>
-        <p:nvSpPr>
-          <p:cNvPr id="60" name="TextBox 59"/>
-          <p:cNvSpPr txBox="1"/>
-          <p:nvPr/>
-        </p:nvSpPr>
-        <p:spPr>
-          <a:xfrm>
-            <a:off x="10024110" y="2790444"/>
-            <a:ext cx="437743" cy="240030"/>
+              <a:t>2</a:t>
+            </a:r>
+          </a:p>
+        </p:txBody>
+      </p:sp>
+      <p:sp>
+        <p:nvSpPr>
+          <p:cNvPr id="61" name="TextBox 60"/>
+          <p:cNvSpPr txBox="1"/>
+          <p:nvPr/>
+        </p:nvSpPr>
+        <p:spPr>
+          <a:xfrm>
+            <a:off x="10024110" y="3146044"/>
+            <a:ext cx="417830" cy="240030"/>
           </a:xfrm>
           <a:prstGeom prst="rect">
             <a:avLst/>
@@ -14838,21 +14714,21 @@
                 <a:latin typeface="Noto Sans SC"/>
                 <a:ea typeface="Noto Sans SC"/>
               </a:rPr>
-              <a:t>C–D</a:t>
-            </a:r>
-          </a:p>
-        </p:txBody>
-      </p:sp>
-      <p:sp>
-        <p:nvSpPr>
-          <p:cNvPr id="61" name="TextBox 60"/>
-          <p:cNvSpPr txBox="1"/>
-          <p:nvPr/>
-        </p:nvSpPr>
-        <p:spPr>
-          <a:xfrm>
-            <a:off x="10976610" y="2790444"/>
-            <a:ext cx="205359" cy="240030"/>
+              <a:t>C–E</a:t>
+            </a:r>
+          </a:p>
+        </p:txBody>
+      </p:sp>
+      <p:sp>
+        <p:nvSpPr>
+          <p:cNvPr id="62" name="TextBox 61"/>
+          <p:cNvSpPr txBox="1"/>
+          <p:nvPr/>
+        </p:nvSpPr>
+        <p:spPr>
+          <a:xfrm>
+            <a:off x="10976610" y="3146044"/>
+            <a:ext cx="208279" cy="240030"/>
           </a:xfrm>
           <a:prstGeom prst="rect">
             <a:avLst/>
@@ -14874,78 +14750,6 @@
                 <a:latin typeface="Noto Sans SC"/>
                 <a:ea typeface="Noto Sans SC"/>
               </a:rPr>
-              <a:t>2</a:t>
-            </a:r>
-          </a:p>
-        </p:txBody>
-      </p:sp>
-      <p:sp>
-        <p:nvSpPr>
-          <p:cNvPr id="62" name="TextBox 61"/>
-          <p:cNvSpPr txBox="1"/>
-          <p:nvPr/>
-        </p:nvSpPr>
-        <p:spPr>
-          <a:xfrm>
-            <a:off x="10024110" y="3146044"/>
-            <a:ext cx="420141" cy="240030"/>
-          </a:xfrm>
-          <a:prstGeom prst="rect">
-            <a:avLst/>
-          </a:prstGeom>
-          <a:noFill/>
-        </p:spPr>
-        <p:txBody>
-          <a:bodyPr wrap="none" lIns="0" rIns="0" tIns="0" bIns="0">
-            <a:spAutoFit/>
-          </a:bodyPr>
-          <a:lstStyle/>
-          <a:p>
-            <a:pPr algn="l"/>
-            <a:r>
-              <a:rPr sz="1400" b="0">
-                <a:solidFill>
-                  <a:srgbClr val="F2F3E9"/>
-                </a:solidFill>
-                <a:latin typeface="Noto Sans SC"/>
-                <a:ea typeface="Noto Sans SC"/>
-              </a:rPr>
-              <a:t>C–E</a:t>
-            </a:r>
-          </a:p>
-        </p:txBody>
-      </p:sp>
-      <p:sp>
-        <p:nvSpPr>
-          <p:cNvPr id="63" name="TextBox 62"/>
-          <p:cNvSpPr txBox="1"/>
-          <p:nvPr/>
-        </p:nvSpPr>
-        <p:spPr>
-          <a:xfrm>
-            <a:off x="10976610" y="3146044"/>
-            <a:ext cx="205359" cy="240030"/>
-          </a:xfrm>
-          <a:prstGeom prst="rect">
-            <a:avLst/>
-          </a:prstGeom>
-          <a:noFill/>
-        </p:spPr>
-        <p:txBody>
-          <a:bodyPr wrap="none" lIns="0" rIns="0" tIns="0" bIns="0">
-            <a:spAutoFit/>
-          </a:bodyPr>
-          <a:lstStyle/>
-          <a:p>
-            <a:pPr algn="l"/>
-            <a:r>
-              <a:rPr sz="1400" b="0">
-                <a:solidFill>
-                  <a:srgbClr val="F2F3E9"/>
-                </a:solidFill>
-                <a:latin typeface="Noto Sans SC"/>
-                <a:ea typeface="Noto Sans SC"/>
-              </a:rPr>
               <a:t>1</a:t>
             </a:r>
           </a:p>
@@ -14953,14 +14757,14 @@
       </p:sp>
       <p:sp>
         <p:nvSpPr>
-          <p:cNvPr id="64" name="Rounded Rectangle 63"/>
+          <p:cNvPr id="63" name="Rounded Rectangle 62"/>
           <p:cNvSpPr/>
           <p:nvPr/>
         </p:nvSpPr>
         <p:spPr>
           <a:xfrm>
-            <a:off x="8061528" y="5880100"/>
-            <a:ext cx="1021943" cy="292100"/>
+            <a:off x="8061325" y="5880100"/>
+            <a:ext cx="1022350" cy="292100"/>
           </a:xfrm>
           <a:prstGeom prst="roundRect">
             <a:avLst>
@@ -14999,14 +14803,14 @@
       </p:sp>
       <p:sp>
         <p:nvSpPr>
-          <p:cNvPr id="65" name="TextBox 64"/>
-          <p:cNvSpPr txBox="1"/>
-          <p:nvPr/>
-        </p:nvSpPr>
-        <p:spPr>
-          <a:xfrm>
-            <a:off x="8107248" y="5940298"/>
-            <a:ext cx="930503" cy="222885"/>
+          <p:cNvPr id="64" name="TextBox 63"/>
+          <p:cNvSpPr txBox="1"/>
+          <p:nvPr/>
+        </p:nvSpPr>
+        <p:spPr>
+          <a:xfrm>
+            <a:off x="8107045" y="5940298"/>
+            <a:ext cx="930910" cy="222885"/>
           </a:xfrm>
           <a:prstGeom prst="rect">
             <a:avLst/>
@@ -15146,7 +14950,7 @@
         <p:spPr>
           <a:xfrm>
             <a:off x="553720" y="450088"/>
-            <a:ext cx="4720234" cy="480060"/>
+            <a:ext cx="4734560" cy="480060"/>
           </a:xfrm>
           <a:prstGeom prst="rect">
             <a:avLst/>
@@ -15259,7 +15063,7 @@
         <p:spPr>
           <a:xfrm>
             <a:off x="563880" y="6512052"/>
-            <a:ext cx="1960626" cy="205740"/>
+            <a:ext cx="1951989" cy="205740"/>
           </a:xfrm>
           <a:prstGeom prst="rect">
             <a:avLst/>
@@ -15294,8 +15098,8 @@
         </p:nvSpPr>
         <p:spPr>
           <a:xfrm>
-            <a:off x="11108524" y="6499098"/>
-            <a:ext cx="561505" cy="222885"/>
+            <a:off x="11113770" y="6499098"/>
+            <a:ext cx="556260" cy="222885"/>
           </a:xfrm>
           <a:prstGeom prst="rect">
             <a:avLst/>
@@ -15324,43 +15128,7 @@
       </p:sp>
       <p:sp>
         <p:nvSpPr>
-          <p:cNvPr id="9" name="TextBox 8"/>
-          <p:cNvSpPr txBox="1"/>
-          <p:nvPr/>
-        </p:nvSpPr>
-        <p:spPr>
-          <a:xfrm>
-            <a:off x="10855147" y="377952"/>
-            <a:ext cx="811072" cy="205740"/>
-          </a:xfrm>
-          <a:prstGeom prst="rect">
-            <a:avLst/>
-          </a:prstGeom>
-          <a:noFill/>
-        </p:spPr>
-        <p:txBody>
-          <a:bodyPr wrap="none" lIns="0" rIns="0" tIns="0" bIns="0">
-            <a:spAutoFit/>
-          </a:bodyPr>
-          <a:lstStyle/>
-          <a:p>
-            <a:pPr algn="r"/>
-            <a:r>
-              <a:rPr sz="1200" b="0">
-                <a:solidFill>
-                  <a:srgbClr val="6F8F8F"/>
-                </a:solidFill>
-                <a:latin typeface="Noto Sans SC"/>
-                <a:ea typeface="Noto Sans SC"/>
-              </a:rPr>
-              <a:t>影片 01:18</a:t>
-            </a:r>
-          </a:p>
-        </p:txBody>
-      </p:sp>
-      <p:sp>
-        <p:nvSpPr>
-          <p:cNvPr id="10" name="Oval 9"/>
+          <p:cNvPr id="9" name="Oval 8"/>
           <p:cNvSpPr/>
           <p:nvPr/>
         </p:nvSpPr>
@@ -15402,7 +15170,7 @@
       </p:sp>
       <p:sp>
         <p:nvSpPr>
-          <p:cNvPr id="11" name="TextBox 10"/>
+          <p:cNvPr id="10" name="TextBox 9"/>
           <p:cNvSpPr txBox="1"/>
           <p:nvPr/>
         </p:nvSpPr>
@@ -15442,7 +15210,7 @@
       </p:sp>
       <p:sp>
         <p:nvSpPr>
-          <p:cNvPr id="12" name="Oval 11"/>
+          <p:cNvPr id="11" name="Oval 10"/>
           <p:cNvSpPr/>
           <p:nvPr/>
         </p:nvSpPr>
@@ -15484,7 +15252,7 @@
       </p:sp>
       <p:sp>
         <p:nvSpPr>
-          <p:cNvPr id="13" name="TextBox 12"/>
+          <p:cNvPr id="12" name="TextBox 11"/>
           <p:cNvSpPr txBox="1"/>
           <p:nvPr/>
         </p:nvSpPr>
@@ -15524,7 +15292,7 @@
       </p:sp>
       <p:sp>
         <p:nvSpPr>
-          <p:cNvPr id="14" name="Oval 13"/>
+          <p:cNvPr id="13" name="Oval 12"/>
           <p:cNvSpPr/>
           <p:nvPr/>
         </p:nvSpPr>
@@ -15566,7 +15334,7 @@
       </p:sp>
       <p:sp>
         <p:nvSpPr>
-          <p:cNvPr id="15" name="TextBox 14"/>
+          <p:cNvPr id="14" name="TextBox 13"/>
           <p:cNvSpPr txBox="1"/>
           <p:nvPr/>
         </p:nvSpPr>
@@ -15606,7 +15374,7 @@
       </p:sp>
       <p:sp>
         <p:nvSpPr>
-          <p:cNvPr id="16" name="Oval 15"/>
+          <p:cNvPr id="15" name="Oval 14"/>
           <p:cNvSpPr/>
           <p:nvPr/>
         </p:nvSpPr>
@@ -15648,7 +15416,7 @@
       </p:sp>
       <p:sp>
         <p:nvSpPr>
-          <p:cNvPr id="17" name="TextBox 16"/>
+          <p:cNvPr id="16" name="TextBox 15"/>
           <p:cNvSpPr txBox="1"/>
           <p:nvPr/>
         </p:nvSpPr>
@@ -15688,7 +15456,7 @@
       </p:sp>
       <p:sp>
         <p:nvSpPr>
-          <p:cNvPr id="18" name="TextBox 17"/>
+          <p:cNvPr id="17" name="TextBox 16"/>
           <p:cNvSpPr txBox="1"/>
           <p:nvPr/>
         </p:nvSpPr>
@@ -15724,7 +15492,7 @@
       </p:sp>
       <p:sp>
         <p:nvSpPr>
-          <p:cNvPr id="19" name="TextBox 18"/>
+          <p:cNvPr id="18" name="TextBox 17"/>
           <p:cNvSpPr txBox="1"/>
           <p:nvPr/>
         </p:nvSpPr>
@@ -15760,7 +15528,7 @@
       </p:sp>
       <p:sp>
         <p:nvSpPr>
-          <p:cNvPr id="20" name="TextBox 19"/>
+          <p:cNvPr id="19" name="TextBox 18"/>
           <p:cNvSpPr txBox="1"/>
           <p:nvPr/>
         </p:nvSpPr>
@@ -15796,14 +15564,14 @@
       </p:sp>
       <p:sp>
         <p:nvSpPr>
-          <p:cNvPr id="21" name="TextBox 20"/>
+          <p:cNvPr id="20" name="TextBox 19"/>
           <p:cNvSpPr txBox="1"/>
           <p:nvPr/>
         </p:nvSpPr>
         <p:spPr>
           <a:xfrm>
             <a:off x="9959340" y="1697736"/>
-            <a:ext cx="443992" cy="274320"/>
+            <a:ext cx="439420" cy="274320"/>
           </a:xfrm>
           <a:prstGeom prst="rect">
             <a:avLst/>
@@ -15832,7 +15600,7 @@
       </p:sp>
       <p:cxnSp>
         <p:nvCxnSpPr>
-          <p:cNvPr id="22" name="Connector 21"/>
+          <p:cNvPr id="21" name="Connector 20"/>
           <p:cNvCxnSpPr/>
           <p:nvPr/>
         </p:nvCxnSpPr>
@@ -15867,14 +15635,50 @@
       </p:cxnSp>
       <p:sp>
         <p:nvSpPr>
+          <p:cNvPr id="22" name="TextBox 21"/>
+          <p:cNvSpPr txBox="1"/>
+          <p:nvPr/>
+        </p:nvSpPr>
+        <p:spPr>
+          <a:xfrm>
+            <a:off x="6211570" y="2217928"/>
+            <a:ext cx="264159" cy="308610"/>
+          </a:xfrm>
+          <a:prstGeom prst="rect">
+            <a:avLst/>
+          </a:prstGeom>
+          <a:noFill/>
+        </p:spPr>
+        <p:txBody>
+          <a:bodyPr wrap="none" lIns="0" rIns="0" tIns="0" bIns="0">
+            <a:spAutoFit/>
+          </a:bodyPr>
+          <a:lstStyle/>
+          <a:p>
+            <a:pPr algn="l"/>
+            <a:r>
+              <a:rPr sz="1800" b="0">
+                <a:solidFill>
+                  <a:srgbClr val="F2F3E9"/>
+                </a:solidFill>
+                <a:latin typeface="Noto Sans SC"/>
+                <a:ea typeface="Noto Sans SC"/>
+              </a:rPr>
+              <a:t>0</a:t>
+            </a:r>
+          </a:p>
+        </p:txBody>
+      </p:sp>
+      <p:sp>
+        <p:nvSpPr>
           <p:cNvPr id="23" name="TextBox 22"/>
           <p:cNvSpPr txBox="1"/>
           <p:nvPr/>
         </p:nvSpPr>
         <p:spPr>
           <a:xfrm>
-            <a:off x="6211570" y="2217928"/>
-            <a:ext cx="264033" cy="308610"/>
+            <a:off x="6910070" y="2217928"/>
+            <a:ext cx="340359" cy="308610"/>
           </a:xfrm>
           <a:prstGeom prst="rect">
             <a:avLst/>
@@ -15896,7 +15700,7 @@
                 <a:latin typeface="Noto Sans SC"/>
                 <a:ea typeface="Noto Sans SC"/>
               </a:rPr>
-              <a:t>0</a:t>
+              <a:t>—</a:t>
             </a:r>
           </a:p>
         </p:txBody>
@@ -15909,8 +15713,8 @@
         </p:nvSpPr>
         <p:spPr>
           <a:xfrm>
-            <a:off x="6910070" y="2217928"/>
-            <a:ext cx="341528" cy="308610"/>
+            <a:off x="8815070" y="2217928"/>
+            <a:ext cx="340359" cy="308610"/>
           </a:xfrm>
           <a:prstGeom prst="rect">
             <a:avLst/>
@@ -15945,8 +15749,8 @@
         </p:nvSpPr>
         <p:spPr>
           <a:xfrm>
-            <a:off x="8815070" y="2217928"/>
-            <a:ext cx="341528" cy="308610"/>
+            <a:off x="9958070" y="2217928"/>
+            <a:ext cx="391159" cy="308610"/>
           </a:xfrm>
           <a:prstGeom prst="rect">
             <a:avLst/>
@@ -15968,7 +15772,7 @@
                 <a:latin typeface="Noto Sans SC"/>
                 <a:ea typeface="Noto Sans SC"/>
               </a:rPr>
-              <a:t>—</a:t>
+              <a:t>18</a:t>
             </a:r>
           </a:p>
         </p:txBody>
@@ -15981,8 +15785,8 @@
         </p:nvSpPr>
         <p:spPr>
           <a:xfrm>
-            <a:off x="9958070" y="2217928"/>
-            <a:ext cx="390906" cy="308610"/>
+            <a:off x="6211570" y="2764028"/>
+            <a:ext cx="264159" cy="308610"/>
           </a:xfrm>
           <a:prstGeom prst="rect">
             <a:avLst/>
@@ -16004,7 +15808,7 @@
                 <a:latin typeface="Noto Sans SC"/>
                 <a:ea typeface="Noto Sans SC"/>
               </a:rPr>
-              <a:t>18</a:t>
+              <a:t>1</a:t>
             </a:r>
           </a:p>
         </p:txBody>
@@ -16017,8 +15821,8 @@
         </p:nvSpPr>
         <p:spPr>
           <a:xfrm>
-            <a:off x="6211570" y="2764028"/>
-            <a:ext cx="264033" cy="308610"/>
+            <a:off x="6910070" y="2764028"/>
+            <a:ext cx="657860" cy="308610"/>
           </a:xfrm>
           <a:prstGeom prst="rect">
             <a:avLst/>
@@ -16040,7 +15844,7 @@
                 <a:latin typeface="Noto Sans SC"/>
                 <a:ea typeface="Noto Sans SC"/>
               </a:rPr>
-              <a:t>1</a:t>
+              <a:t>A + B</a:t>
             </a:r>
           </a:p>
         </p:txBody>
@@ -16053,8 +15857,8 @@
         </p:nvSpPr>
         <p:spPr>
           <a:xfrm>
-            <a:off x="6910070" y="2764028"/>
-            <a:ext cx="655624" cy="308610"/>
+            <a:off x="8815070" y="2764028"/>
+            <a:ext cx="264159" cy="308610"/>
           </a:xfrm>
           <a:prstGeom prst="rect">
             <a:avLst/>
@@ -16076,7 +15880,7 @@
                 <a:latin typeface="Noto Sans SC"/>
                 <a:ea typeface="Noto Sans SC"/>
               </a:rPr>
-              <a:t>A + B</a:t>
+              <a:t>5</a:t>
             </a:r>
           </a:p>
         </p:txBody>
@@ -16089,8 +15893,8 @@
         </p:nvSpPr>
         <p:spPr>
           <a:xfrm>
-            <a:off x="8815070" y="2764028"/>
-            <a:ext cx="264033" cy="308610"/>
+            <a:off x="9958070" y="2764028"/>
+            <a:ext cx="391159" cy="308610"/>
           </a:xfrm>
           <a:prstGeom prst="rect">
             <a:avLst/>
@@ -16112,6 +15916,114 @@
                 <a:latin typeface="Noto Sans SC"/>
                 <a:ea typeface="Noto Sans SC"/>
               </a:rPr>
+              <a:t>13</a:t>
+            </a:r>
+          </a:p>
+        </p:txBody>
+      </p:sp>
+      <p:sp>
+        <p:nvSpPr>
+          <p:cNvPr id="30" name="TextBox 29"/>
+          <p:cNvSpPr txBox="1"/>
+          <p:nvPr/>
+        </p:nvSpPr>
+        <p:spPr>
+          <a:xfrm>
+            <a:off x="6211570" y="3310128"/>
+            <a:ext cx="264159" cy="308610"/>
+          </a:xfrm>
+          <a:prstGeom prst="rect">
+            <a:avLst/>
+          </a:prstGeom>
+          <a:noFill/>
+        </p:spPr>
+        <p:txBody>
+          <a:bodyPr wrap="none" lIns="0" rIns="0" tIns="0" bIns="0">
+            <a:spAutoFit/>
+          </a:bodyPr>
+          <a:lstStyle/>
+          <a:p>
+            <a:pPr algn="l"/>
+            <a:r>
+              <a:rPr sz="1800" b="0">
+                <a:solidFill>
+                  <a:srgbClr val="F2F3E9"/>
+                </a:solidFill>
+                <a:latin typeface="Noto Sans SC"/>
+                <a:ea typeface="Noto Sans SC"/>
+              </a:rPr>
+              <a:t>2</a:t>
+            </a:r>
+          </a:p>
+        </p:txBody>
+      </p:sp>
+      <p:sp>
+        <p:nvSpPr>
+          <p:cNvPr id="31" name="TextBox 30"/>
+          <p:cNvSpPr txBox="1"/>
+          <p:nvPr/>
+        </p:nvSpPr>
+        <p:spPr>
+          <a:xfrm>
+            <a:off x="6910070" y="3310128"/>
+            <a:ext cx="803910" cy="308610"/>
+          </a:xfrm>
+          <a:prstGeom prst="rect">
+            <a:avLst/>
+          </a:prstGeom>
+          <a:noFill/>
+        </p:spPr>
+        <p:txBody>
+          <a:bodyPr wrap="none" lIns="0" rIns="0" tIns="0" bIns="0">
+            <a:spAutoFit/>
+          </a:bodyPr>
+          <a:lstStyle/>
+          <a:p>
+            <a:pPr algn="l"/>
+            <a:r>
+              <a:rPr sz="1800" b="0">
+                <a:solidFill>
+                  <a:srgbClr val="F2F3E9"/>
+                </a:solidFill>
+                <a:latin typeface="Noto Sans SC"/>
+                <a:ea typeface="Noto Sans SC"/>
+              </a:rPr>
+              <a:t>AB + C</a:t>
+            </a:r>
+          </a:p>
+        </p:txBody>
+      </p:sp>
+      <p:sp>
+        <p:nvSpPr>
+          <p:cNvPr id="32" name="TextBox 31"/>
+          <p:cNvSpPr txBox="1"/>
+          <p:nvPr/>
+        </p:nvSpPr>
+        <p:spPr>
+          <a:xfrm>
+            <a:off x="8815070" y="3310128"/>
+            <a:ext cx="264159" cy="308610"/>
+          </a:xfrm>
+          <a:prstGeom prst="rect">
+            <a:avLst/>
+          </a:prstGeom>
+          <a:noFill/>
+        </p:spPr>
+        <p:txBody>
+          <a:bodyPr wrap="none" lIns="0" rIns="0" tIns="0" bIns="0">
+            <a:spAutoFit/>
+          </a:bodyPr>
+          <a:lstStyle/>
+          <a:p>
+            <a:pPr algn="l"/>
+            <a:r>
+              <a:rPr sz="1800" b="0">
+                <a:solidFill>
+                  <a:srgbClr val="F2F3E9"/>
+                </a:solidFill>
+                <a:latin typeface="Noto Sans SC"/>
+                <a:ea typeface="Noto Sans SC"/>
+              </a:rPr>
               <a:t>5</a:t>
             </a:r>
           </a:p>
@@ -16119,14 +16031,14 @@
       </p:sp>
       <p:sp>
         <p:nvSpPr>
-          <p:cNvPr id="30" name="TextBox 29"/>
-          <p:cNvSpPr txBox="1"/>
-          <p:nvPr/>
-        </p:nvSpPr>
-        <p:spPr>
-          <a:xfrm>
-            <a:off x="9958070" y="2764028"/>
-            <a:ext cx="390906" cy="308610"/>
+          <p:cNvPr id="33" name="TextBox 32"/>
+          <p:cNvSpPr txBox="1"/>
+          <p:nvPr/>
+        </p:nvSpPr>
+        <p:spPr>
+          <a:xfrm>
+            <a:off x="9958070" y="3310128"/>
+            <a:ext cx="264159" cy="308610"/>
           </a:xfrm>
           <a:prstGeom prst="rect">
             <a:avLst/>
@@ -16148,150 +16060,6 @@
                 <a:latin typeface="Noto Sans SC"/>
                 <a:ea typeface="Noto Sans SC"/>
               </a:rPr>
-              <a:t>13</a:t>
-            </a:r>
-          </a:p>
-        </p:txBody>
-      </p:sp>
-      <p:sp>
-        <p:nvSpPr>
-          <p:cNvPr id="31" name="TextBox 30"/>
-          <p:cNvSpPr txBox="1"/>
-          <p:nvPr/>
-        </p:nvSpPr>
-        <p:spPr>
-          <a:xfrm>
-            <a:off x="6211570" y="3310128"/>
-            <a:ext cx="264033" cy="308610"/>
-          </a:xfrm>
-          <a:prstGeom prst="rect">
-            <a:avLst/>
-          </a:prstGeom>
-          <a:noFill/>
-        </p:spPr>
-        <p:txBody>
-          <a:bodyPr wrap="none" lIns="0" rIns="0" tIns="0" bIns="0">
-            <a:spAutoFit/>
-          </a:bodyPr>
-          <a:lstStyle/>
-          <a:p>
-            <a:pPr algn="l"/>
-            <a:r>
-              <a:rPr sz="1800" b="0">
-                <a:solidFill>
-                  <a:srgbClr val="F2F3E9"/>
-                </a:solidFill>
-                <a:latin typeface="Noto Sans SC"/>
-                <a:ea typeface="Noto Sans SC"/>
-              </a:rPr>
-              <a:t>2</a:t>
-            </a:r>
-          </a:p>
-        </p:txBody>
-      </p:sp>
-      <p:sp>
-        <p:nvSpPr>
-          <p:cNvPr id="32" name="TextBox 31"/>
-          <p:cNvSpPr txBox="1"/>
-          <p:nvPr/>
-        </p:nvSpPr>
-        <p:spPr>
-          <a:xfrm>
-            <a:off x="6910070" y="3310128"/>
-            <a:ext cx="801471" cy="308610"/>
-          </a:xfrm>
-          <a:prstGeom prst="rect">
-            <a:avLst/>
-          </a:prstGeom>
-          <a:noFill/>
-        </p:spPr>
-        <p:txBody>
-          <a:bodyPr wrap="none" lIns="0" rIns="0" tIns="0" bIns="0">
-            <a:spAutoFit/>
-          </a:bodyPr>
-          <a:lstStyle/>
-          <a:p>
-            <a:pPr algn="l"/>
-            <a:r>
-              <a:rPr sz="1800" b="0">
-                <a:solidFill>
-                  <a:srgbClr val="F2F3E9"/>
-                </a:solidFill>
-                <a:latin typeface="Noto Sans SC"/>
-                <a:ea typeface="Noto Sans SC"/>
-              </a:rPr>
-              <a:t>AB + C</a:t>
-            </a:r>
-          </a:p>
-        </p:txBody>
-      </p:sp>
-      <p:sp>
-        <p:nvSpPr>
-          <p:cNvPr id="33" name="TextBox 32"/>
-          <p:cNvSpPr txBox="1"/>
-          <p:nvPr/>
-        </p:nvSpPr>
-        <p:spPr>
-          <a:xfrm>
-            <a:off x="8815070" y="3310128"/>
-            <a:ext cx="264033" cy="308610"/>
-          </a:xfrm>
-          <a:prstGeom prst="rect">
-            <a:avLst/>
-          </a:prstGeom>
-          <a:noFill/>
-        </p:spPr>
-        <p:txBody>
-          <a:bodyPr wrap="none" lIns="0" rIns="0" tIns="0" bIns="0">
-            <a:spAutoFit/>
-          </a:bodyPr>
-          <a:lstStyle/>
-          <a:p>
-            <a:pPr algn="l"/>
-            <a:r>
-              <a:rPr sz="1800" b="0">
-                <a:solidFill>
-                  <a:srgbClr val="F2F3E9"/>
-                </a:solidFill>
-                <a:latin typeface="Noto Sans SC"/>
-                <a:ea typeface="Noto Sans SC"/>
-              </a:rPr>
-              <a:t>5</a:t>
-            </a:r>
-          </a:p>
-        </p:txBody>
-      </p:sp>
-      <p:sp>
-        <p:nvSpPr>
-          <p:cNvPr id="34" name="TextBox 33"/>
-          <p:cNvSpPr txBox="1"/>
-          <p:nvPr/>
-        </p:nvSpPr>
-        <p:spPr>
-          <a:xfrm>
-            <a:off x="9958070" y="3310128"/>
-            <a:ext cx="264033" cy="308610"/>
-          </a:xfrm>
-          <a:prstGeom prst="rect">
-            <a:avLst/>
-          </a:prstGeom>
-          <a:noFill/>
-        </p:spPr>
-        <p:txBody>
-          <a:bodyPr wrap="none" lIns="0" rIns="0" tIns="0" bIns="0">
-            <a:spAutoFit/>
-          </a:bodyPr>
-          <a:lstStyle/>
-          <a:p>
-            <a:pPr algn="l"/>
-            <a:r>
-              <a:rPr sz="1800" b="0">
-                <a:solidFill>
-                  <a:srgbClr val="F2F3E9"/>
-                </a:solidFill>
-                <a:latin typeface="Noto Sans SC"/>
-                <a:ea typeface="Noto Sans SC"/>
-              </a:rPr>
               <a:t>8</a:t>
             </a:r>
           </a:p>
@@ -16299,7 +16067,7 @@
       </p:sp>
       <p:sp>
         <p:nvSpPr>
-          <p:cNvPr id="35" name="Rounded Rectangle 34"/>
+          <p:cNvPr id="34" name="Rounded Rectangle 33"/>
           <p:cNvSpPr/>
           <p:nvPr/>
         </p:nvSpPr>
@@ -16345,14 +16113,50 @@
       </p:sp>
       <p:sp>
         <p:nvSpPr>
+          <p:cNvPr id="35" name="TextBox 34"/>
+          <p:cNvSpPr txBox="1"/>
+          <p:nvPr/>
+        </p:nvSpPr>
+        <p:spPr>
+          <a:xfrm>
+            <a:off x="6211570" y="3856228"/>
+            <a:ext cx="264159" cy="308610"/>
+          </a:xfrm>
+          <a:prstGeom prst="rect">
+            <a:avLst/>
+          </a:prstGeom>
+          <a:noFill/>
+        </p:spPr>
+        <p:txBody>
+          <a:bodyPr wrap="none" lIns="0" rIns="0" tIns="0" bIns="0">
+            <a:spAutoFit/>
+          </a:bodyPr>
+          <a:lstStyle/>
+          <a:p>
+            <a:pPr algn="l"/>
+            <a:r>
+              <a:rPr sz="1800" b="0">
+                <a:solidFill>
+                  <a:srgbClr val="F2F3E9"/>
+                </a:solidFill>
+                <a:latin typeface="Noto Sans SC"/>
+                <a:ea typeface="Noto Sans SC"/>
+              </a:rPr>
+              <a:t>3</a:t>
+            </a:r>
+          </a:p>
+        </p:txBody>
+      </p:sp>
+      <p:sp>
+        <p:nvSpPr>
           <p:cNvPr id="36" name="TextBox 35"/>
           <p:cNvSpPr txBox="1"/>
           <p:nvPr/>
         </p:nvSpPr>
         <p:spPr>
           <a:xfrm>
-            <a:off x="6211570" y="3856228"/>
-            <a:ext cx="264033" cy="308610"/>
+            <a:off x="6910070" y="3856228"/>
+            <a:ext cx="657860" cy="308610"/>
           </a:xfrm>
           <a:prstGeom prst="rect">
             <a:avLst/>
@@ -16374,7 +16178,7 @@
                 <a:latin typeface="Noto Sans SC"/>
                 <a:ea typeface="Noto Sans SC"/>
               </a:rPr>
-              <a:t>3</a:t>
+              <a:t>D + E</a:t>
             </a:r>
           </a:p>
         </p:txBody>
@@ -16387,8 +16191,8 @@
         </p:nvSpPr>
         <p:spPr>
           <a:xfrm>
-            <a:off x="6910070" y="3856228"/>
-            <a:ext cx="658368" cy="308610"/>
+            <a:off x="8815070" y="3856228"/>
+            <a:ext cx="264159" cy="308610"/>
           </a:xfrm>
           <a:prstGeom prst="rect">
             <a:avLst/>
@@ -16410,7 +16214,7 @@
                 <a:latin typeface="Noto Sans SC"/>
                 <a:ea typeface="Noto Sans SC"/>
               </a:rPr>
-              <a:t>D + E</a:t>
+              <a:t>5</a:t>
             </a:r>
           </a:p>
         </p:txBody>
@@ -16423,44 +16227,8 @@
         </p:nvSpPr>
         <p:spPr>
           <a:xfrm>
-            <a:off x="8815070" y="3856228"/>
-            <a:ext cx="264033" cy="308610"/>
-          </a:xfrm>
-          <a:prstGeom prst="rect">
-            <a:avLst/>
-          </a:prstGeom>
-          <a:noFill/>
-        </p:spPr>
-        <p:txBody>
-          <a:bodyPr wrap="none" lIns="0" rIns="0" tIns="0" bIns="0">
-            <a:spAutoFit/>
-          </a:bodyPr>
-          <a:lstStyle/>
-          <a:p>
-            <a:pPr algn="l"/>
-            <a:r>
-              <a:rPr sz="1800" b="0">
-                <a:solidFill>
-                  <a:srgbClr val="F2F3E9"/>
-                </a:solidFill>
-                <a:latin typeface="Noto Sans SC"/>
-                <a:ea typeface="Noto Sans SC"/>
-              </a:rPr>
-              <a:t>5</a:t>
-            </a:r>
-          </a:p>
-        </p:txBody>
-      </p:sp>
-      <p:sp>
-        <p:nvSpPr>
-          <p:cNvPr id="39" name="TextBox 38"/>
-          <p:cNvSpPr txBox="1"/>
-          <p:nvPr/>
-        </p:nvSpPr>
-        <p:spPr>
-          <a:xfrm>
             <a:off x="9958070" y="3856228"/>
-            <a:ext cx="264033" cy="308610"/>
+            <a:ext cx="264159" cy="308610"/>
           </a:xfrm>
           <a:prstGeom prst="rect">
             <a:avLst/>
@@ -16713,7 +16481,7 @@
         <p:spPr>
           <a:xfrm>
             <a:off x="563880" y="6512052"/>
-            <a:ext cx="1960626" cy="205740"/>
+            <a:ext cx="1951989" cy="205740"/>
           </a:xfrm>
           <a:prstGeom prst="rect">
             <a:avLst/>
@@ -16748,8 +16516,8 @@
         </p:nvSpPr>
         <p:spPr>
           <a:xfrm>
-            <a:off x="11108524" y="6499098"/>
-            <a:ext cx="561505" cy="222885"/>
+            <a:off x="11113770" y="6499098"/>
+            <a:ext cx="556260" cy="222885"/>
           </a:xfrm>
           <a:prstGeom prst="rect">
             <a:avLst/>
@@ -16778,43 +16546,7 @@
       </p:sp>
       <p:sp>
         <p:nvSpPr>
-          <p:cNvPr id="9" name="TextBox 8"/>
-          <p:cNvSpPr txBox="1"/>
-          <p:nvPr/>
-        </p:nvSpPr>
-        <p:spPr>
-          <a:xfrm>
-            <a:off x="10855147" y="377952"/>
-            <a:ext cx="811072" cy="205740"/>
-          </a:xfrm>
-          <a:prstGeom prst="rect">
-            <a:avLst/>
-          </a:prstGeom>
-          <a:noFill/>
-        </p:spPr>
-        <p:txBody>
-          <a:bodyPr wrap="none" lIns="0" rIns="0" tIns="0" bIns="0">
-            <a:spAutoFit/>
-          </a:bodyPr>
-          <a:lstStyle/>
-          <a:p>
-            <a:pPr algn="r"/>
-            <a:r>
-              <a:rPr sz="1200" b="0">
-                <a:solidFill>
-                  <a:srgbClr val="6F8F8F"/>
-                </a:solidFill>
-                <a:latin typeface="Noto Sans SC"/>
-                <a:ea typeface="Noto Sans SC"/>
-              </a:rPr>
-              <a:t>影片 01:36</a:t>
-            </a:r>
-          </a:p>
-        </p:txBody>
-      </p:sp>
-      <p:sp>
-        <p:nvSpPr>
-          <p:cNvPr id="10" name="Oval 9"/>
+          <p:cNvPr id="9" name="Oval 8"/>
           <p:cNvSpPr/>
           <p:nvPr/>
         </p:nvSpPr>
@@ -16856,7 +16588,7 @@
       </p:sp>
       <p:sp>
         <p:nvSpPr>
-          <p:cNvPr id="11" name="TextBox 10"/>
+          <p:cNvPr id="10" name="TextBox 9"/>
           <p:cNvSpPr txBox="1"/>
           <p:nvPr/>
         </p:nvSpPr>
@@ -16896,7 +16628,7 @@
       </p:sp>
       <p:sp>
         <p:nvSpPr>
-          <p:cNvPr id="12" name="Oval 11"/>
+          <p:cNvPr id="11" name="Oval 10"/>
           <p:cNvSpPr/>
           <p:nvPr/>
         </p:nvSpPr>
@@ -16938,7 +16670,7 @@
       </p:sp>
       <p:sp>
         <p:nvSpPr>
-          <p:cNvPr id="13" name="TextBox 12"/>
+          <p:cNvPr id="12" name="TextBox 11"/>
           <p:cNvSpPr txBox="1"/>
           <p:nvPr/>
         </p:nvSpPr>
@@ -16978,7 +16710,7 @@
       </p:sp>
       <p:sp>
         <p:nvSpPr>
-          <p:cNvPr id="14" name="Oval 13"/>
+          <p:cNvPr id="13" name="Oval 12"/>
           <p:cNvSpPr/>
           <p:nvPr/>
         </p:nvSpPr>
@@ -17020,7 +16752,7 @@
       </p:sp>
       <p:sp>
         <p:nvSpPr>
-          <p:cNvPr id="15" name="TextBox 14"/>
+          <p:cNvPr id="14" name="TextBox 13"/>
           <p:cNvSpPr txBox="1"/>
           <p:nvPr/>
         </p:nvSpPr>
@@ -17060,7 +16792,7 @@
       </p:sp>
       <p:sp>
         <p:nvSpPr>
-          <p:cNvPr id="16" name="Oval 15"/>
+          <p:cNvPr id="15" name="Oval 14"/>
           <p:cNvSpPr/>
           <p:nvPr/>
         </p:nvSpPr>
@@ -17102,7 +16834,7 @@
       </p:sp>
       <p:sp>
         <p:nvSpPr>
-          <p:cNvPr id="17" name="TextBox 16"/>
+          <p:cNvPr id="16" name="TextBox 15"/>
           <p:cNvSpPr txBox="1"/>
           <p:nvPr/>
         </p:nvSpPr>
@@ -17142,7 +16874,7 @@
       </p:sp>
       <p:sp>
         <p:nvSpPr>
-          <p:cNvPr id="18" name="Oval 17"/>
+          <p:cNvPr id="17" name="Oval 16"/>
           <p:cNvSpPr/>
           <p:nvPr/>
         </p:nvSpPr>
@@ -17184,7 +16916,7 @@
       </p:sp>
       <p:sp>
         <p:nvSpPr>
-          <p:cNvPr id="19" name="TextBox 18"/>
+          <p:cNvPr id="18" name="TextBox 17"/>
           <p:cNvSpPr txBox="1"/>
           <p:nvPr/>
         </p:nvSpPr>
@@ -17224,14 +16956,50 @@
       </p:sp>
       <p:sp>
         <p:nvSpPr>
+          <p:cNvPr id="19" name="TextBox 18"/>
+          <p:cNvSpPr txBox="1"/>
+          <p:nvPr/>
+        </p:nvSpPr>
+        <p:spPr>
+          <a:xfrm>
+            <a:off x="6084570" y="1862327"/>
+            <a:ext cx="2766060" cy="308610"/>
+          </a:xfrm>
+          <a:prstGeom prst="rect">
+            <a:avLst/>
+          </a:prstGeom>
+          <a:noFill/>
+        </p:spPr>
+        <p:txBody>
+          <a:bodyPr wrap="none" lIns="0" rIns="0" tIns="0" bIns="0">
+            <a:spAutoFit/>
+          </a:bodyPr>
+          <a:lstStyle/>
+          <a:p>
+            <a:pPr algn="l"/>
+            <a:r>
+              <a:rPr sz="1800" b="0">
+                <a:solidFill>
+                  <a:srgbClr val="F2F3E9"/>
+                </a:solidFill>
+                <a:latin typeface="Noto Sans SC"/>
+                <a:ea typeface="Noto Sans SC"/>
+              </a:rPr>
+              <a:t>[−5, "A", "B"]  →  "-5,A,B"</a:t>
+            </a:r>
+          </a:p>
+        </p:txBody>
+      </p:sp>
+      <p:sp>
+        <p:nvSpPr>
           <p:cNvPr id="20" name="TextBox 19"/>
           <p:cNvSpPr txBox="1"/>
           <p:nvPr/>
         </p:nvSpPr>
         <p:spPr>
           <a:xfrm>
-            <a:off x="6084570" y="1862327"/>
-            <a:ext cx="2770174" cy="308610"/>
+            <a:off x="6084570" y="2306828"/>
+            <a:ext cx="2753360" cy="308610"/>
           </a:xfrm>
           <a:prstGeom prst="rect">
             <a:avLst/>
@@ -17253,7 +17021,7 @@
                 <a:latin typeface="Noto Sans SC"/>
                 <a:ea typeface="Noto Sans SC"/>
               </a:rPr>
-              <a:t>[−5, "A", "B"]  →  "-5,A,B"</a:t>
+              <a:t>[−1, "A", "C"]  →  "-1,A,C"</a:t>
             </a:r>
           </a:p>
         </p:txBody>
@@ -17266,8 +17034,8 @@
         </p:nvSpPr>
         <p:spPr>
           <a:xfrm>
-            <a:off x="6084570" y="2306828"/>
-            <a:ext cx="2761488" cy="308610"/>
+            <a:off x="6086475" y="2853690"/>
+            <a:ext cx="3517900" cy="257175"/>
           </a:xfrm>
           <a:prstGeom prst="rect">
             <a:avLst/>
@@ -17282,14 +17050,14 @@
           <a:p>
             <a:pPr algn="l"/>
             <a:r>
-              <a:rPr sz="1800" b="0">
-                <a:solidFill>
-                  <a:srgbClr val="F2F3E9"/>
-                </a:solidFill>
-                <a:latin typeface="Noto Sans SC"/>
-                <a:ea typeface="Noto Sans SC"/>
-              </a:rPr>
-              <a:t>[−1, "A", "C"]  →  "-1,A,C"</a:t>
+              <a:rPr sz="1500" b="1">
+                <a:solidFill>
+                  <a:srgbClr val="DB7B72"/>
+                </a:solidFill>
+                <a:latin typeface="Noto Sans SC"/>
+                <a:ea typeface="Noto Sans SC"/>
+              </a:rPr>
+              <a:t>字符 1 &lt; 5：亲和度 1 的 A–C 被当成更好</a:t>
             </a:r>
           </a:p>
         </p:txBody>
@@ -17297,42 +17065,6 @@
       <p:sp>
         <p:nvSpPr>
           <p:cNvPr id="22" name="TextBox 21"/>
-          <p:cNvSpPr txBox="1"/>
-          <p:nvPr/>
-        </p:nvSpPr>
-        <p:spPr>
-          <a:xfrm>
-            <a:off x="6086475" y="2853690"/>
-            <a:ext cx="3504819" cy="257175"/>
-          </a:xfrm>
-          <a:prstGeom prst="rect">
-            <a:avLst/>
-          </a:prstGeom>
-          <a:noFill/>
-        </p:spPr>
-        <p:txBody>
-          <a:bodyPr wrap="none" lIns="0" rIns="0" tIns="0" bIns="0">
-            <a:spAutoFit/>
-          </a:bodyPr>
-          <a:lstStyle/>
-          <a:p>
-            <a:pPr algn="l"/>
-            <a:r>
-              <a:rPr sz="1500" b="1">
-                <a:solidFill>
-                  <a:srgbClr val="DB7B72"/>
-                </a:solidFill>
-                <a:latin typeface="Noto Sans SC"/>
-                <a:ea typeface="Noto Sans SC"/>
-              </a:rPr>
-              <a:t>字符 1 &lt; 5：亲和度 1 的 A–C 被当成更好</a:t>
-            </a:r>
-          </a:p>
-        </p:txBody>
-      </p:sp>
-      <p:sp>
-        <p:nvSpPr>
-          <p:cNvPr id="23" name="TextBox 22"/>
           <p:cNvSpPr txBox="1"/>
           <p:nvPr/>
         </p:nvSpPr>
@@ -17368,7 +17100,7 @@
       </p:sp>
       <p:sp>
         <p:nvSpPr>
-          <p:cNvPr id="24" name="TextBox 23"/>
+          <p:cNvPr id="23" name="TextBox 22"/>
           <p:cNvSpPr txBox="1"/>
           <p:nvPr/>
         </p:nvSpPr>
@@ -17404,7 +17136,7 @@
       </p:sp>
       <p:sp>
         <p:nvSpPr>
-          <p:cNvPr id="25" name="TextBox 24"/>
+          <p:cNvPr id="24" name="TextBox 23"/>
           <p:cNvSpPr txBox="1"/>
           <p:nvPr/>
         </p:nvSpPr>
@@ -17440,7 +17172,7 @@
       </p:sp>
       <p:cxnSp>
         <p:nvCxnSpPr>
-          <p:cNvPr id="26" name="Connector 25"/>
+          <p:cNvPr id="25" name="Connector 24"/>
           <p:cNvCxnSpPr/>
           <p:nvPr/>
         </p:nvCxnSpPr>
@@ -17475,14 +17207,50 @@
       </p:cxnSp>
       <p:sp>
         <p:nvSpPr>
+          <p:cNvPr id="26" name="TextBox 25"/>
+          <p:cNvSpPr txBox="1"/>
+          <p:nvPr/>
+        </p:nvSpPr>
+        <p:spPr>
+          <a:xfrm>
+            <a:off x="6212840" y="3958336"/>
+            <a:ext cx="483870" cy="274320"/>
+          </a:xfrm>
+          <a:prstGeom prst="rect">
+            <a:avLst/>
+          </a:prstGeom>
+          <a:noFill/>
+        </p:spPr>
+        <p:txBody>
+          <a:bodyPr wrap="none" lIns="0" rIns="0" tIns="0" bIns="0">
+            <a:spAutoFit/>
+          </a:bodyPr>
+          <a:lstStyle/>
+          <a:p>
+            <a:pPr algn="l"/>
+            <a:r>
+              <a:rPr sz="1600" b="0">
+                <a:solidFill>
+                  <a:srgbClr val="F2F3E9"/>
+                </a:solidFill>
+                <a:latin typeface="Noto Sans SC"/>
+                <a:ea typeface="Noto Sans SC"/>
+              </a:rPr>
+              <a:t>K=2</a:t>
+            </a:r>
+          </a:p>
+        </p:txBody>
+      </p:sp>
+      <p:sp>
+        <p:nvSpPr>
           <p:cNvPr id="27" name="TextBox 26"/>
           <p:cNvSpPr txBox="1"/>
           <p:nvPr/>
         </p:nvSpPr>
         <p:spPr>
           <a:xfrm>
-            <a:off x="6212840" y="3958336"/>
-            <a:ext cx="478739" cy="274320"/>
+            <a:off x="8117840" y="3958336"/>
+            <a:ext cx="236220" cy="274320"/>
           </a:xfrm>
           <a:prstGeom prst="rect">
             <a:avLst/>
@@ -17504,7 +17272,7 @@
                 <a:latin typeface="Noto Sans SC"/>
                 <a:ea typeface="Noto Sans SC"/>
               </a:rPr>
-              <a:t>K=2</a:t>
+              <a:t>9</a:t>
             </a:r>
           </a:p>
         </p:txBody>
@@ -17517,8 +17285,8 @@
         </p:nvSpPr>
         <p:spPr>
           <a:xfrm>
-            <a:off x="8117840" y="3958336"/>
-            <a:ext cx="234696" cy="274320"/>
+            <a:off x="9260840" y="3958336"/>
+            <a:ext cx="236220" cy="274320"/>
           </a:xfrm>
           <a:prstGeom prst="rect">
             <a:avLst/>
@@ -17540,7 +17308,7 @@
                 <a:latin typeface="Noto Sans SC"/>
                 <a:ea typeface="Noto Sans SC"/>
               </a:rPr>
-              <a:t>9</a:t>
+              <a:t>3</a:t>
             </a:r>
           </a:p>
         </p:txBody>
@@ -17553,8 +17321,8 @@
         </p:nvSpPr>
         <p:spPr>
           <a:xfrm>
-            <a:off x="9260840" y="3958336"/>
-            <a:ext cx="234696" cy="274320"/>
+            <a:off x="6212840" y="4377436"/>
+            <a:ext cx="483870" cy="274320"/>
           </a:xfrm>
           <a:prstGeom prst="rect">
             <a:avLst/>
@@ -17576,7 +17344,7 @@
                 <a:latin typeface="Noto Sans SC"/>
                 <a:ea typeface="Noto Sans SC"/>
               </a:rPr>
-              <a:t>3</a:t>
+              <a:t>K=3</a:t>
             </a:r>
           </a:p>
         </p:txBody>
@@ -17589,8 +17357,8 @@
         </p:nvSpPr>
         <p:spPr>
           <a:xfrm>
-            <a:off x="6212840" y="4377436"/>
-            <a:ext cx="478739" cy="274320"/>
+            <a:off x="8117840" y="4377436"/>
+            <a:ext cx="350520" cy="274320"/>
           </a:xfrm>
           <a:prstGeom prst="rect">
             <a:avLst/>
@@ -17612,7 +17380,7 @@
                 <a:latin typeface="Noto Sans SC"/>
                 <a:ea typeface="Noto Sans SC"/>
               </a:rPr>
-              <a:t>K=3</a:t>
+              <a:t>16</a:t>
             </a:r>
           </a:p>
         </p:txBody>
@@ -17625,8 +17393,8 @@
         </p:nvSpPr>
         <p:spPr>
           <a:xfrm>
-            <a:off x="8117840" y="4377436"/>
-            <a:ext cx="347472" cy="274320"/>
+            <a:off x="9260840" y="4377436"/>
+            <a:ext cx="236220" cy="274320"/>
           </a:xfrm>
           <a:prstGeom prst="rect">
             <a:avLst/>
@@ -17648,6 +17416,186 @@
                 <a:latin typeface="Noto Sans SC"/>
                 <a:ea typeface="Noto Sans SC"/>
               </a:rPr>
+              <a:t>8</a:t>
+            </a:r>
+          </a:p>
+        </p:txBody>
+      </p:sp>
+      <p:sp>
+        <p:nvSpPr>
+          <p:cNvPr id="32" name="TextBox 31"/>
+          <p:cNvSpPr txBox="1"/>
+          <p:nvPr/>
+        </p:nvSpPr>
+        <p:spPr>
+          <a:xfrm>
+            <a:off x="6212840" y="4796536"/>
+            <a:ext cx="1049020" cy="274320"/>
+          </a:xfrm>
+          <a:prstGeom prst="rect">
+            <a:avLst/>
+          </a:prstGeom>
+          <a:noFill/>
+        </p:spPr>
+        <p:txBody>
+          <a:bodyPr wrap="none" lIns="0" rIns="0" tIns="0" bIns="0">
+            <a:spAutoFit/>
+          </a:bodyPr>
+          <a:lstStyle/>
+          <a:p>
+            <a:pPr algn="l"/>
+            <a:r>
+              <a:rPr sz="1600" b="0">
+                <a:solidFill>
+                  <a:srgbClr val="F2F3E9"/>
+                </a:solidFill>
+                <a:latin typeface="Noto Sans SC"/>
+                <a:ea typeface="Noto Sans SC"/>
+              </a:rPr>
+              <a:t>K=2 容量2</a:t>
+            </a:r>
+          </a:p>
+        </p:txBody>
+      </p:sp>
+      <p:sp>
+        <p:nvSpPr>
+          <p:cNvPr id="33" name="TextBox 32"/>
+          <p:cNvSpPr txBox="1"/>
+          <p:nvPr/>
+        </p:nvSpPr>
+        <p:spPr>
+          <a:xfrm>
+            <a:off x="8117840" y="4796536"/>
+            <a:ext cx="350520" cy="274320"/>
+          </a:xfrm>
+          <a:prstGeom prst="rect">
+            <a:avLst/>
+          </a:prstGeom>
+          <a:noFill/>
+        </p:spPr>
+        <p:txBody>
+          <a:bodyPr wrap="none" lIns="0" rIns="0" tIns="0" bIns="0">
+            <a:spAutoFit/>
+          </a:bodyPr>
+          <a:lstStyle/>
+          <a:p>
+            <a:pPr algn="l"/>
+            <a:r>
+              <a:rPr sz="1600" b="0">
+                <a:solidFill>
+                  <a:srgbClr val="F2F3E9"/>
+                </a:solidFill>
+                <a:latin typeface="Noto Sans SC"/>
+                <a:ea typeface="Noto Sans SC"/>
+              </a:rPr>
+              <a:t>12</a:t>
+            </a:r>
+          </a:p>
+        </p:txBody>
+      </p:sp>
+      <p:sp>
+        <p:nvSpPr>
+          <p:cNvPr id="34" name="TextBox 33"/>
+          <p:cNvSpPr txBox="1"/>
+          <p:nvPr/>
+        </p:nvSpPr>
+        <p:spPr>
+          <a:xfrm>
+            <a:off x="9260840" y="4796536"/>
+            <a:ext cx="236220" cy="274320"/>
+          </a:xfrm>
+          <a:prstGeom prst="rect">
+            <a:avLst/>
+          </a:prstGeom>
+          <a:noFill/>
+        </p:spPr>
+        <p:txBody>
+          <a:bodyPr wrap="none" lIns="0" rIns="0" tIns="0" bIns="0">
+            <a:spAutoFit/>
+          </a:bodyPr>
+          <a:lstStyle/>
+          <a:p>
+            <a:pPr algn="l"/>
+            <a:r>
+              <a:rPr sz="1600" b="0">
+                <a:solidFill>
+                  <a:srgbClr val="F2F3E9"/>
+                </a:solidFill>
+                <a:latin typeface="Noto Sans SC"/>
+                <a:ea typeface="Noto Sans SC"/>
+              </a:rPr>
+              <a:t>8</a:t>
+            </a:r>
+          </a:p>
+        </p:txBody>
+      </p:sp>
+      <p:sp>
+        <p:nvSpPr>
+          <p:cNvPr id="35" name="TextBox 34"/>
+          <p:cNvSpPr txBox="1"/>
+          <p:nvPr/>
+        </p:nvSpPr>
+        <p:spPr>
+          <a:xfrm>
+            <a:off x="6212840" y="5215636"/>
+            <a:ext cx="1049020" cy="274320"/>
+          </a:xfrm>
+          <a:prstGeom prst="rect">
+            <a:avLst/>
+          </a:prstGeom>
+          <a:noFill/>
+        </p:spPr>
+        <p:txBody>
+          <a:bodyPr wrap="none" lIns="0" rIns="0" tIns="0" bIns="0">
+            <a:spAutoFit/>
+          </a:bodyPr>
+          <a:lstStyle/>
+          <a:p>
+            <a:pPr algn="l"/>
+            <a:r>
+              <a:rPr sz="1600" b="0">
+                <a:solidFill>
+                  <a:srgbClr val="F2F3E9"/>
+                </a:solidFill>
+                <a:latin typeface="Noto Sans SC"/>
+                <a:ea typeface="Noto Sans SC"/>
+              </a:rPr>
+              <a:t>K=2 容量3</a:t>
+            </a:r>
+          </a:p>
+        </p:txBody>
+      </p:sp>
+      <p:sp>
+        <p:nvSpPr>
+          <p:cNvPr id="36" name="TextBox 35"/>
+          <p:cNvSpPr txBox="1"/>
+          <p:nvPr/>
+        </p:nvSpPr>
+        <p:spPr>
+          <a:xfrm>
+            <a:off x="8117840" y="5215636"/>
+            <a:ext cx="350520" cy="274320"/>
+          </a:xfrm>
+          <a:prstGeom prst="rect">
+            <a:avLst/>
+          </a:prstGeom>
+          <a:noFill/>
+        </p:spPr>
+        <p:txBody>
+          <a:bodyPr wrap="none" lIns="0" rIns="0" tIns="0" bIns="0">
+            <a:spAutoFit/>
+          </a:bodyPr>
+          <a:lstStyle/>
+          <a:p>
+            <a:pPr algn="l"/>
+            <a:r>
+              <a:rPr sz="1600" b="0">
+                <a:solidFill>
+                  <a:srgbClr val="F2F3E9"/>
+                </a:solidFill>
+                <a:latin typeface="Noto Sans SC"/>
+                <a:ea typeface="Noto Sans SC"/>
+              </a:rPr>
               <a:t>16</a:t>
             </a:r>
           </a:p>
@@ -17655,230 +17603,14 @@
       </p:sp>
       <p:sp>
         <p:nvSpPr>
-          <p:cNvPr id="32" name="TextBox 31"/>
-          <p:cNvSpPr txBox="1"/>
-          <p:nvPr/>
-        </p:nvSpPr>
-        <p:spPr>
-          <a:xfrm>
-            <a:off x="9260840" y="4377436"/>
-            <a:ext cx="234696" cy="274320"/>
-          </a:xfrm>
-          <a:prstGeom prst="rect">
-            <a:avLst/>
-          </a:prstGeom>
-          <a:noFill/>
-        </p:spPr>
-        <p:txBody>
-          <a:bodyPr wrap="none" lIns="0" rIns="0" tIns="0" bIns="0">
-            <a:spAutoFit/>
-          </a:bodyPr>
-          <a:lstStyle/>
-          <a:p>
-            <a:pPr algn="l"/>
-            <a:r>
-              <a:rPr sz="1600" b="0">
-                <a:solidFill>
-                  <a:srgbClr val="F2F3E9"/>
-                </a:solidFill>
-                <a:latin typeface="Noto Sans SC"/>
-                <a:ea typeface="Noto Sans SC"/>
-              </a:rPr>
-              <a:t>8</a:t>
-            </a:r>
-          </a:p>
-        </p:txBody>
-      </p:sp>
-      <p:sp>
-        <p:nvSpPr>
-          <p:cNvPr id="33" name="TextBox 32"/>
-          <p:cNvSpPr txBox="1"/>
-          <p:nvPr/>
-        </p:nvSpPr>
-        <p:spPr>
-          <a:xfrm>
-            <a:off x="6212840" y="4796536"/>
-            <a:ext cx="1043432" cy="274320"/>
-          </a:xfrm>
-          <a:prstGeom prst="rect">
-            <a:avLst/>
-          </a:prstGeom>
-          <a:noFill/>
-        </p:spPr>
-        <p:txBody>
-          <a:bodyPr wrap="none" lIns="0" rIns="0" tIns="0" bIns="0">
-            <a:spAutoFit/>
-          </a:bodyPr>
-          <a:lstStyle/>
-          <a:p>
-            <a:pPr algn="l"/>
-            <a:r>
-              <a:rPr sz="1600" b="0">
-                <a:solidFill>
-                  <a:srgbClr val="F2F3E9"/>
-                </a:solidFill>
-                <a:latin typeface="Noto Sans SC"/>
-                <a:ea typeface="Noto Sans SC"/>
-              </a:rPr>
-              <a:t>K=2 容量2</a:t>
-            </a:r>
-          </a:p>
-        </p:txBody>
-      </p:sp>
-      <p:sp>
-        <p:nvSpPr>
-          <p:cNvPr id="34" name="TextBox 33"/>
-          <p:cNvSpPr txBox="1"/>
-          <p:nvPr/>
-        </p:nvSpPr>
-        <p:spPr>
-          <a:xfrm>
-            <a:off x="8117840" y="4796536"/>
-            <a:ext cx="347472" cy="274320"/>
-          </a:xfrm>
-          <a:prstGeom prst="rect">
-            <a:avLst/>
-          </a:prstGeom>
-          <a:noFill/>
-        </p:spPr>
-        <p:txBody>
-          <a:bodyPr wrap="none" lIns="0" rIns="0" tIns="0" bIns="0">
-            <a:spAutoFit/>
-          </a:bodyPr>
-          <a:lstStyle/>
-          <a:p>
-            <a:pPr algn="l"/>
-            <a:r>
-              <a:rPr sz="1600" b="0">
-                <a:solidFill>
-                  <a:srgbClr val="F2F3E9"/>
-                </a:solidFill>
-                <a:latin typeface="Noto Sans SC"/>
-                <a:ea typeface="Noto Sans SC"/>
-              </a:rPr>
-              <a:t>12</a:t>
-            </a:r>
-          </a:p>
-        </p:txBody>
-      </p:sp>
-      <p:sp>
-        <p:nvSpPr>
-          <p:cNvPr id="35" name="TextBox 34"/>
-          <p:cNvSpPr txBox="1"/>
-          <p:nvPr/>
-        </p:nvSpPr>
-        <p:spPr>
-          <a:xfrm>
-            <a:off x="9260840" y="4796536"/>
-            <a:ext cx="234696" cy="274320"/>
-          </a:xfrm>
-          <a:prstGeom prst="rect">
-            <a:avLst/>
-          </a:prstGeom>
-          <a:noFill/>
-        </p:spPr>
-        <p:txBody>
-          <a:bodyPr wrap="none" lIns="0" rIns="0" tIns="0" bIns="0">
-            <a:spAutoFit/>
-          </a:bodyPr>
-          <a:lstStyle/>
-          <a:p>
-            <a:pPr algn="l"/>
-            <a:r>
-              <a:rPr sz="1600" b="0">
-                <a:solidFill>
-                  <a:srgbClr val="F2F3E9"/>
-                </a:solidFill>
-                <a:latin typeface="Noto Sans SC"/>
-                <a:ea typeface="Noto Sans SC"/>
-              </a:rPr>
-              <a:t>8</a:t>
-            </a:r>
-          </a:p>
-        </p:txBody>
-      </p:sp>
-      <p:sp>
-        <p:nvSpPr>
-          <p:cNvPr id="36" name="TextBox 35"/>
-          <p:cNvSpPr txBox="1"/>
-          <p:nvPr/>
-        </p:nvSpPr>
-        <p:spPr>
-          <a:xfrm>
-            <a:off x="6212840" y="5215636"/>
-            <a:ext cx="1043432" cy="274320"/>
-          </a:xfrm>
-          <a:prstGeom prst="rect">
-            <a:avLst/>
-          </a:prstGeom>
-          <a:noFill/>
-        </p:spPr>
-        <p:txBody>
-          <a:bodyPr wrap="none" lIns="0" rIns="0" tIns="0" bIns="0">
-            <a:spAutoFit/>
-          </a:bodyPr>
-          <a:lstStyle/>
-          <a:p>
-            <a:pPr algn="l"/>
-            <a:r>
-              <a:rPr sz="1600" b="0">
-                <a:solidFill>
-                  <a:srgbClr val="F2F3E9"/>
-                </a:solidFill>
-                <a:latin typeface="Noto Sans SC"/>
-                <a:ea typeface="Noto Sans SC"/>
-              </a:rPr>
-              <a:t>K=2 容量3</a:t>
-            </a:r>
-          </a:p>
-        </p:txBody>
-      </p:sp>
-      <p:sp>
-        <p:nvSpPr>
           <p:cNvPr id="37" name="TextBox 36"/>
           <p:cNvSpPr txBox="1"/>
           <p:nvPr/>
         </p:nvSpPr>
         <p:spPr>
           <a:xfrm>
-            <a:off x="8117840" y="5215636"/>
-            <a:ext cx="347472" cy="274320"/>
-          </a:xfrm>
-          <a:prstGeom prst="rect">
-            <a:avLst/>
-          </a:prstGeom>
-          <a:noFill/>
-        </p:spPr>
-        <p:txBody>
-          <a:bodyPr wrap="none" lIns="0" rIns="0" tIns="0" bIns="0">
-            <a:spAutoFit/>
-          </a:bodyPr>
-          <a:lstStyle/>
-          <a:p>
-            <a:pPr algn="l"/>
-            <a:r>
-              <a:rPr sz="1600" b="0">
-                <a:solidFill>
-                  <a:srgbClr val="F2F3E9"/>
-                </a:solidFill>
-                <a:latin typeface="Noto Sans SC"/>
-                <a:ea typeface="Noto Sans SC"/>
-              </a:rPr>
-              <a:t>16</a:t>
-            </a:r>
-          </a:p>
-        </p:txBody>
-      </p:sp>
-      <p:sp>
-        <p:nvSpPr>
-          <p:cNvPr id="38" name="TextBox 37"/>
-          <p:cNvSpPr txBox="1"/>
-          <p:nvPr/>
-        </p:nvSpPr>
-        <p:spPr>
-          <a:xfrm>
             <a:off x="9260840" y="5215636"/>
-            <a:ext cx="234696" cy="274320"/>
+            <a:ext cx="236220" cy="274320"/>
           </a:xfrm>
           <a:prstGeom prst="rect">
             <a:avLst/>
@@ -18131,7 +17863,7 @@
         <p:spPr>
           <a:xfrm>
             <a:off x="563880" y="6512052"/>
-            <a:ext cx="1960626" cy="205740"/>
+            <a:ext cx="1951989" cy="205740"/>
           </a:xfrm>
           <a:prstGeom prst="rect">
             <a:avLst/>
@@ -18166,8 +17898,8 @@
         </p:nvSpPr>
         <p:spPr>
           <a:xfrm>
-            <a:off x="11108524" y="6499098"/>
-            <a:ext cx="561505" cy="222885"/>
+            <a:off x="11113770" y="6499098"/>
+            <a:ext cx="556260" cy="222885"/>
           </a:xfrm>
           <a:prstGeom prst="rect">
             <a:avLst/>
@@ -18196,43 +17928,7 @@
       </p:sp>
       <p:sp>
         <p:nvSpPr>
-          <p:cNvPr id="9" name="TextBox 8"/>
-          <p:cNvSpPr txBox="1"/>
-          <p:nvPr/>
-        </p:nvSpPr>
-        <p:spPr>
-          <a:xfrm>
-            <a:off x="10855147" y="377952"/>
-            <a:ext cx="811072" cy="205740"/>
-          </a:xfrm>
-          <a:prstGeom prst="rect">
-            <a:avLst/>
-          </a:prstGeom>
-          <a:noFill/>
-        </p:spPr>
-        <p:txBody>
-          <a:bodyPr wrap="none" lIns="0" rIns="0" tIns="0" bIns="0">
-            <a:spAutoFit/>
-          </a:bodyPr>
-          <a:lstStyle/>
-          <a:p>
-            <a:pPr algn="r"/>
-            <a:r>
-              <a:rPr sz="1200" b="0">
-                <a:solidFill>
-                  <a:srgbClr val="6F8F8F"/>
-                </a:solidFill>
-                <a:latin typeface="Noto Sans SC"/>
-                <a:ea typeface="Noto Sans SC"/>
-              </a:rPr>
-              <a:t>影片 02:06</a:t>
-            </a:r>
-          </a:p>
-        </p:txBody>
-      </p:sp>
-      <p:sp>
-        <p:nvSpPr>
-          <p:cNvPr id="10" name="Oval 9"/>
+          <p:cNvPr id="9" name="Oval 8"/>
           <p:cNvSpPr/>
           <p:nvPr/>
         </p:nvSpPr>
@@ -18274,7 +17970,7 @@
       </p:sp>
       <p:sp>
         <p:nvSpPr>
-          <p:cNvPr id="11" name="TextBox 10"/>
+          <p:cNvPr id="10" name="TextBox 9"/>
           <p:cNvSpPr txBox="1"/>
           <p:nvPr/>
         </p:nvSpPr>
@@ -18314,7 +18010,7 @@
       </p:sp>
       <p:sp>
         <p:nvSpPr>
-          <p:cNvPr id="12" name="Oval 11"/>
+          <p:cNvPr id="11" name="Oval 10"/>
           <p:cNvSpPr/>
           <p:nvPr/>
         </p:nvSpPr>
@@ -18356,7 +18052,7 @@
       </p:sp>
       <p:sp>
         <p:nvSpPr>
-          <p:cNvPr id="13" name="TextBox 12"/>
+          <p:cNvPr id="12" name="TextBox 11"/>
           <p:cNvSpPr txBox="1"/>
           <p:nvPr/>
         </p:nvSpPr>
@@ -18396,7 +18092,7 @@
       </p:sp>
       <p:sp>
         <p:nvSpPr>
-          <p:cNvPr id="14" name="Oval 13"/>
+          <p:cNvPr id="13" name="Oval 12"/>
           <p:cNvSpPr/>
           <p:nvPr/>
         </p:nvSpPr>
@@ -18438,7 +18134,7 @@
       </p:sp>
       <p:sp>
         <p:nvSpPr>
-          <p:cNvPr id="15" name="TextBox 14"/>
+          <p:cNvPr id="14" name="TextBox 13"/>
           <p:cNvSpPr txBox="1"/>
           <p:nvPr/>
         </p:nvSpPr>
@@ -18478,7 +18174,7 @@
       </p:sp>
       <p:sp>
         <p:nvSpPr>
-          <p:cNvPr id="16" name="Oval 15"/>
+          <p:cNvPr id="15" name="Oval 14"/>
           <p:cNvSpPr/>
           <p:nvPr/>
         </p:nvSpPr>
@@ -18520,7 +18216,7 @@
       </p:sp>
       <p:sp>
         <p:nvSpPr>
-          <p:cNvPr id="17" name="TextBox 16"/>
+          <p:cNvPr id="16" name="TextBox 15"/>
           <p:cNvSpPr txBox="1"/>
           <p:nvPr/>
         </p:nvSpPr>
@@ -18560,7 +18256,7 @@
       </p:sp>
       <p:sp>
         <p:nvSpPr>
-          <p:cNvPr id="18" name="Oval 17"/>
+          <p:cNvPr id="17" name="Oval 16"/>
           <p:cNvSpPr/>
           <p:nvPr/>
         </p:nvSpPr>
@@ -18602,7 +18298,7 @@
       </p:sp>
       <p:sp>
         <p:nvSpPr>
-          <p:cNvPr id="19" name="TextBox 18"/>
+          <p:cNvPr id="18" name="TextBox 17"/>
           <p:cNvSpPr txBox="1"/>
           <p:nvPr/>
         </p:nvSpPr>
@@ -18642,14 +18338,14 @@
       </p:sp>
       <p:sp>
         <p:nvSpPr>
-          <p:cNvPr id="20" name="Rounded Rectangle 19"/>
+          <p:cNvPr id="19" name="Rounded Rectangle 18"/>
           <p:cNvSpPr/>
           <p:nvPr/>
         </p:nvSpPr>
         <p:spPr>
           <a:xfrm>
-            <a:off x="7230975" y="1155700"/>
-            <a:ext cx="1051725" cy="228600"/>
+            <a:off x="7229788" y="1155700"/>
+            <a:ext cx="1054100" cy="228600"/>
           </a:xfrm>
           <a:prstGeom prst="roundRect">
             <a:avLst>
@@ -18688,14 +18384,14 @@
       </p:sp>
       <p:sp>
         <p:nvSpPr>
-          <p:cNvPr id="21" name="TextBox 20"/>
-          <p:cNvSpPr txBox="1"/>
-          <p:nvPr/>
-        </p:nvSpPr>
-        <p:spPr>
-          <a:xfrm>
-            <a:off x="7244945" y="1152398"/>
-            <a:ext cx="1023785" cy="222885"/>
+          <p:cNvPr id="20" name="TextBox 19"/>
+          <p:cNvSpPr txBox="1"/>
+          <p:nvPr/>
+        </p:nvSpPr>
+        <p:spPr>
+          <a:xfrm>
+            <a:off x="7243758" y="1152398"/>
+            <a:ext cx="1026160" cy="222885"/>
           </a:xfrm>
           <a:prstGeom prst="rect">
             <a:avLst/>
@@ -18724,7 +18420,7 @@
       </p:sp>
       <p:sp>
         <p:nvSpPr>
-          <p:cNvPr id="22" name="Rounded Rectangle 21"/>
+          <p:cNvPr id="21" name="Rounded Rectangle 20"/>
           <p:cNvSpPr/>
           <p:nvPr/>
         </p:nvSpPr>
@@ -18769,14 +18465,14 @@
       </p:sp>
       <p:sp>
         <p:nvSpPr>
-          <p:cNvPr id="23" name="Rounded Rectangle 22"/>
+          <p:cNvPr id="22" name="Rounded Rectangle 21"/>
           <p:cNvSpPr/>
           <p:nvPr/>
         </p:nvSpPr>
         <p:spPr>
           <a:xfrm>
-            <a:off x="8460811" y="5816600"/>
-            <a:ext cx="1051560" cy="228600"/>
+            <a:off x="8459541" y="5816600"/>
+            <a:ext cx="1054100" cy="228600"/>
           </a:xfrm>
           <a:prstGeom prst="roundRect">
             <a:avLst>
@@ -18815,14 +18511,14 @@
       </p:sp>
       <p:sp>
         <p:nvSpPr>
-          <p:cNvPr id="24" name="TextBox 23"/>
-          <p:cNvSpPr txBox="1"/>
-          <p:nvPr/>
-        </p:nvSpPr>
-        <p:spPr>
-          <a:xfrm>
-            <a:off x="8474781" y="5813298"/>
-            <a:ext cx="1023619" cy="222885"/>
+          <p:cNvPr id="23" name="TextBox 22"/>
+          <p:cNvSpPr txBox="1"/>
+          <p:nvPr/>
+        </p:nvSpPr>
+        <p:spPr>
+          <a:xfrm>
+            <a:off x="8473511" y="5813298"/>
+            <a:ext cx="1026160" cy="222885"/>
           </a:xfrm>
           <a:prstGeom prst="rect">
             <a:avLst/>
@@ -18851,7 +18547,7 @@
       </p:sp>
       <p:sp>
         <p:nvSpPr>
-          <p:cNvPr id="25" name="Rounded Rectangle 24"/>
+          <p:cNvPr id="24" name="Rounded Rectangle 23"/>
           <p:cNvSpPr/>
           <p:nvPr/>
         </p:nvSpPr>
@@ -18896,7 +18592,7 @@
       </p:sp>
       <p:cxnSp>
         <p:nvCxnSpPr>
-          <p:cNvPr id="26" name="Connector 25"/>
+          <p:cNvPr id="25" name="Connector 24"/>
           <p:cNvCxnSpPr/>
           <p:nvPr/>
         </p:nvCxnSpPr>
@@ -18931,7 +18627,7 @@
       </p:cxnSp>
       <p:sp>
         <p:nvSpPr>
-          <p:cNvPr id="27" name="Oval 26"/>
+          <p:cNvPr id="26" name="Oval 25"/>
           <p:cNvSpPr/>
           <p:nvPr/>
         </p:nvSpPr>
@@ -18975,14 +18671,14 @@
       </p:sp>
       <p:sp>
         <p:nvSpPr>
-          <p:cNvPr id="28" name="TextBox 27"/>
-          <p:cNvSpPr txBox="1"/>
-          <p:nvPr/>
-        </p:nvSpPr>
-        <p:spPr>
-          <a:xfrm>
-            <a:off x="7625567" y="1555974"/>
-            <a:ext cx="241808" cy="274320"/>
+          <p:cNvPr id="27" name="TextBox 26"/>
+          <p:cNvSpPr txBox="1"/>
+          <p:nvPr/>
+        </p:nvSpPr>
+        <p:spPr>
+          <a:xfrm>
+            <a:off x="7625186" y="1555974"/>
+            <a:ext cx="242570" cy="274320"/>
           </a:xfrm>
           <a:prstGeom prst="rect">
             <a:avLst/>
@@ -19011,7 +18707,7 @@
       </p:sp>
       <p:cxnSp>
         <p:nvCxnSpPr>
-          <p:cNvPr id="29" name="Connector 28"/>
+          <p:cNvPr id="28" name="Connector 27"/>
           <p:cNvCxnSpPr/>
           <p:nvPr/>
         </p:nvCxnSpPr>
@@ -19025,8 +18721,9 @@
           </a:prstGeom>
           <a:ln w="25400">
             <a:solidFill>
-              <a:srgbClr val="5D7C80"/>
+              <a:srgbClr val="DB7B72"/>
             </a:solidFill>
+            <a:prstDash val="dash"/>
           </a:ln>
         </p:spPr>
         <p:style>
@@ -19046,7 +18743,7 @@
       </p:cxnSp>
       <p:sp>
         <p:nvSpPr>
-          <p:cNvPr id="30" name="Oval 29"/>
+          <p:cNvPr id="29" name="Oval 28"/>
           <p:cNvSpPr/>
           <p:nvPr/>
         </p:nvSpPr>
@@ -19090,14 +18787,14 @@
       </p:sp>
       <p:sp>
         <p:nvSpPr>
-          <p:cNvPr id="31" name="TextBox 30"/>
-          <p:cNvSpPr txBox="1"/>
-          <p:nvPr/>
-        </p:nvSpPr>
-        <p:spPr>
-          <a:xfrm>
-            <a:off x="7337163" y="2523263"/>
-            <a:ext cx="241808" cy="274320"/>
+          <p:cNvPr id="30" name="TextBox 29"/>
+          <p:cNvSpPr txBox="1"/>
+          <p:nvPr/>
+        </p:nvSpPr>
+        <p:spPr>
+          <a:xfrm>
+            <a:off x="7336782" y="2523263"/>
+            <a:ext cx="242570" cy="274320"/>
           </a:xfrm>
           <a:prstGeom prst="rect">
             <a:avLst/>
@@ -19126,7 +18823,7 @@
       </p:sp>
       <p:cxnSp>
         <p:nvCxnSpPr>
-          <p:cNvPr id="32" name="Connector 31"/>
+          <p:cNvPr id="31" name="Connector 30"/>
           <p:cNvCxnSpPr/>
           <p:nvPr/>
         </p:nvCxnSpPr>
@@ -19140,8 +18837,9 @@
           </a:prstGeom>
           <a:ln w="25400">
             <a:solidFill>
-              <a:srgbClr val="5D7C80"/>
+              <a:srgbClr val="DB7B72"/>
             </a:solidFill>
+            <a:prstDash val="dash"/>
           </a:ln>
         </p:spPr>
         <p:style>
@@ -19161,7 +18859,7 @@
       </p:cxnSp>
       <p:sp>
         <p:nvSpPr>
-          <p:cNvPr id="33" name="Oval 32"/>
+          <p:cNvPr id="32" name="Oval 31"/>
           <p:cNvSpPr/>
           <p:nvPr/>
         </p:nvSpPr>
@@ -19205,14 +18903,14 @@
       </p:sp>
       <p:sp>
         <p:nvSpPr>
-          <p:cNvPr id="34" name="TextBox 33"/>
-          <p:cNvSpPr txBox="1"/>
-          <p:nvPr/>
-        </p:nvSpPr>
-        <p:spPr>
-          <a:xfrm>
-            <a:off x="8438483" y="2607880"/>
-            <a:ext cx="241808" cy="274320"/>
+          <p:cNvPr id="33" name="TextBox 32"/>
+          <p:cNvSpPr txBox="1"/>
+          <p:nvPr/>
+        </p:nvSpPr>
+        <p:spPr>
+          <a:xfrm>
+            <a:off x="8438102" y="2607880"/>
+            <a:ext cx="242570" cy="274320"/>
           </a:xfrm>
           <a:prstGeom prst="rect">
             <a:avLst/>
@@ -19241,7 +18939,7 @@
       </p:sp>
       <p:cxnSp>
         <p:nvCxnSpPr>
-          <p:cNvPr id="35" name="Connector 34"/>
+          <p:cNvPr id="34" name="Connector 33"/>
           <p:cNvCxnSpPr/>
           <p:nvPr/>
         </p:nvCxnSpPr>
@@ -19255,8 +18953,9 @@
           </a:prstGeom>
           <a:ln w="25400">
             <a:solidFill>
-              <a:srgbClr val="5D7C80"/>
+              <a:srgbClr val="DB7B72"/>
             </a:solidFill>
+            <a:prstDash val="dash"/>
           </a:ln>
         </p:spPr>
         <p:style>
@@ -19276,7 +18975,7 @@
       </p:cxnSp>
       <p:sp>
         <p:nvSpPr>
-          <p:cNvPr id="36" name="Oval 35"/>
+          <p:cNvPr id="35" name="Oval 34"/>
           <p:cNvSpPr/>
           <p:nvPr/>
         </p:nvSpPr>
@@ -19320,14 +19019,14 @@
       </p:sp>
       <p:sp>
         <p:nvSpPr>
-          <p:cNvPr id="37" name="TextBox 36"/>
-          <p:cNvSpPr txBox="1"/>
-          <p:nvPr/>
-        </p:nvSpPr>
-        <p:spPr>
-          <a:xfrm>
-            <a:off x="9053110" y="3832665"/>
-            <a:ext cx="241808" cy="274320"/>
+          <p:cNvPr id="36" name="TextBox 35"/>
+          <p:cNvSpPr txBox="1"/>
+          <p:nvPr/>
+        </p:nvSpPr>
+        <p:spPr>
+          <a:xfrm>
+            <a:off x="9052729" y="3832665"/>
+            <a:ext cx="242570" cy="274320"/>
           </a:xfrm>
           <a:prstGeom prst="rect">
             <a:avLst/>
@@ -19356,7 +19055,7 @@
       </p:sp>
       <p:cxnSp>
         <p:nvCxnSpPr>
-          <p:cNvPr id="38" name="Connector 37"/>
+          <p:cNvPr id="37" name="Connector 36"/>
           <p:cNvCxnSpPr/>
           <p:nvPr/>
         </p:nvCxnSpPr>
@@ -19370,8 +19069,9 @@
           </a:prstGeom>
           <a:ln w="25400">
             <a:solidFill>
-              <a:srgbClr val="5D7C80"/>
+              <a:srgbClr val="DB7B72"/>
             </a:solidFill>
+            <a:prstDash val="dash"/>
           </a:ln>
         </p:spPr>
         <p:style>
@@ -19391,7 +19091,7 @@
       </p:cxnSp>
       <p:sp>
         <p:nvSpPr>
-          <p:cNvPr id="39" name="Oval 38"/>
+          <p:cNvPr id="38" name="Oval 37"/>
           <p:cNvSpPr/>
           <p:nvPr/>
         </p:nvSpPr>
@@ -19435,14 +19135,14 @@
       </p:sp>
       <p:sp>
         <p:nvSpPr>
-          <p:cNvPr id="40" name="TextBox 39"/>
-          <p:cNvSpPr txBox="1"/>
-          <p:nvPr/>
-        </p:nvSpPr>
-        <p:spPr>
-          <a:xfrm>
-            <a:off x="7909687" y="4312676"/>
-            <a:ext cx="241808" cy="274320"/>
+          <p:cNvPr id="39" name="TextBox 38"/>
+          <p:cNvSpPr txBox="1"/>
+          <p:nvPr/>
+        </p:nvSpPr>
+        <p:spPr>
+          <a:xfrm>
+            <a:off x="7909306" y="4312676"/>
+            <a:ext cx="242570" cy="274320"/>
           </a:xfrm>
           <a:prstGeom prst="rect">
             <a:avLst/>
@@ -19471,7 +19171,7 @@
       </p:sp>
       <p:cxnSp>
         <p:nvCxnSpPr>
-          <p:cNvPr id="41" name="Connector 40"/>
+          <p:cNvPr id="40" name="Connector 39"/>
           <p:cNvCxnSpPr/>
           <p:nvPr/>
         </p:nvCxnSpPr>
@@ -19506,7 +19206,7 @@
       </p:cxnSp>
       <p:sp>
         <p:nvSpPr>
-          <p:cNvPr id="42" name="Oval 41"/>
+          <p:cNvPr id="41" name="Oval 40"/>
           <p:cNvSpPr/>
           <p:nvPr/>
         </p:nvSpPr>
@@ -19550,14 +19250,14 @@
       </p:sp>
       <p:sp>
         <p:nvSpPr>
-          <p:cNvPr id="43" name="TextBox 42"/>
-          <p:cNvSpPr txBox="1"/>
-          <p:nvPr/>
-        </p:nvSpPr>
-        <p:spPr>
-          <a:xfrm>
-            <a:off x="8904036" y="4954496"/>
-            <a:ext cx="241808" cy="274320"/>
+          <p:cNvPr id="42" name="TextBox 41"/>
+          <p:cNvSpPr txBox="1"/>
+          <p:nvPr/>
+        </p:nvSpPr>
+        <p:spPr>
+          <a:xfrm>
+            <a:off x="8903655" y="4954496"/>
+            <a:ext cx="242570" cy="274320"/>
           </a:xfrm>
           <a:prstGeom prst="rect">
             <a:avLst/>
@@ -19586,7 +19286,7 @@
       </p:sp>
       <p:sp>
         <p:nvSpPr>
-          <p:cNvPr id="44" name="Oval 43"/>
+          <p:cNvPr id="43" name="Oval 42"/>
           <p:cNvSpPr/>
           <p:nvPr/>
         </p:nvSpPr>
@@ -19630,14 +19330,14 @@
       </p:sp>
       <p:sp>
         <p:nvSpPr>
-          <p:cNvPr id="45" name="TextBox 44"/>
-          <p:cNvSpPr txBox="1"/>
-          <p:nvPr/>
-        </p:nvSpPr>
-        <p:spPr>
-          <a:xfrm>
-            <a:off x="6539825" y="1846576"/>
-            <a:ext cx="269659" cy="291465"/>
+          <p:cNvPr id="44" name="TextBox 43"/>
+          <p:cNvSpPr txBox="1"/>
+          <p:nvPr/>
+        </p:nvSpPr>
+        <p:spPr>
+          <a:xfrm>
+            <a:off x="6540034" y="1846576"/>
+            <a:ext cx="269240" cy="291465"/>
           </a:xfrm>
           <a:prstGeom prst="rect">
             <a:avLst/>
@@ -19666,7 +19366,7 @@
       </p:sp>
       <p:sp>
         <p:nvSpPr>
-          <p:cNvPr id="46" name="Oval 45"/>
+          <p:cNvPr id="45" name="Oval 44"/>
           <p:cNvSpPr/>
           <p:nvPr/>
         </p:nvSpPr>
@@ -19710,14 +19410,14 @@
       </p:sp>
       <p:sp>
         <p:nvSpPr>
-          <p:cNvPr id="47" name="TextBox 46"/>
-          <p:cNvSpPr txBox="1"/>
-          <p:nvPr/>
-        </p:nvSpPr>
-        <p:spPr>
-          <a:xfrm>
-            <a:off x="8700737" y="1699006"/>
-            <a:ext cx="276567" cy="291465"/>
+          <p:cNvPr id="46" name="TextBox 45"/>
+          <p:cNvSpPr txBox="1"/>
+          <p:nvPr/>
+        </p:nvSpPr>
+        <p:spPr>
+          <a:xfrm>
+            <a:off x="8701226" y="1699006"/>
+            <a:ext cx="275590" cy="291465"/>
           </a:xfrm>
           <a:prstGeom prst="rect">
             <a:avLst/>
@@ -19746,7 +19446,7 @@
       </p:sp>
       <p:sp>
         <p:nvSpPr>
-          <p:cNvPr id="48" name="Oval 47"/>
+          <p:cNvPr id="47" name="Oval 46"/>
           <p:cNvSpPr/>
           <p:nvPr/>
         </p:nvSpPr>
@@ -19790,14 +19490,14 @@
       </p:sp>
       <p:sp>
         <p:nvSpPr>
-          <p:cNvPr id="49" name="TextBox 48"/>
-          <p:cNvSpPr txBox="1"/>
-          <p:nvPr/>
-        </p:nvSpPr>
-        <p:spPr>
-          <a:xfrm>
-            <a:off x="7867203" y="3519041"/>
-            <a:ext cx="271170" cy="291465"/>
+          <p:cNvPr id="48" name="TextBox 47"/>
+          <p:cNvSpPr txBox="1"/>
+          <p:nvPr/>
+        </p:nvSpPr>
+        <p:spPr>
+          <a:xfrm>
+            <a:off x="7868168" y="3519041"/>
+            <a:ext cx="269240" cy="291465"/>
           </a:xfrm>
           <a:prstGeom prst="rect">
             <a:avLst/>
@@ -19826,7 +19526,7 @@
       </p:sp>
       <p:sp>
         <p:nvSpPr>
-          <p:cNvPr id="50" name="Oval 49"/>
+          <p:cNvPr id="49" name="Oval 48"/>
           <p:cNvSpPr/>
           <p:nvPr/>
         </p:nvSpPr>
@@ -19870,14 +19570,14 @@
       </p:sp>
       <p:sp>
         <p:nvSpPr>
-          <p:cNvPr id="51" name="TextBox 50"/>
-          <p:cNvSpPr txBox="1"/>
-          <p:nvPr/>
-        </p:nvSpPr>
-        <p:spPr>
-          <a:xfrm>
-            <a:off x="10074498" y="4552034"/>
-            <a:ext cx="283692" cy="291465"/>
+          <p:cNvPr id="50" name="TextBox 49"/>
+          <p:cNvSpPr txBox="1"/>
+          <p:nvPr/>
+        </p:nvSpPr>
+        <p:spPr>
+          <a:xfrm>
+            <a:off x="10075375" y="4552034"/>
+            <a:ext cx="281939" cy="291465"/>
           </a:xfrm>
           <a:prstGeom prst="rect">
             <a:avLst/>
@@ -19906,7 +19606,7 @@
       </p:sp>
       <p:sp>
         <p:nvSpPr>
-          <p:cNvPr id="52" name="Oval 51"/>
+          <p:cNvPr id="51" name="Oval 50"/>
           <p:cNvSpPr/>
           <p:nvPr/>
         </p:nvSpPr>
@@ -19950,14 +19650,14 @@
       </p:sp>
       <p:sp>
         <p:nvSpPr>
-          <p:cNvPr id="53" name="TextBox 52"/>
-          <p:cNvSpPr txBox="1"/>
-          <p:nvPr/>
-        </p:nvSpPr>
-        <p:spPr>
-          <a:xfrm>
-            <a:off x="7625678" y="5191506"/>
-            <a:ext cx="262318" cy="291465"/>
+          <p:cNvPr id="52" name="TextBox 51"/>
+          <p:cNvSpPr txBox="1"/>
+          <p:nvPr/>
+        </p:nvSpPr>
+        <p:spPr>
+          <a:xfrm>
+            <a:off x="7625393" y="5191506"/>
+            <a:ext cx="262890" cy="291465"/>
           </a:xfrm>
           <a:prstGeom prst="rect">
             <a:avLst/>
@@ -19986,14 +19686,14 @@
       </p:sp>
       <p:sp>
         <p:nvSpPr>
-          <p:cNvPr id="54" name="Rounded Rectangle 53"/>
+          <p:cNvPr id="53" name="Rounded Rectangle 52"/>
           <p:cNvSpPr/>
           <p:nvPr/>
         </p:nvSpPr>
         <p:spPr>
           <a:xfrm>
-            <a:off x="7078275" y="5880100"/>
-            <a:ext cx="2988449" cy="292100"/>
+            <a:off x="7070725" y="5880100"/>
+            <a:ext cx="3003550" cy="292100"/>
           </a:xfrm>
           <a:prstGeom prst="roundRect">
             <a:avLst>
@@ -20032,14 +19732,14 @@
       </p:sp>
       <p:sp>
         <p:nvSpPr>
-          <p:cNvPr id="55" name="TextBox 54"/>
-          <p:cNvSpPr txBox="1"/>
-          <p:nvPr/>
-        </p:nvSpPr>
-        <p:spPr>
-          <a:xfrm>
-            <a:off x="7123995" y="5940298"/>
-            <a:ext cx="2897009" cy="222885"/>
+          <p:cNvPr id="54" name="TextBox 53"/>
+          <p:cNvSpPr txBox="1"/>
+          <p:nvPr/>
+        </p:nvSpPr>
+        <p:spPr>
+          <a:xfrm>
+            <a:off x="7116445" y="5940298"/>
+            <a:ext cx="2912110" cy="222885"/>
           </a:xfrm>
           <a:prstGeom prst="rect">
             <a:avLst/>
@@ -20292,7 +19992,7 @@
         <p:spPr>
           <a:xfrm>
             <a:off x="563880" y="6512052"/>
-            <a:ext cx="1960626" cy="205740"/>
+            <a:ext cx="1951989" cy="205740"/>
           </a:xfrm>
           <a:prstGeom prst="rect">
             <a:avLst/>
@@ -20327,8 +20027,8 @@
         </p:nvSpPr>
         <p:spPr>
           <a:xfrm>
-            <a:off x="11108524" y="6499098"/>
-            <a:ext cx="561505" cy="222885"/>
+            <a:off x="11113770" y="6499098"/>
+            <a:ext cx="556260" cy="222885"/>
           </a:xfrm>
           <a:prstGeom prst="rect">
             <a:avLst/>
@@ -20357,43 +20057,7 @@
       </p:sp>
       <p:sp>
         <p:nvSpPr>
-          <p:cNvPr id="9" name="TextBox 8"/>
-          <p:cNvSpPr txBox="1"/>
-          <p:nvPr/>
-        </p:nvSpPr>
-        <p:spPr>
-          <a:xfrm>
-            <a:off x="10855147" y="377952"/>
-            <a:ext cx="811072" cy="205740"/>
-          </a:xfrm>
-          <a:prstGeom prst="rect">
-            <a:avLst/>
-          </a:prstGeom>
-          <a:noFill/>
-        </p:spPr>
-        <p:txBody>
-          <a:bodyPr wrap="none" lIns="0" rIns="0" tIns="0" bIns="0">
-            <a:spAutoFit/>
-          </a:bodyPr>
-          <a:lstStyle/>
-          <a:p>
-            <a:pPr algn="r"/>
-            <a:r>
-              <a:rPr sz="1200" b="0">
-                <a:solidFill>
-                  <a:srgbClr val="6F8F8F"/>
-                </a:solidFill>
-                <a:latin typeface="Noto Sans SC"/>
-                <a:ea typeface="Noto Sans SC"/>
-              </a:rPr>
-              <a:t>影片 02:35</a:t>
-            </a:r>
-          </a:p>
-        </p:txBody>
-      </p:sp>
-      <p:sp>
-        <p:nvSpPr>
-          <p:cNvPr id="10" name="Oval 9"/>
+          <p:cNvPr id="9" name="Oval 8"/>
           <p:cNvSpPr/>
           <p:nvPr/>
         </p:nvSpPr>
@@ -20435,7 +20099,7 @@
       </p:sp>
       <p:sp>
         <p:nvSpPr>
-          <p:cNvPr id="11" name="TextBox 10"/>
+          <p:cNvPr id="10" name="TextBox 9"/>
           <p:cNvSpPr txBox="1"/>
           <p:nvPr/>
         </p:nvSpPr>
@@ -20475,7 +20139,7 @@
       </p:sp>
       <p:sp>
         <p:nvSpPr>
-          <p:cNvPr id="12" name="Oval 11"/>
+          <p:cNvPr id="11" name="Oval 10"/>
           <p:cNvSpPr/>
           <p:nvPr/>
         </p:nvSpPr>
@@ -20517,7 +20181,7 @@
       </p:sp>
       <p:sp>
         <p:nvSpPr>
-          <p:cNvPr id="13" name="TextBox 12"/>
+          <p:cNvPr id="12" name="TextBox 11"/>
           <p:cNvSpPr txBox="1"/>
           <p:nvPr/>
         </p:nvSpPr>
@@ -20557,7 +20221,7 @@
       </p:sp>
       <p:sp>
         <p:nvSpPr>
-          <p:cNvPr id="14" name="Oval 13"/>
+          <p:cNvPr id="13" name="Oval 12"/>
           <p:cNvSpPr/>
           <p:nvPr/>
         </p:nvSpPr>
@@ -20599,7 +20263,7 @@
       </p:sp>
       <p:sp>
         <p:nvSpPr>
-          <p:cNvPr id="15" name="TextBox 14"/>
+          <p:cNvPr id="14" name="TextBox 13"/>
           <p:cNvSpPr txBox="1"/>
           <p:nvPr/>
         </p:nvSpPr>
@@ -20639,7 +20303,7 @@
       </p:sp>
       <p:sp>
         <p:nvSpPr>
-          <p:cNvPr id="16" name="Oval 15"/>
+          <p:cNvPr id="15" name="Oval 14"/>
           <p:cNvSpPr/>
           <p:nvPr/>
         </p:nvSpPr>
@@ -20681,7 +20345,7 @@
       </p:sp>
       <p:sp>
         <p:nvSpPr>
-          <p:cNvPr id="17" name="TextBox 16"/>
+          <p:cNvPr id="16" name="TextBox 15"/>
           <p:cNvSpPr txBox="1"/>
           <p:nvPr/>
         </p:nvSpPr>
@@ -20721,7 +20385,7 @@
       </p:sp>
       <p:sp>
         <p:nvSpPr>
-          <p:cNvPr id="18" name="Oval 17"/>
+          <p:cNvPr id="17" name="Oval 16"/>
           <p:cNvSpPr/>
           <p:nvPr/>
         </p:nvSpPr>
@@ -20763,7 +20427,7 @@
       </p:sp>
       <p:sp>
         <p:nvSpPr>
-          <p:cNvPr id="19" name="TextBox 18"/>
+          <p:cNvPr id="18" name="TextBox 17"/>
           <p:cNvSpPr txBox="1"/>
           <p:nvPr/>
         </p:nvSpPr>
@@ -20803,7 +20467,7 @@
       </p:sp>
       <p:sp>
         <p:nvSpPr>
-          <p:cNvPr id="20" name="Rounded Rectangle 19"/>
+          <p:cNvPr id="19" name="Rounded Rectangle 18"/>
           <p:cNvSpPr/>
           <p:nvPr/>
         </p:nvSpPr>
@@ -20849,14 +20513,50 @@
       </p:sp>
       <p:sp>
         <p:nvSpPr>
+          <p:cNvPr id="20" name="TextBox 19"/>
+          <p:cNvSpPr txBox="1"/>
+          <p:nvPr/>
+        </p:nvSpPr>
+        <p:spPr>
+          <a:xfrm>
+            <a:off x="5898832" y="1768983"/>
+            <a:ext cx="156210" cy="180022"/>
+          </a:xfrm>
+          <a:prstGeom prst="rect">
+            <a:avLst/>
+          </a:prstGeom>
+          <a:noFill/>
+        </p:spPr>
+        <p:txBody>
+          <a:bodyPr wrap="none" lIns="0" rIns="0" tIns="0" bIns="0">
+            <a:spAutoFit/>
+          </a:bodyPr>
+          <a:lstStyle/>
+          <a:p>
+            <a:pPr algn="l"/>
+            <a:r>
+              <a:rPr sz="1050" b="0">
+                <a:solidFill>
+                  <a:srgbClr val="6F8F8F"/>
+                </a:solidFill>
+                <a:latin typeface="Noto Sans SC"/>
+                <a:ea typeface="Noto Sans SC"/>
+              </a:rPr>
+              <a:t>1</a:t>
+            </a:r>
+          </a:p>
+        </p:txBody>
+      </p:sp>
+      <p:sp>
+        <p:nvSpPr>
           <p:cNvPr id="21" name="TextBox 20"/>
           <p:cNvSpPr txBox="1"/>
           <p:nvPr/>
         </p:nvSpPr>
         <p:spPr>
           <a:xfrm>
-            <a:off x="5898832" y="1768983"/>
-            <a:ext cx="154019" cy="180022"/>
+            <a:off x="6189027" y="1730120"/>
+            <a:ext cx="769620" cy="231457"/>
           </a:xfrm>
           <a:prstGeom prst="rect">
             <a:avLst/>
@@ -20871,6 +20571,150 @@
           <a:p>
             <a:pPr algn="l"/>
             <a:r>
+              <a:rPr sz="1350" b="0">
+                <a:solidFill>
+                  <a:srgbClr val="DFEADF"/>
+                </a:solidFill>
+                <a:latin typeface="Noto Sans SC"/>
+                <a:ea typeface="Noto Sans SC"/>
+              </a:rPr>
+              <a:t>clusters </a:t>
+            </a:r>
+          </a:p>
+        </p:txBody>
+      </p:sp>
+      <p:sp>
+        <p:nvSpPr>
+          <p:cNvPr id="22" name="TextBox 21"/>
+          <p:cNvSpPr txBox="1"/>
+          <p:nvPr/>
+        </p:nvSpPr>
+        <p:spPr>
+          <a:xfrm>
+            <a:off x="6855777" y="1730120"/>
+            <a:ext cx="274320" cy="231457"/>
+          </a:xfrm>
+          <a:prstGeom prst="rect">
+            <a:avLst/>
+          </a:prstGeom>
+          <a:noFill/>
+        </p:spPr>
+        <p:txBody>
+          <a:bodyPr wrap="none" lIns="0" rIns="0" tIns="0" bIns="0">
+            <a:spAutoFit/>
+          </a:bodyPr>
+          <a:lstStyle/>
+          <a:p>
+            <a:pPr algn="l"/>
+            <a:r>
+              <a:rPr sz="1350" b="0">
+                <a:solidFill>
+                  <a:srgbClr val="DFEADF"/>
+                </a:solidFill>
+                <a:latin typeface="Noto Sans SC"/>
+                <a:ea typeface="Noto Sans SC"/>
+              </a:rPr>
+              <a:t>←</a:t>
+            </a:r>
+          </a:p>
+        </p:txBody>
+      </p:sp>
+      <p:sp>
+        <p:nvSpPr>
+          <p:cNvPr id="23" name="TextBox 22"/>
+          <p:cNvSpPr txBox="1"/>
+          <p:nvPr/>
+        </p:nvSpPr>
+        <p:spPr>
+          <a:xfrm>
+            <a:off x="7027227" y="1730120"/>
+            <a:ext cx="140970" cy="231457"/>
+          </a:xfrm>
+          <a:prstGeom prst="rect">
+            <a:avLst/>
+          </a:prstGeom>
+          <a:noFill/>
+        </p:spPr>
+        <p:txBody>
+          <a:bodyPr wrap="none" lIns="0" rIns="0" tIns="0" bIns="0">
+            <a:spAutoFit/>
+          </a:bodyPr>
+          <a:lstStyle/>
+          <a:p>
+            <a:pPr algn="l"/>
+            <a:r>
+              <a:rPr sz="1350" b="0">
+                <a:solidFill>
+                  <a:srgbClr val="DFEADF"/>
+                </a:solidFill>
+                <a:latin typeface="Noto Sans SC"/>
+                <a:ea typeface="Noto Sans SC"/>
+              </a:rPr>
+              <a:t> </a:t>
+            </a:r>
+          </a:p>
+        </p:txBody>
+      </p:sp>
+      <p:sp>
+        <p:nvSpPr>
+          <p:cNvPr id="24" name="TextBox 23"/>
+          <p:cNvSpPr txBox="1"/>
+          <p:nvPr/>
+        </p:nvSpPr>
+        <p:spPr>
+          <a:xfrm>
+            <a:off x="7065327" y="1730120"/>
+            <a:ext cx="1645920" cy="231457"/>
+          </a:xfrm>
+          <a:prstGeom prst="rect">
+            <a:avLst/>
+          </a:prstGeom>
+          <a:noFill/>
+        </p:spPr>
+        <p:txBody>
+          <a:bodyPr wrap="none" lIns="0" rIns="0" tIns="0" bIns="0">
+            <a:spAutoFit/>
+          </a:bodyPr>
+          <a:lstStyle/>
+          <a:p>
+            <a:pPr algn="l"/>
+            <a:r>
+              <a:rPr sz="1350" b="0">
+                <a:solidFill>
+                  <a:srgbClr val="DFEADF"/>
+                </a:solidFill>
+                <a:latin typeface="Noto Sans SC"/>
+                <a:ea typeface="Noto Sans SC"/>
+              </a:rPr>
+              <a:t>每个节点一个单点簇</a:t>
+            </a:r>
+          </a:p>
+        </p:txBody>
+      </p:sp>
+      <p:sp>
+        <p:nvSpPr>
+          <p:cNvPr id="25" name="TextBox 24"/>
+          <p:cNvSpPr txBox="1"/>
+          <p:nvPr/>
+        </p:nvSpPr>
+        <p:spPr>
+          <a:xfrm>
+            <a:off x="5898832" y="2175383"/>
+            <a:ext cx="156210" cy="180022"/>
+          </a:xfrm>
+          <a:prstGeom prst="rect">
+            <a:avLst/>
+          </a:prstGeom>
+          <a:noFill/>
+        </p:spPr>
+        <p:txBody>
+          <a:bodyPr wrap="none" lIns="0" rIns="0" tIns="0" bIns="0">
+            <a:spAutoFit/>
+          </a:bodyPr>
+          <a:lstStyle/>
+          <a:p>
+            <a:pPr algn="l"/>
+            <a:r>
               <a:rPr sz="1050" b="0">
                 <a:solidFill>
                   <a:srgbClr val="6F8F8F"/>
@@ -20878,21 +20722,21 @@
                 <a:latin typeface="Noto Sans SC"/>
                 <a:ea typeface="Noto Sans SC"/>
               </a:rPr>
-              <a:t>1</a:t>
-            </a:r>
-          </a:p>
-        </p:txBody>
-      </p:sp>
-      <p:sp>
-        <p:nvSpPr>
-          <p:cNvPr id="22" name="TextBox 21"/>
-          <p:cNvSpPr txBox="1"/>
-          <p:nvPr/>
-        </p:nvSpPr>
-        <p:spPr>
-          <a:xfrm>
-            <a:off x="6189027" y="1730120"/>
-            <a:ext cx="768096" cy="231457"/>
+              <a:t>2</a:t>
+            </a:r>
+          </a:p>
+        </p:txBody>
+      </p:sp>
+      <p:sp>
+        <p:nvSpPr>
+          <p:cNvPr id="26" name="TextBox 25"/>
+          <p:cNvSpPr txBox="1"/>
+          <p:nvPr/>
+        </p:nvSpPr>
+        <p:spPr>
+          <a:xfrm>
+            <a:off x="6189027" y="2136521"/>
+            <a:ext cx="572770" cy="231457"/>
           </a:xfrm>
           <a:prstGeom prst="rect">
             <a:avLst/>
@@ -20914,20 +20758,164 @@
                 <a:latin typeface="Noto Sans SC"/>
                 <a:ea typeface="Noto Sans SC"/>
               </a:rPr>
-              <a:t>clusters </a:t>
-            </a:r>
-          </a:p>
-        </p:txBody>
-      </p:sp>
-      <p:sp>
-        <p:nvSpPr>
-          <p:cNvPr id="23" name="TextBox 22"/>
-          <p:cNvSpPr txBox="1"/>
-          <p:nvPr/>
-        </p:nvSpPr>
-        <p:spPr>
-          <a:xfrm>
-            <a:off x="6854253" y="1730120"/>
+              <a:t>while </a:t>
+            </a:r>
+          </a:p>
+        </p:txBody>
+      </p:sp>
+      <p:sp>
+        <p:nvSpPr>
+          <p:cNvPr id="27" name="TextBox 26"/>
+          <p:cNvSpPr txBox="1"/>
+          <p:nvPr/>
+        </p:nvSpPr>
+        <p:spPr>
+          <a:xfrm>
+            <a:off x="6658927" y="2136521"/>
+            <a:ext cx="445770" cy="231457"/>
+          </a:xfrm>
+          <a:prstGeom prst="rect">
+            <a:avLst/>
+          </a:prstGeom>
+          <a:noFill/>
+        </p:spPr>
+        <p:txBody>
+          <a:bodyPr wrap="none" lIns="0" rIns="0" tIns="0" bIns="0">
+            <a:spAutoFit/>
+          </a:bodyPr>
+          <a:lstStyle/>
+          <a:p>
+            <a:pPr algn="l"/>
+            <a:r>
+              <a:rPr sz="1350" b="0">
+                <a:solidFill>
+                  <a:srgbClr val="DFEADF"/>
+                </a:solidFill>
+                <a:latin typeface="Noto Sans SC"/>
+                <a:ea typeface="Noto Sans SC"/>
+              </a:rPr>
+              <a:t>簇数</a:t>
+            </a:r>
+          </a:p>
+        </p:txBody>
+      </p:sp>
+      <p:sp>
+        <p:nvSpPr>
+          <p:cNvPr id="28" name="TextBox 27"/>
+          <p:cNvSpPr txBox="1"/>
+          <p:nvPr/>
+        </p:nvSpPr>
+        <p:spPr>
+          <a:xfrm>
+            <a:off x="7001827" y="2136521"/>
+            <a:ext cx="433070" cy="231457"/>
+          </a:xfrm>
+          <a:prstGeom prst="rect">
+            <a:avLst/>
+          </a:prstGeom>
+          <a:noFill/>
+        </p:spPr>
+        <p:txBody>
+          <a:bodyPr wrap="none" lIns="0" rIns="0" tIns="0" bIns="0">
+            <a:spAutoFit/>
+          </a:bodyPr>
+          <a:lstStyle/>
+          <a:p>
+            <a:pPr algn="l"/>
+            <a:r>
+              <a:rPr sz="1350" b="0">
+                <a:solidFill>
+                  <a:srgbClr val="DFEADF"/>
+                </a:solidFill>
+                <a:latin typeface="Noto Sans SC"/>
+                <a:ea typeface="Noto Sans SC"/>
+              </a:rPr>
+              <a:t> &gt; K:</a:t>
+            </a:r>
+          </a:p>
+        </p:txBody>
+      </p:sp>
+      <p:sp>
+        <p:nvSpPr>
+          <p:cNvPr id="29" name="TextBox 28"/>
+          <p:cNvSpPr txBox="1"/>
+          <p:nvPr/>
+        </p:nvSpPr>
+        <p:spPr>
+          <a:xfrm>
+            <a:off x="5898832" y="2581783"/>
+            <a:ext cx="156210" cy="180022"/>
+          </a:xfrm>
+          <a:prstGeom prst="rect">
+            <a:avLst/>
+          </a:prstGeom>
+          <a:noFill/>
+        </p:spPr>
+        <p:txBody>
+          <a:bodyPr wrap="none" lIns="0" rIns="0" tIns="0" bIns="0">
+            <a:spAutoFit/>
+          </a:bodyPr>
+          <a:lstStyle/>
+          <a:p>
+            <a:pPr algn="l"/>
+            <a:r>
+              <a:rPr sz="1050" b="0">
+                <a:solidFill>
+                  <a:srgbClr val="6F8F8F"/>
+                </a:solidFill>
+                <a:latin typeface="Noto Sans SC"/>
+                <a:ea typeface="Noto Sans SC"/>
+              </a:rPr>
+              <a:t>3</a:t>
+            </a:r>
+          </a:p>
+        </p:txBody>
+      </p:sp>
+      <p:sp>
+        <p:nvSpPr>
+          <p:cNvPr id="30" name="TextBox 29"/>
+          <p:cNvSpPr txBox="1"/>
+          <p:nvPr/>
+        </p:nvSpPr>
+        <p:spPr>
+          <a:xfrm>
+            <a:off x="6189027" y="2542921"/>
+            <a:ext cx="769620" cy="231457"/>
+          </a:xfrm>
+          <a:prstGeom prst="rect">
+            <a:avLst/>
+          </a:prstGeom>
+          <a:noFill/>
+        </p:spPr>
+        <p:txBody>
+          <a:bodyPr wrap="none" lIns="0" rIns="0" tIns="0" bIns="0">
+            <a:spAutoFit/>
+          </a:bodyPr>
+          <a:lstStyle/>
+          <a:p>
+            <a:pPr algn="l"/>
+            <a:r>
+              <a:rPr sz="1350" b="0">
+                <a:solidFill>
+                  <a:srgbClr val="DFEADF"/>
+                </a:solidFill>
+                <a:latin typeface="Noto Sans SC"/>
+                <a:ea typeface="Noto Sans SC"/>
+              </a:rPr>
+              <a:t>    cands </a:t>
+            </a:r>
+          </a:p>
+        </p:txBody>
+      </p:sp>
+      <p:sp>
+        <p:nvSpPr>
+          <p:cNvPr id="31" name="TextBox 30"/>
+          <p:cNvSpPr txBox="1"/>
+          <p:nvPr/>
+        </p:nvSpPr>
+        <p:spPr>
+          <a:xfrm>
+            <a:off x="6855777" y="2542921"/>
             <a:ext cx="274320" cy="231457"/>
           </a:xfrm>
           <a:prstGeom prst="rect">
@@ -20957,14 +20945,14 @@
       </p:sp>
       <p:sp>
         <p:nvSpPr>
-          <p:cNvPr id="24" name="TextBox 23"/>
-          <p:cNvSpPr txBox="1"/>
-          <p:nvPr/>
-        </p:nvSpPr>
-        <p:spPr>
-          <a:xfrm>
-            <a:off x="7025703" y="1730120"/>
-            <a:ext cx="141274" cy="231457"/>
+          <p:cNvPr id="32" name="TextBox 31"/>
+          <p:cNvSpPr txBox="1"/>
+          <p:nvPr/>
+        </p:nvSpPr>
+        <p:spPr>
+          <a:xfrm>
+            <a:off x="7027227" y="2542921"/>
+            <a:ext cx="140970" cy="231457"/>
           </a:xfrm>
           <a:prstGeom prst="rect">
             <a:avLst/>
@@ -20993,14 +20981,14 @@
       </p:sp>
       <p:sp>
         <p:nvSpPr>
-          <p:cNvPr id="25" name="TextBox 24"/>
-          <p:cNvSpPr txBox="1"/>
-          <p:nvPr/>
-        </p:nvSpPr>
-        <p:spPr>
-          <a:xfrm>
-            <a:off x="7064108" y="1730120"/>
-            <a:ext cx="1645920" cy="231457"/>
+          <p:cNvPr id="33" name="TextBox 32"/>
+          <p:cNvSpPr txBox="1"/>
+          <p:nvPr/>
+        </p:nvSpPr>
+        <p:spPr>
+          <a:xfrm>
+            <a:off x="7065327" y="2542921"/>
+            <a:ext cx="617220" cy="231457"/>
           </a:xfrm>
           <a:prstGeom prst="rect">
             <a:avLst/>
@@ -21022,21 +21010,21 @@
                 <a:latin typeface="Noto Sans SC"/>
                 <a:ea typeface="Noto Sans SC"/>
               </a:rPr>
-              <a:t>每个节点一个单点簇</a:t>
-            </a:r>
-          </a:p>
-        </p:txBody>
-      </p:sp>
-      <p:sp>
-        <p:nvSpPr>
-          <p:cNvPr id="26" name="TextBox 25"/>
-          <p:cNvSpPr txBox="1"/>
-          <p:nvPr/>
-        </p:nvSpPr>
-        <p:spPr>
-          <a:xfrm>
-            <a:off x="5898832" y="2175383"/>
-            <a:ext cx="154019" cy="180022"/>
+              <a:t>亲和度</a:t>
+            </a:r>
+          </a:p>
+        </p:txBody>
+      </p:sp>
+      <p:sp>
+        <p:nvSpPr>
+          <p:cNvPr id="34" name="TextBox 33"/>
+          <p:cNvSpPr txBox="1"/>
+          <p:nvPr/>
+        </p:nvSpPr>
+        <p:spPr>
+          <a:xfrm>
+            <a:off x="7579677" y="2542921"/>
+            <a:ext cx="407670" cy="231457"/>
           </a:xfrm>
           <a:prstGeom prst="rect">
             <a:avLst/>
@@ -21051,28 +21039,28 @@
           <a:p>
             <a:pPr algn="l"/>
             <a:r>
-              <a:rPr sz="1050" b="0">
-                <a:solidFill>
-                  <a:srgbClr val="6F8F8F"/>
-                </a:solidFill>
-                <a:latin typeface="Noto Sans SC"/>
-                <a:ea typeface="Noto Sans SC"/>
-              </a:rPr>
-              <a:t>2</a:t>
-            </a:r>
-          </a:p>
-        </p:txBody>
-      </p:sp>
-      <p:sp>
-        <p:nvSpPr>
-          <p:cNvPr id="27" name="TextBox 26"/>
-          <p:cNvSpPr txBox="1"/>
-          <p:nvPr/>
-        </p:nvSpPr>
-        <p:spPr>
-          <a:xfrm>
-            <a:off x="6189027" y="2136521"/>
-            <a:ext cx="573671" cy="231457"/>
+              <a:rPr sz="1350" b="0">
+                <a:solidFill>
+                  <a:srgbClr val="DFEADF"/>
+                </a:solidFill>
+                <a:latin typeface="Noto Sans SC"/>
+                <a:ea typeface="Noto Sans SC"/>
+              </a:rPr>
+              <a:t> &gt; 0 </a:t>
+            </a:r>
+          </a:p>
+        </p:txBody>
+      </p:sp>
+      <p:sp>
+        <p:nvSpPr>
+          <p:cNvPr id="35" name="TextBox 34"/>
+          <p:cNvSpPr txBox="1"/>
+          <p:nvPr/>
+        </p:nvSpPr>
+        <p:spPr>
+          <a:xfrm>
+            <a:off x="7884477" y="2542921"/>
+            <a:ext cx="617220" cy="231457"/>
           </a:xfrm>
           <a:prstGeom prst="rect">
             <a:avLst/>
@@ -21094,330 +21082,6 @@
                 <a:latin typeface="Noto Sans SC"/>
                 <a:ea typeface="Noto Sans SC"/>
               </a:rPr>
-              <a:t>while </a:t>
-            </a:r>
-          </a:p>
-        </p:txBody>
-      </p:sp>
-      <p:sp>
-        <p:nvSpPr>
-          <p:cNvPr id="28" name="TextBox 27"/>
-          <p:cNvSpPr txBox="1"/>
-          <p:nvPr/>
-        </p:nvSpPr>
-        <p:spPr>
-          <a:xfrm>
-            <a:off x="6659829" y="2136521"/>
-            <a:ext cx="445770" cy="231457"/>
-          </a:xfrm>
-          <a:prstGeom prst="rect">
-            <a:avLst/>
-          </a:prstGeom>
-          <a:noFill/>
-        </p:spPr>
-        <p:txBody>
-          <a:bodyPr wrap="none" lIns="0" rIns="0" tIns="0" bIns="0">
-            <a:spAutoFit/>
-          </a:bodyPr>
-          <a:lstStyle/>
-          <a:p>
-            <a:pPr algn="l"/>
-            <a:r>
-              <a:rPr sz="1350" b="0">
-                <a:solidFill>
-                  <a:srgbClr val="DFEADF"/>
-                </a:solidFill>
-                <a:latin typeface="Noto Sans SC"/>
-                <a:ea typeface="Noto Sans SC"/>
-              </a:rPr>
-              <a:t>簇数</a:t>
-            </a:r>
-          </a:p>
-        </p:txBody>
-      </p:sp>
-      <p:sp>
-        <p:nvSpPr>
-          <p:cNvPr id="29" name="TextBox 28"/>
-          <p:cNvSpPr txBox="1"/>
-          <p:nvPr/>
-        </p:nvSpPr>
-        <p:spPr>
-          <a:xfrm>
-            <a:off x="7002729" y="2136521"/>
-            <a:ext cx="433254" cy="231457"/>
-          </a:xfrm>
-          <a:prstGeom prst="rect">
-            <a:avLst/>
-          </a:prstGeom>
-          <a:noFill/>
-        </p:spPr>
-        <p:txBody>
-          <a:bodyPr wrap="none" lIns="0" rIns="0" tIns="0" bIns="0">
-            <a:spAutoFit/>
-          </a:bodyPr>
-          <a:lstStyle/>
-          <a:p>
-            <a:pPr algn="l"/>
-            <a:r>
-              <a:rPr sz="1350" b="0">
-                <a:solidFill>
-                  <a:srgbClr val="DFEADF"/>
-                </a:solidFill>
-                <a:latin typeface="Noto Sans SC"/>
-                <a:ea typeface="Noto Sans SC"/>
-              </a:rPr>
-              <a:t> &gt; K:</a:t>
-            </a:r>
-          </a:p>
-        </p:txBody>
-      </p:sp>
-      <p:sp>
-        <p:nvSpPr>
-          <p:cNvPr id="30" name="TextBox 29"/>
-          <p:cNvSpPr txBox="1"/>
-          <p:nvPr/>
-        </p:nvSpPr>
-        <p:spPr>
-          <a:xfrm>
-            <a:off x="5898832" y="2581783"/>
-            <a:ext cx="154019" cy="180022"/>
-          </a:xfrm>
-          <a:prstGeom prst="rect">
-            <a:avLst/>
-          </a:prstGeom>
-          <a:noFill/>
-        </p:spPr>
-        <p:txBody>
-          <a:bodyPr wrap="none" lIns="0" rIns="0" tIns="0" bIns="0">
-            <a:spAutoFit/>
-          </a:bodyPr>
-          <a:lstStyle/>
-          <a:p>
-            <a:pPr algn="l"/>
-            <a:r>
-              <a:rPr sz="1050" b="0">
-                <a:solidFill>
-                  <a:srgbClr val="6F8F8F"/>
-                </a:solidFill>
-                <a:latin typeface="Noto Sans SC"/>
-                <a:ea typeface="Noto Sans SC"/>
-              </a:rPr>
-              <a:t>3</a:t>
-            </a:r>
-          </a:p>
-        </p:txBody>
-      </p:sp>
-      <p:sp>
-        <p:nvSpPr>
-          <p:cNvPr id="31" name="TextBox 30"/>
-          <p:cNvSpPr txBox="1"/>
-          <p:nvPr/>
-        </p:nvSpPr>
-        <p:spPr>
-          <a:xfrm>
-            <a:off x="6189027" y="2542921"/>
-            <a:ext cx="769981" cy="231457"/>
-          </a:xfrm>
-          <a:prstGeom prst="rect">
-            <a:avLst/>
-          </a:prstGeom>
-          <a:noFill/>
-        </p:spPr>
-        <p:txBody>
-          <a:bodyPr wrap="none" lIns="0" rIns="0" tIns="0" bIns="0">
-            <a:spAutoFit/>
-          </a:bodyPr>
-          <a:lstStyle/>
-          <a:p>
-            <a:pPr algn="l"/>
-            <a:r>
-              <a:rPr sz="1350" b="0">
-                <a:solidFill>
-                  <a:srgbClr val="DFEADF"/>
-                </a:solidFill>
-                <a:latin typeface="Noto Sans SC"/>
-                <a:ea typeface="Noto Sans SC"/>
-              </a:rPr>
-              <a:t>    cands </a:t>
-            </a:r>
-          </a:p>
-        </p:txBody>
-      </p:sp>
-      <p:sp>
-        <p:nvSpPr>
-          <p:cNvPr id="32" name="TextBox 31"/>
-          <p:cNvSpPr txBox="1"/>
-          <p:nvPr/>
-        </p:nvSpPr>
-        <p:spPr>
-          <a:xfrm>
-            <a:off x="6856139" y="2542921"/>
-            <a:ext cx="274320" cy="231457"/>
-          </a:xfrm>
-          <a:prstGeom prst="rect">
-            <a:avLst/>
-          </a:prstGeom>
-          <a:noFill/>
-        </p:spPr>
-        <p:txBody>
-          <a:bodyPr wrap="none" lIns="0" rIns="0" tIns="0" bIns="0">
-            <a:spAutoFit/>
-          </a:bodyPr>
-          <a:lstStyle/>
-          <a:p>
-            <a:pPr algn="l"/>
-            <a:r>
-              <a:rPr sz="1350" b="0">
-                <a:solidFill>
-                  <a:srgbClr val="DFEADF"/>
-                </a:solidFill>
-                <a:latin typeface="Noto Sans SC"/>
-                <a:ea typeface="Noto Sans SC"/>
-              </a:rPr>
-              <a:t>←</a:t>
-            </a:r>
-          </a:p>
-        </p:txBody>
-      </p:sp>
-      <p:sp>
-        <p:nvSpPr>
-          <p:cNvPr id="33" name="TextBox 32"/>
-          <p:cNvSpPr txBox="1"/>
-          <p:nvPr/>
-        </p:nvSpPr>
-        <p:spPr>
-          <a:xfrm>
-            <a:off x="7027589" y="2542921"/>
-            <a:ext cx="141274" cy="231457"/>
-          </a:xfrm>
-          <a:prstGeom prst="rect">
-            <a:avLst/>
-          </a:prstGeom>
-          <a:noFill/>
-        </p:spPr>
-        <p:txBody>
-          <a:bodyPr wrap="none" lIns="0" rIns="0" tIns="0" bIns="0">
-            <a:spAutoFit/>
-          </a:bodyPr>
-          <a:lstStyle/>
-          <a:p>
-            <a:pPr algn="l"/>
-            <a:r>
-              <a:rPr sz="1350" b="0">
-                <a:solidFill>
-                  <a:srgbClr val="DFEADF"/>
-                </a:solidFill>
-                <a:latin typeface="Noto Sans SC"/>
-                <a:ea typeface="Noto Sans SC"/>
-              </a:rPr>
-              <a:t> </a:t>
-            </a:r>
-          </a:p>
-        </p:txBody>
-      </p:sp>
-      <p:sp>
-        <p:nvSpPr>
-          <p:cNvPr id="34" name="TextBox 33"/>
-          <p:cNvSpPr txBox="1"/>
-          <p:nvPr/>
-        </p:nvSpPr>
-        <p:spPr>
-          <a:xfrm>
-            <a:off x="7065994" y="2542921"/>
-            <a:ext cx="617220" cy="231457"/>
-          </a:xfrm>
-          <a:prstGeom prst="rect">
-            <a:avLst/>
-          </a:prstGeom>
-          <a:noFill/>
-        </p:spPr>
-        <p:txBody>
-          <a:bodyPr wrap="none" lIns="0" rIns="0" tIns="0" bIns="0">
-            <a:spAutoFit/>
-          </a:bodyPr>
-          <a:lstStyle/>
-          <a:p>
-            <a:pPr algn="l"/>
-            <a:r>
-              <a:rPr sz="1350" b="0">
-                <a:solidFill>
-                  <a:srgbClr val="DFEADF"/>
-                </a:solidFill>
-                <a:latin typeface="Noto Sans SC"/>
-                <a:ea typeface="Noto Sans SC"/>
-              </a:rPr>
-              <a:t>亲和度</a:t>
-            </a:r>
-          </a:p>
-        </p:txBody>
-      </p:sp>
-      <p:sp>
-        <p:nvSpPr>
-          <p:cNvPr id="35" name="TextBox 34"/>
-          <p:cNvSpPr txBox="1"/>
-          <p:nvPr/>
-        </p:nvSpPr>
-        <p:spPr>
-          <a:xfrm>
-            <a:off x="7580344" y="2542921"/>
-            <a:ext cx="408393" cy="231457"/>
-          </a:xfrm>
-          <a:prstGeom prst="rect">
-            <a:avLst/>
-          </a:prstGeom>
-          <a:noFill/>
-        </p:spPr>
-        <p:txBody>
-          <a:bodyPr wrap="none" lIns="0" rIns="0" tIns="0" bIns="0">
-            <a:spAutoFit/>
-          </a:bodyPr>
-          <a:lstStyle/>
-          <a:p>
-            <a:pPr algn="l"/>
-            <a:r>
-              <a:rPr sz="1350" b="0">
-                <a:solidFill>
-                  <a:srgbClr val="DFEADF"/>
-                </a:solidFill>
-                <a:latin typeface="Noto Sans SC"/>
-                <a:ea typeface="Noto Sans SC"/>
-              </a:rPr>
-              <a:t> &gt; 0 </a:t>
-            </a:r>
-          </a:p>
-        </p:txBody>
-      </p:sp>
-      <p:sp>
-        <p:nvSpPr>
-          <p:cNvPr id="36" name="TextBox 35"/>
-          <p:cNvSpPr txBox="1"/>
-          <p:nvPr/>
-        </p:nvSpPr>
-        <p:spPr>
-          <a:xfrm>
-            <a:off x="7885868" y="2542921"/>
-            <a:ext cx="617220" cy="231457"/>
-          </a:xfrm>
-          <a:prstGeom prst="rect">
-            <a:avLst/>
-          </a:prstGeom>
-          <a:noFill/>
-        </p:spPr>
-        <p:txBody>
-          <a:bodyPr wrap="none" lIns="0" rIns="0" tIns="0" bIns="0">
-            <a:spAutoFit/>
-          </a:bodyPr>
-          <a:lstStyle/>
-          <a:p>
-            <a:pPr algn="l"/>
-            <a:r>
-              <a:rPr sz="1350" b="0">
-                <a:solidFill>
-                  <a:srgbClr val="DFEADF"/>
-                </a:solidFill>
-                <a:latin typeface="Noto Sans SC"/>
-                <a:ea typeface="Noto Sans SC"/>
-              </a:rPr>
               <a:t>的簇对</a:t>
             </a:r>
           </a:p>
@@ -21425,7 +21089,7 @@
       </p:sp>
       <p:sp>
         <p:nvSpPr>
-          <p:cNvPr id="37" name="Rectangle 36"/>
+          <p:cNvPr id="36" name="Rectangle 35"/>
           <p:cNvSpPr/>
           <p:nvPr/>
         </p:nvSpPr>
@@ -21467,7 +21131,7 @@
       </p:sp>
       <p:sp>
         <p:nvSpPr>
-          <p:cNvPr id="38" name="Rectangle 37"/>
+          <p:cNvPr id="37" name="Rectangle 36"/>
           <p:cNvSpPr/>
           <p:nvPr/>
         </p:nvSpPr>
@@ -21509,14 +21173,50 @@
       </p:sp>
       <p:sp>
         <p:nvSpPr>
+          <p:cNvPr id="38" name="TextBox 37"/>
+          <p:cNvSpPr txBox="1"/>
+          <p:nvPr/>
+        </p:nvSpPr>
+        <p:spPr>
+          <a:xfrm>
+            <a:off x="5898832" y="2988183"/>
+            <a:ext cx="156210" cy="180022"/>
+          </a:xfrm>
+          <a:prstGeom prst="rect">
+            <a:avLst/>
+          </a:prstGeom>
+          <a:noFill/>
+        </p:spPr>
+        <p:txBody>
+          <a:bodyPr wrap="none" lIns="0" rIns="0" tIns="0" bIns="0">
+            <a:spAutoFit/>
+          </a:bodyPr>
+          <a:lstStyle/>
+          <a:p>
+            <a:pPr algn="l"/>
+            <a:r>
+              <a:rPr sz="1050" b="0">
+                <a:solidFill>
+                  <a:srgbClr val="6F8F8F"/>
+                </a:solidFill>
+                <a:latin typeface="Noto Sans SC"/>
+                <a:ea typeface="Noto Sans SC"/>
+              </a:rPr>
+              <a:t>4</a:t>
+            </a:r>
+          </a:p>
+        </p:txBody>
+      </p:sp>
+      <p:sp>
+        <p:nvSpPr>
           <p:cNvPr id="39" name="TextBox 38"/>
           <p:cNvSpPr txBox="1"/>
           <p:nvPr/>
         </p:nvSpPr>
         <p:spPr>
           <a:xfrm>
-            <a:off x="5898832" y="2988183"/>
-            <a:ext cx="154019" cy="180022"/>
+            <a:off x="6189027" y="2949321"/>
+            <a:ext cx="680720" cy="231457"/>
           </a:xfrm>
           <a:prstGeom prst="rect">
             <a:avLst/>
@@ -21531,14 +21231,14 @@
           <a:p>
             <a:pPr algn="l"/>
             <a:r>
-              <a:rPr sz="1050" b="0">
-                <a:solidFill>
-                  <a:srgbClr val="6F8F8F"/>
-                </a:solidFill>
-                <a:latin typeface="Noto Sans SC"/>
-                <a:ea typeface="Noto Sans SC"/>
-              </a:rPr>
-              <a:t>4</a:t>
+              <a:rPr sz="1350" b="0">
+                <a:solidFill>
+                  <a:srgbClr val="D8BB78"/>
+                </a:solidFill>
+                <a:latin typeface="Noto Sans SC"/>
+                <a:ea typeface="Noto Sans SC"/>
+              </a:rPr>
+              <a:t>    legal </a:t>
             </a:r>
           </a:p>
         </p:txBody>
@@ -21551,8 +21251,8 @@
         </p:nvSpPr>
         <p:spPr>
           <a:xfrm>
-            <a:off x="6189027" y="2949321"/>
-            <a:ext cx="680485" cy="231457"/>
+            <a:off x="6766877" y="2949321"/>
+            <a:ext cx="274320" cy="231457"/>
           </a:xfrm>
           <a:prstGeom prst="rect">
             <a:avLst/>
@@ -21574,7 +21274,7 @@
                 <a:latin typeface="Noto Sans SC"/>
                 <a:ea typeface="Noto Sans SC"/>
               </a:rPr>
-              <a:t>    legal </a:t>
+              <a:t>←</a:t>
             </a:r>
           </a:p>
         </p:txBody>
@@ -21587,7 +21287,115 @@
         </p:nvSpPr>
         <p:spPr>
           <a:xfrm>
-            <a:off x="6766642" y="2949321"/>
+            <a:off x="6938327" y="2949321"/>
+            <a:ext cx="140970" cy="231457"/>
+          </a:xfrm>
+          <a:prstGeom prst="rect">
+            <a:avLst/>
+          </a:prstGeom>
+          <a:noFill/>
+        </p:spPr>
+        <p:txBody>
+          <a:bodyPr wrap="none" lIns="0" rIns="0" tIns="0" bIns="0">
+            <a:spAutoFit/>
+          </a:bodyPr>
+          <a:lstStyle/>
+          <a:p>
+            <a:pPr algn="l"/>
+            <a:r>
+              <a:rPr sz="1350" b="0">
+                <a:solidFill>
+                  <a:srgbClr val="D8BB78"/>
+                </a:solidFill>
+                <a:latin typeface="Noto Sans SC"/>
+                <a:ea typeface="Noto Sans SC"/>
+              </a:rPr>
+              <a:t> </a:t>
+            </a:r>
+          </a:p>
+        </p:txBody>
+      </p:sp>
+      <p:sp>
+        <p:nvSpPr>
+          <p:cNvPr id="42" name="TextBox 41"/>
+          <p:cNvSpPr txBox="1"/>
+          <p:nvPr/>
+        </p:nvSpPr>
+        <p:spPr>
+          <a:xfrm>
+            <a:off x="6976427" y="2949321"/>
+            <a:ext cx="960119" cy="231457"/>
+          </a:xfrm>
+          <a:prstGeom prst="rect">
+            <a:avLst/>
+          </a:prstGeom>
+          <a:noFill/>
+        </p:spPr>
+        <p:txBody>
+          <a:bodyPr wrap="none" lIns="0" rIns="0" tIns="0" bIns="0">
+            <a:spAutoFit/>
+          </a:bodyPr>
+          <a:lstStyle/>
+          <a:p>
+            <a:pPr algn="l"/>
+            <a:r>
+              <a:rPr sz="1350" b="0">
+                <a:solidFill>
+                  <a:srgbClr val="D8BB78"/>
+                </a:solidFill>
+                <a:latin typeface="Noto Sans SC"/>
+                <a:ea typeface="Noto Sans SC"/>
+              </a:rPr>
+              <a:t>合并后大小</a:t>
+            </a:r>
+          </a:p>
+        </p:txBody>
+      </p:sp>
+      <p:sp>
+        <p:nvSpPr>
+          <p:cNvPr id="43" name="TextBox 42"/>
+          <p:cNvSpPr txBox="1"/>
+          <p:nvPr/>
+        </p:nvSpPr>
+        <p:spPr>
+          <a:xfrm>
+            <a:off x="7833677" y="2949321"/>
+            <a:ext cx="140970" cy="231457"/>
+          </a:xfrm>
+          <a:prstGeom prst="rect">
+            <a:avLst/>
+          </a:prstGeom>
+          <a:noFill/>
+        </p:spPr>
+        <p:txBody>
+          <a:bodyPr wrap="none" lIns="0" rIns="0" tIns="0" bIns="0">
+            <a:spAutoFit/>
+          </a:bodyPr>
+          <a:lstStyle/>
+          <a:p>
+            <a:pPr algn="l"/>
+            <a:r>
+              <a:rPr sz="1350" b="0">
+                <a:solidFill>
+                  <a:srgbClr val="D8BB78"/>
+                </a:solidFill>
+                <a:latin typeface="Noto Sans SC"/>
+                <a:ea typeface="Noto Sans SC"/>
+              </a:rPr>
+              <a:t> </a:t>
+            </a:r>
+          </a:p>
+        </p:txBody>
+      </p:sp>
+      <p:sp>
+        <p:nvSpPr>
+          <p:cNvPr id="44" name="TextBox 43"/>
+          <p:cNvSpPr txBox="1"/>
+          <p:nvPr/>
+        </p:nvSpPr>
+        <p:spPr>
+          <a:xfrm>
+            <a:off x="7871777" y="2949321"/>
             <a:ext cx="274320" cy="231457"/>
           </a:xfrm>
           <a:prstGeom prst="rect">
@@ -21610,21 +21418,21 @@
                 <a:latin typeface="Noto Sans SC"/>
                 <a:ea typeface="Noto Sans SC"/>
               </a:rPr>
-              <a:t>←</a:t>
-            </a:r>
-          </a:p>
-        </p:txBody>
-      </p:sp>
-      <p:sp>
-        <p:nvSpPr>
-          <p:cNvPr id="42" name="TextBox 41"/>
-          <p:cNvSpPr txBox="1"/>
-          <p:nvPr/>
-        </p:nvSpPr>
-        <p:spPr>
-          <a:xfrm>
-            <a:off x="6938092" y="2949321"/>
-            <a:ext cx="141274" cy="231457"/>
+              <a:t>≤</a:t>
+            </a:r>
+          </a:p>
+        </p:txBody>
+      </p:sp>
+      <p:sp>
+        <p:nvSpPr>
+          <p:cNvPr id="45" name="TextBox 44"/>
+          <p:cNvSpPr txBox="1"/>
+          <p:nvPr/>
+        </p:nvSpPr>
+        <p:spPr>
+          <a:xfrm>
+            <a:off x="8043227" y="2949321"/>
+            <a:ext cx="287020" cy="231457"/>
           </a:xfrm>
           <a:prstGeom prst="rect">
             <a:avLst/>
@@ -21646,21 +21454,21 @@
                 <a:latin typeface="Noto Sans SC"/>
                 <a:ea typeface="Noto Sans SC"/>
               </a:rPr>
-              <a:t> </a:t>
-            </a:r>
-          </a:p>
-        </p:txBody>
-      </p:sp>
-      <p:sp>
-        <p:nvSpPr>
-          <p:cNvPr id="43" name="TextBox 42"/>
-          <p:cNvSpPr txBox="1"/>
-          <p:nvPr/>
-        </p:nvSpPr>
-        <p:spPr>
-          <a:xfrm>
-            <a:off x="6976497" y="2949321"/>
-            <a:ext cx="960119" cy="231457"/>
+              <a:t> C </a:t>
+            </a:r>
+          </a:p>
+        </p:txBody>
+      </p:sp>
+      <p:sp>
+        <p:nvSpPr>
+          <p:cNvPr id="46" name="TextBox 45"/>
+          <p:cNvSpPr txBox="1"/>
+          <p:nvPr/>
+        </p:nvSpPr>
+        <p:spPr>
+          <a:xfrm>
+            <a:off x="8227377" y="2949321"/>
+            <a:ext cx="617220" cy="231457"/>
           </a:xfrm>
           <a:prstGeom prst="rect">
             <a:avLst/>
@@ -21682,150 +21490,6 @@
                 <a:latin typeface="Noto Sans SC"/>
                 <a:ea typeface="Noto Sans SC"/>
               </a:rPr>
-              <a:t>合并后大小</a:t>
-            </a:r>
-          </a:p>
-        </p:txBody>
-      </p:sp>
-      <p:sp>
-        <p:nvSpPr>
-          <p:cNvPr id="44" name="TextBox 43"/>
-          <p:cNvSpPr txBox="1"/>
-          <p:nvPr/>
-        </p:nvSpPr>
-        <p:spPr>
-          <a:xfrm>
-            <a:off x="7833747" y="2949321"/>
-            <a:ext cx="141274" cy="231457"/>
-          </a:xfrm>
-          <a:prstGeom prst="rect">
-            <a:avLst/>
-          </a:prstGeom>
-          <a:noFill/>
-        </p:spPr>
-        <p:txBody>
-          <a:bodyPr wrap="none" lIns="0" rIns="0" tIns="0" bIns="0">
-            <a:spAutoFit/>
-          </a:bodyPr>
-          <a:lstStyle/>
-          <a:p>
-            <a:pPr algn="l"/>
-            <a:r>
-              <a:rPr sz="1350" b="0">
-                <a:solidFill>
-                  <a:srgbClr val="D8BB78"/>
-                </a:solidFill>
-                <a:latin typeface="Noto Sans SC"/>
-                <a:ea typeface="Noto Sans SC"/>
-              </a:rPr>
-              <a:t> </a:t>
-            </a:r>
-          </a:p>
-        </p:txBody>
-      </p:sp>
-      <p:sp>
-        <p:nvSpPr>
-          <p:cNvPr id="45" name="TextBox 44"/>
-          <p:cNvSpPr txBox="1"/>
-          <p:nvPr/>
-        </p:nvSpPr>
-        <p:spPr>
-          <a:xfrm>
-            <a:off x="7872152" y="2949321"/>
-            <a:ext cx="274320" cy="231457"/>
-          </a:xfrm>
-          <a:prstGeom prst="rect">
-            <a:avLst/>
-          </a:prstGeom>
-          <a:noFill/>
-        </p:spPr>
-        <p:txBody>
-          <a:bodyPr wrap="none" lIns="0" rIns="0" tIns="0" bIns="0">
-            <a:spAutoFit/>
-          </a:bodyPr>
-          <a:lstStyle/>
-          <a:p>
-            <a:pPr algn="l"/>
-            <a:r>
-              <a:rPr sz="1350" b="0">
-                <a:solidFill>
-                  <a:srgbClr val="D8BB78"/>
-                </a:solidFill>
-                <a:latin typeface="Noto Sans SC"/>
-                <a:ea typeface="Noto Sans SC"/>
-              </a:rPr>
-              <a:t>≤</a:t>
-            </a:r>
-          </a:p>
-        </p:txBody>
-      </p:sp>
-      <p:sp>
-        <p:nvSpPr>
-          <p:cNvPr id="46" name="TextBox 45"/>
-          <p:cNvSpPr txBox="1"/>
-          <p:nvPr/>
-        </p:nvSpPr>
-        <p:spPr>
-          <a:xfrm>
-            <a:off x="8043602" y="2949321"/>
-            <a:ext cx="289064" cy="231457"/>
-          </a:xfrm>
-          <a:prstGeom prst="rect">
-            <a:avLst/>
-          </a:prstGeom>
-          <a:noFill/>
-        </p:spPr>
-        <p:txBody>
-          <a:bodyPr wrap="none" lIns="0" rIns="0" tIns="0" bIns="0">
-            <a:spAutoFit/>
-          </a:bodyPr>
-          <a:lstStyle/>
-          <a:p>
-            <a:pPr algn="l"/>
-            <a:r>
-              <a:rPr sz="1350" b="0">
-                <a:solidFill>
-                  <a:srgbClr val="D8BB78"/>
-                </a:solidFill>
-                <a:latin typeface="Noto Sans SC"/>
-                <a:ea typeface="Noto Sans SC"/>
-              </a:rPr>
-              <a:t> C </a:t>
-            </a:r>
-          </a:p>
-        </p:txBody>
-      </p:sp>
-      <p:sp>
-        <p:nvSpPr>
-          <p:cNvPr id="47" name="TextBox 46"/>
-          <p:cNvSpPr txBox="1"/>
-          <p:nvPr/>
-        </p:nvSpPr>
-        <p:spPr>
-          <a:xfrm>
-            <a:off x="8229796" y="2949321"/>
-            <a:ext cx="617220" cy="231457"/>
-          </a:xfrm>
-          <a:prstGeom prst="rect">
-            <a:avLst/>
-          </a:prstGeom>
-          <a:noFill/>
-        </p:spPr>
-        <p:txBody>
-          <a:bodyPr wrap="none" lIns="0" rIns="0" tIns="0" bIns="0">
-            <a:spAutoFit/>
-          </a:bodyPr>
-          <a:lstStyle/>
-          <a:p>
-            <a:pPr algn="l"/>
-            <a:r>
-              <a:rPr sz="1350" b="0">
-                <a:solidFill>
-                  <a:srgbClr val="D8BB78"/>
-                </a:solidFill>
-                <a:latin typeface="Noto Sans SC"/>
-                <a:ea typeface="Noto Sans SC"/>
-              </a:rPr>
               <a:t>的候选</a:t>
             </a:r>
           </a:p>
@@ -21833,7 +21497,7 @@
       </p:sp>
       <p:sp>
         <p:nvSpPr>
-          <p:cNvPr id="48" name="Rectangle 47"/>
+          <p:cNvPr id="47" name="Rectangle 46"/>
           <p:cNvSpPr/>
           <p:nvPr/>
         </p:nvSpPr>
@@ -21875,7 +21539,7 @@
       </p:sp>
       <p:sp>
         <p:nvSpPr>
-          <p:cNvPr id="49" name="Rectangle 48"/>
+          <p:cNvPr id="48" name="Rectangle 47"/>
           <p:cNvSpPr/>
           <p:nvPr/>
         </p:nvSpPr>
@@ -21917,14 +21581,50 @@
       </p:sp>
       <p:sp>
         <p:nvSpPr>
+          <p:cNvPr id="49" name="TextBox 48"/>
+          <p:cNvSpPr txBox="1"/>
+          <p:nvPr/>
+        </p:nvSpPr>
+        <p:spPr>
+          <a:xfrm>
+            <a:off x="5898832" y="3394583"/>
+            <a:ext cx="156210" cy="180022"/>
+          </a:xfrm>
+          <a:prstGeom prst="rect">
+            <a:avLst/>
+          </a:prstGeom>
+          <a:noFill/>
+        </p:spPr>
+        <p:txBody>
+          <a:bodyPr wrap="none" lIns="0" rIns="0" tIns="0" bIns="0">
+            <a:spAutoFit/>
+          </a:bodyPr>
+          <a:lstStyle/>
+          <a:p>
+            <a:pPr algn="l"/>
+            <a:r>
+              <a:rPr sz="1050" b="0">
+                <a:solidFill>
+                  <a:srgbClr val="6F8F8F"/>
+                </a:solidFill>
+                <a:latin typeface="Noto Sans SC"/>
+                <a:ea typeface="Noto Sans SC"/>
+              </a:rPr>
+              <a:t>5</a:t>
+            </a:r>
+          </a:p>
+        </p:txBody>
+      </p:sp>
+      <p:sp>
+        <p:nvSpPr>
           <p:cNvPr id="50" name="TextBox 49"/>
           <p:cNvSpPr txBox="1"/>
           <p:nvPr/>
         </p:nvSpPr>
         <p:spPr>
           <a:xfrm>
-            <a:off x="5898832" y="3394583"/>
-            <a:ext cx="154019" cy="180022"/>
+            <a:off x="6189027" y="3355721"/>
+            <a:ext cx="820419" cy="231457"/>
           </a:xfrm>
           <a:prstGeom prst="rect">
             <a:avLst/>
@@ -21939,14 +21639,14 @@
           <a:p>
             <a:pPr algn="l"/>
             <a:r>
-              <a:rPr sz="1050" b="0">
-                <a:solidFill>
-                  <a:srgbClr val="6F8F8F"/>
-                </a:solidFill>
-                <a:latin typeface="Noto Sans SC"/>
-                <a:ea typeface="Noto Sans SC"/>
-              </a:rPr>
-              <a:t>5</a:t>
+              <a:rPr sz="1350" b="0">
+                <a:solidFill>
+                  <a:srgbClr val="D8BB78"/>
+                </a:solidFill>
+                <a:latin typeface="Noto Sans SC"/>
+                <a:ea typeface="Noto Sans SC"/>
+              </a:rPr>
+              <a:t>    if legal </a:t>
             </a:r>
           </a:p>
         </p:txBody>
@@ -21959,8 +21659,8 @@
         </p:nvSpPr>
         <p:spPr>
           <a:xfrm>
-            <a:off x="6189027" y="3355721"/>
-            <a:ext cx="821759" cy="231457"/>
+            <a:off x="6906577" y="3355721"/>
+            <a:ext cx="445770" cy="231457"/>
           </a:xfrm>
           <a:prstGeom prst="rect">
             <a:avLst/>
@@ -21982,7 +21682,7 @@
                 <a:latin typeface="Noto Sans SC"/>
                 <a:ea typeface="Noto Sans SC"/>
               </a:rPr>
-              <a:t>    if legal </a:t>
+              <a:t>为空</a:t>
             </a:r>
           </a:p>
         </p:txBody>
@@ -21995,8 +21695,8 @@
         </p:nvSpPr>
         <p:spPr>
           <a:xfrm>
-            <a:off x="6907917" y="3355721"/>
-            <a:ext cx="445770" cy="231457"/>
+            <a:off x="7249477" y="3355721"/>
+            <a:ext cx="191770" cy="231457"/>
           </a:xfrm>
           <a:prstGeom prst="rect">
             <a:avLst/>
@@ -22018,7 +21718,7 @@
                 <a:latin typeface="Noto Sans SC"/>
                 <a:ea typeface="Noto Sans SC"/>
               </a:rPr>
-              <a:t>为空</a:t>
+              <a:t>: </a:t>
             </a:r>
           </a:p>
         </p:txBody>
@@ -22031,8 +21731,8 @@
         </p:nvSpPr>
         <p:spPr>
           <a:xfrm>
-            <a:off x="7250817" y="3355721"/>
-            <a:ext cx="188937" cy="231457"/>
+            <a:off x="7338377" y="3355721"/>
+            <a:ext cx="1474470" cy="231457"/>
           </a:xfrm>
           <a:prstGeom prst="rect">
             <a:avLst/>
@@ -22054,42 +21754,6 @@
                 <a:latin typeface="Noto Sans SC"/>
                 <a:ea typeface="Noto Sans SC"/>
               </a:rPr>
-              <a:t>: </a:t>
-            </a:r>
-          </a:p>
-        </p:txBody>
-      </p:sp>
-      <p:sp>
-        <p:nvSpPr>
-          <p:cNvPr id="54" name="TextBox 53"/>
-          <p:cNvSpPr txBox="1"/>
-          <p:nvPr/>
-        </p:nvSpPr>
-        <p:spPr>
-          <a:xfrm>
-            <a:off x="7336885" y="3355721"/>
-            <a:ext cx="1474470" cy="231457"/>
-          </a:xfrm>
-          <a:prstGeom prst="rect">
-            <a:avLst/>
-          </a:prstGeom>
-          <a:noFill/>
-        </p:spPr>
-        <p:txBody>
-          <a:bodyPr wrap="none" lIns="0" rIns="0" tIns="0" bIns="0">
-            <a:spAutoFit/>
-          </a:bodyPr>
-          <a:lstStyle/>
-          <a:p>
-            <a:pPr algn="l"/>
-            <a:r>
-              <a:rPr sz="1350" b="0">
-                <a:solidFill>
-                  <a:srgbClr val="D8BB78"/>
-                </a:solidFill>
-                <a:latin typeface="Noto Sans SC"/>
-                <a:ea typeface="Noto Sans SC"/>
-              </a:rPr>
               <a:t>停止（如实报告）</a:t>
             </a:r>
           </a:p>
@@ -22097,7 +21761,7 @@
       </p:sp>
       <p:sp>
         <p:nvSpPr>
-          <p:cNvPr id="55" name="Rectangle 54"/>
+          <p:cNvPr id="54" name="Rectangle 53"/>
           <p:cNvSpPr/>
           <p:nvPr/>
         </p:nvSpPr>
@@ -22139,7 +21803,7 @@
       </p:sp>
       <p:sp>
         <p:nvSpPr>
-          <p:cNvPr id="56" name="Rectangle 55"/>
+          <p:cNvPr id="55" name="Rectangle 54"/>
           <p:cNvSpPr/>
           <p:nvPr/>
         </p:nvSpPr>
@@ -22181,14 +21845,50 @@
       </p:sp>
       <p:sp>
         <p:nvSpPr>
+          <p:cNvPr id="56" name="TextBox 55"/>
+          <p:cNvSpPr txBox="1"/>
+          <p:nvPr/>
+        </p:nvSpPr>
+        <p:spPr>
+          <a:xfrm>
+            <a:off x="5898832" y="3800983"/>
+            <a:ext cx="156210" cy="180022"/>
+          </a:xfrm>
+          <a:prstGeom prst="rect">
+            <a:avLst/>
+          </a:prstGeom>
+          <a:noFill/>
+        </p:spPr>
+        <p:txBody>
+          <a:bodyPr wrap="none" lIns="0" rIns="0" tIns="0" bIns="0">
+            <a:spAutoFit/>
+          </a:bodyPr>
+          <a:lstStyle/>
+          <a:p>
+            <a:pPr algn="l"/>
+            <a:r>
+              <a:rPr sz="1050" b="0">
+                <a:solidFill>
+                  <a:srgbClr val="6F8F8F"/>
+                </a:solidFill>
+                <a:latin typeface="Noto Sans SC"/>
+                <a:ea typeface="Noto Sans SC"/>
+              </a:rPr>
+              <a:t>6</a:t>
+            </a:r>
+          </a:p>
+        </p:txBody>
+      </p:sp>
+      <p:sp>
+        <p:nvSpPr>
           <p:cNvPr id="57" name="TextBox 56"/>
           <p:cNvSpPr txBox="1"/>
           <p:nvPr/>
         </p:nvSpPr>
         <p:spPr>
           <a:xfrm>
-            <a:off x="5898832" y="3800983"/>
-            <a:ext cx="154019" cy="180022"/>
+            <a:off x="6189027" y="3762121"/>
+            <a:ext cx="255270" cy="231457"/>
           </a:xfrm>
           <a:prstGeom prst="rect">
             <a:avLst/>
@@ -22203,6 +21903,222 @@
           <a:p>
             <a:pPr algn="l"/>
             <a:r>
+              <a:rPr sz="1350" b="0">
+                <a:solidFill>
+                  <a:srgbClr val="D8BB78"/>
+                </a:solidFill>
+                <a:latin typeface="Noto Sans SC"/>
+                <a:ea typeface="Noto Sans SC"/>
+              </a:rPr>
+              <a:t>    </a:t>
+            </a:r>
+          </a:p>
+        </p:txBody>
+      </p:sp>
+      <p:sp>
+        <p:nvSpPr>
+          <p:cNvPr id="58" name="TextBox 57"/>
+          <p:cNvSpPr txBox="1"/>
+          <p:nvPr/>
+        </p:nvSpPr>
+        <p:spPr>
+          <a:xfrm>
+            <a:off x="6341427" y="3762121"/>
+            <a:ext cx="274320" cy="231457"/>
+          </a:xfrm>
+          <a:prstGeom prst="rect">
+            <a:avLst/>
+          </a:prstGeom>
+          <a:noFill/>
+        </p:spPr>
+        <p:txBody>
+          <a:bodyPr wrap="none" lIns="0" rIns="0" tIns="0" bIns="0">
+            <a:spAutoFit/>
+          </a:bodyPr>
+          <a:lstStyle/>
+          <a:p>
+            <a:pPr algn="l"/>
+            <a:r>
+              <a:rPr sz="1350" b="0">
+                <a:solidFill>
+                  <a:srgbClr val="D8BB78"/>
+                </a:solidFill>
+                <a:latin typeface="Noto Sans SC"/>
+                <a:ea typeface="Noto Sans SC"/>
+              </a:rPr>
+              <a:t>选</a:t>
+            </a:r>
+          </a:p>
+        </p:txBody>
+      </p:sp>
+      <p:sp>
+        <p:nvSpPr>
+          <p:cNvPr id="59" name="TextBox 58"/>
+          <p:cNvSpPr txBox="1"/>
+          <p:nvPr/>
+        </p:nvSpPr>
+        <p:spPr>
+          <a:xfrm>
+            <a:off x="6512877" y="3762121"/>
+            <a:ext cx="198120" cy="231457"/>
+          </a:xfrm>
+          <a:prstGeom prst="rect">
+            <a:avLst/>
+          </a:prstGeom>
+          <a:noFill/>
+        </p:spPr>
+        <p:txBody>
+          <a:bodyPr wrap="none" lIns="0" rIns="0" tIns="0" bIns="0">
+            <a:spAutoFit/>
+          </a:bodyPr>
+          <a:lstStyle/>
+          <a:p>
+            <a:pPr algn="l"/>
+            <a:r>
+              <a:rPr sz="1350" b="0">
+                <a:solidFill>
+                  <a:srgbClr val="D8BB78"/>
+                </a:solidFill>
+                <a:latin typeface="Noto Sans SC"/>
+                <a:ea typeface="Noto Sans SC"/>
+              </a:rPr>
+              <a:t> (</a:t>
+            </a:r>
+          </a:p>
+        </p:txBody>
+      </p:sp>
+      <p:sp>
+        <p:nvSpPr>
+          <p:cNvPr id="60" name="TextBox 59"/>
+          <p:cNvSpPr txBox="1"/>
+          <p:nvPr/>
+        </p:nvSpPr>
+        <p:spPr>
+          <a:xfrm>
+            <a:off x="6608127" y="3762121"/>
+            <a:ext cx="712470" cy="231457"/>
+          </a:xfrm>
+          <a:prstGeom prst="rect">
+            <a:avLst/>
+          </a:prstGeom>
+          <a:noFill/>
+        </p:spPr>
+        <p:txBody>
+          <a:bodyPr wrap="none" lIns="0" rIns="0" tIns="0" bIns="0">
+            <a:spAutoFit/>
+          </a:bodyPr>
+          <a:lstStyle/>
+          <a:p>
+            <a:pPr algn="l"/>
+            <a:r>
+              <a:rPr sz="1350" b="0">
+                <a:solidFill>
+                  <a:srgbClr val="D8BB78"/>
+                </a:solidFill>
+                <a:latin typeface="Noto Sans SC"/>
+                <a:ea typeface="Noto Sans SC"/>
+              </a:rPr>
+              <a:t>−亲和度</a:t>
+            </a:r>
+          </a:p>
+        </p:txBody>
+      </p:sp>
+      <p:sp>
+        <p:nvSpPr>
+          <p:cNvPr id="61" name="TextBox 60"/>
+          <p:cNvSpPr txBox="1"/>
+          <p:nvPr/>
+        </p:nvSpPr>
+        <p:spPr>
+          <a:xfrm>
+            <a:off x="7217727" y="3762121"/>
+            <a:ext cx="610870" cy="231457"/>
+          </a:xfrm>
+          <a:prstGeom prst="rect">
+            <a:avLst/>
+          </a:prstGeom>
+          <a:noFill/>
+        </p:spPr>
+        <p:txBody>
+          <a:bodyPr wrap="none" lIns="0" rIns="0" tIns="0" bIns="0">
+            <a:spAutoFit/>
+          </a:bodyPr>
+          <a:lstStyle/>
+          <a:p>
+            <a:pPr algn="l"/>
+            <a:r>
+              <a:rPr sz="1350" b="0">
+                <a:solidFill>
+                  <a:srgbClr val="D8BB78"/>
+                </a:solidFill>
+                <a:latin typeface="Noto Sans SC"/>
+                <a:ea typeface="Noto Sans SC"/>
+              </a:rPr>
+              <a:t>, P, Q) </a:t>
+            </a:r>
+          </a:p>
+        </p:txBody>
+      </p:sp>
+      <p:sp>
+        <p:nvSpPr>
+          <p:cNvPr id="62" name="TextBox 61"/>
+          <p:cNvSpPr txBox="1"/>
+          <p:nvPr/>
+        </p:nvSpPr>
+        <p:spPr>
+          <a:xfrm>
+            <a:off x="7725727" y="3762121"/>
+            <a:ext cx="960119" cy="231457"/>
+          </a:xfrm>
+          <a:prstGeom prst="rect">
+            <a:avLst/>
+          </a:prstGeom>
+          <a:noFill/>
+        </p:spPr>
+        <p:txBody>
+          <a:bodyPr wrap="none" lIns="0" rIns="0" tIns="0" bIns="0">
+            <a:spAutoFit/>
+          </a:bodyPr>
+          <a:lstStyle/>
+          <a:p>
+            <a:pPr algn="l"/>
+            <a:r>
+              <a:rPr sz="1350" b="0">
+                <a:solidFill>
+                  <a:srgbClr val="D8BB78"/>
+                </a:solidFill>
+                <a:latin typeface="Noto Sans SC"/>
+                <a:ea typeface="Noto Sans SC"/>
+              </a:rPr>
+              <a:t>最小的一对</a:t>
+            </a:r>
+          </a:p>
+        </p:txBody>
+      </p:sp>
+      <p:sp>
+        <p:nvSpPr>
+          <p:cNvPr id="63" name="TextBox 62"/>
+          <p:cNvSpPr txBox="1"/>
+          <p:nvPr/>
+        </p:nvSpPr>
+        <p:spPr>
+          <a:xfrm>
+            <a:off x="5898832" y="4207383"/>
+            <a:ext cx="156210" cy="180022"/>
+          </a:xfrm>
+          <a:prstGeom prst="rect">
+            <a:avLst/>
+          </a:prstGeom>
+          <a:noFill/>
+        </p:spPr>
+        <p:txBody>
+          <a:bodyPr wrap="none" lIns="0" rIns="0" tIns="0" bIns="0">
+            <a:spAutoFit/>
+          </a:bodyPr>
+          <a:lstStyle/>
+          <a:p>
+            <a:pPr algn="l"/>
+            <a:r>
               <a:rPr sz="1050" b="0">
                 <a:solidFill>
                   <a:srgbClr val="6F8F8F"/>
@@ -22210,21 +22126,21 @@
                 <a:latin typeface="Noto Sans SC"/>
                 <a:ea typeface="Noto Sans SC"/>
               </a:rPr>
-              <a:t>6</a:t>
-            </a:r>
-          </a:p>
-        </p:txBody>
-      </p:sp>
-      <p:sp>
-        <p:nvSpPr>
-          <p:cNvPr id="58" name="TextBox 57"/>
-          <p:cNvSpPr txBox="1"/>
-          <p:nvPr/>
-        </p:nvSpPr>
-        <p:spPr>
-          <a:xfrm>
-            <a:off x="6189027" y="3762121"/>
-            <a:ext cx="256489" cy="231457"/>
+              <a:t>7</a:t>
+            </a:r>
+          </a:p>
+        </p:txBody>
+      </p:sp>
+      <p:sp>
+        <p:nvSpPr>
+          <p:cNvPr id="64" name="TextBox 63"/>
+          <p:cNvSpPr txBox="1"/>
+          <p:nvPr/>
+        </p:nvSpPr>
+        <p:spPr>
+          <a:xfrm>
+            <a:off x="6189027" y="4168521"/>
+            <a:ext cx="255270" cy="231457"/>
           </a:xfrm>
           <a:prstGeom prst="rect">
             <a:avLst/>
@@ -22241,7 +22157,7 @@
             <a:r>
               <a:rPr sz="1350" b="0">
                 <a:solidFill>
-                  <a:srgbClr val="D8BB78"/>
+                  <a:srgbClr val="DFEADF"/>
                 </a:solidFill>
                 <a:latin typeface="Noto Sans SC"/>
                 <a:ea typeface="Noto Sans SC"/>
@@ -22253,13 +22169,85 @@
       </p:sp>
       <p:sp>
         <p:nvSpPr>
-          <p:cNvPr id="59" name="TextBox 58"/>
-          <p:cNvSpPr txBox="1"/>
-          <p:nvPr/>
-        </p:nvSpPr>
-        <p:spPr>
-          <a:xfrm>
-            <a:off x="6342646" y="3762121"/>
+          <p:cNvPr id="65" name="TextBox 64"/>
+          <p:cNvSpPr txBox="1"/>
+          <p:nvPr/>
+        </p:nvSpPr>
+        <p:spPr>
+          <a:xfrm>
+            <a:off x="6341427" y="4168521"/>
+            <a:ext cx="445770" cy="231457"/>
+          </a:xfrm>
+          <a:prstGeom prst="rect">
+            <a:avLst/>
+          </a:prstGeom>
+          <a:noFill/>
+        </p:spPr>
+        <p:txBody>
+          <a:bodyPr wrap="none" lIns="0" rIns="0" tIns="0" bIns="0">
+            <a:spAutoFit/>
+          </a:bodyPr>
+          <a:lstStyle/>
+          <a:p>
+            <a:pPr algn="l"/>
+            <a:r>
+              <a:rPr sz="1350" b="0">
+                <a:solidFill>
+                  <a:srgbClr val="DFEADF"/>
+                </a:solidFill>
+                <a:latin typeface="Noto Sans SC"/>
+                <a:ea typeface="Noto Sans SC"/>
+              </a:rPr>
+              <a:t>收缩</a:t>
+            </a:r>
+          </a:p>
+        </p:txBody>
+      </p:sp>
+      <p:sp>
+        <p:nvSpPr>
+          <p:cNvPr id="66" name="TextBox 65"/>
+          <p:cNvSpPr txBox="1"/>
+          <p:nvPr/>
+        </p:nvSpPr>
+        <p:spPr>
+          <a:xfrm>
+            <a:off x="6684327" y="4168521"/>
+            <a:ext cx="287020" cy="231457"/>
+          </a:xfrm>
+          <a:prstGeom prst="rect">
+            <a:avLst/>
+          </a:prstGeom>
+          <a:noFill/>
+        </p:spPr>
+        <p:txBody>
+          <a:bodyPr wrap="none" lIns="0" rIns="0" tIns="0" bIns="0">
+            <a:spAutoFit/>
+          </a:bodyPr>
+          <a:lstStyle/>
+          <a:p>
+            <a:pPr algn="l"/>
+            <a:r>
+              <a:rPr sz="1350" b="0">
+                <a:solidFill>
+                  <a:srgbClr val="DFEADF"/>
+                </a:solidFill>
+                <a:latin typeface="Noto Sans SC"/>
+                <a:ea typeface="Noto Sans SC"/>
+              </a:rPr>
+              <a:t> P </a:t>
+            </a:r>
+          </a:p>
+        </p:txBody>
+      </p:sp>
+      <p:sp>
+        <p:nvSpPr>
+          <p:cNvPr id="67" name="TextBox 66"/>
+          <p:cNvSpPr txBox="1"/>
+          <p:nvPr/>
+        </p:nvSpPr>
+        <p:spPr>
+          <a:xfrm>
+            <a:off x="6868477" y="4168521"/>
             <a:ext cx="274320" cy="231457"/>
           </a:xfrm>
           <a:prstGeom prst="rect">
@@ -22277,26 +22265,26 @@
             <a:r>
               <a:rPr sz="1350" b="0">
                 <a:solidFill>
-                  <a:srgbClr val="D8BB78"/>
-                </a:solidFill>
-                <a:latin typeface="Noto Sans SC"/>
-                <a:ea typeface="Noto Sans SC"/>
-              </a:rPr>
-              <a:t>选</a:t>
-            </a:r>
-          </a:p>
-        </p:txBody>
-      </p:sp>
-      <p:sp>
-        <p:nvSpPr>
-          <p:cNvPr id="60" name="TextBox 59"/>
-          <p:cNvSpPr txBox="1"/>
-          <p:nvPr/>
-        </p:nvSpPr>
-        <p:spPr>
-          <a:xfrm>
-            <a:off x="6514096" y="3762121"/>
-            <a:ext cx="199224" cy="231457"/>
+                  <a:srgbClr val="DFEADF"/>
+                </a:solidFill>
+                <a:latin typeface="Noto Sans SC"/>
+                <a:ea typeface="Noto Sans SC"/>
+              </a:rPr>
+              <a:t>∪</a:t>
+            </a:r>
+          </a:p>
+        </p:txBody>
+      </p:sp>
+      <p:sp>
+        <p:nvSpPr>
+          <p:cNvPr id="68" name="TextBox 67"/>
+          <p:cNvSpPr txBox="1"/>
+          <p:nvPr/>
+        </p:nvSpPr>
+        <p:spPr>
+          <a:xfrm>
+            <a:off x="7039927" y="4168521"/>
+            <a:ext cx="267970" cy="231457"/>
           </a:xfrm>
           <a:prstGeom prst="rect">
             <a:avLst/>
@@ -22313,26 +22301,26 @@
             <a:r>
               <a:rPr sz="1350" b="0">
                 <a:solidFill>
-                  <a:srgbClr val="D8BB78"/>
-                </a:solidFill>
-                <a:latin typeface="Noto Sans SC"/>
-                <a:ea typeface="Noto Sans SC"/>
-              </a:rPr>
-              <a:t> (</a:t>
-            </a:r>
-          </a:p>
-        </p:txBody>
-      </p:sp>
-      <p:sp>
-        <p:nvSpPr>
-          <p:cNvPr id="61" name="TextBox 60"/>
-          <p:cNvSpPr txBox="1"/>
-          <p:nvPr/>
-        </p:nvSpPr>
-        <p:spPr>
-          <a:xfrm>
-            <a:off x="6610451" y="3762121"/>
-            <a:ext cx="712374" cy="231457"/>
+                  <a:srgbClr val="DFEADF"/>
+                </a:solidFill>
+                <a:latin typeface="Noto Sans SC"/>
+                <a:ea typeface="Noto Sans SC"/>
+              </a:rPr>
+              <a:t> Q</a:t>
+            </a:r>
+          </a:p>
+        </p:txBody>
+      </p:sp>
+      <p:sp>
+        <p:nvSpPr>
+          <p:cNvPr id="69" name="TextBox 68"/>
+          <p:cNvSpPr txBox="1"/>
+          <p:nvPr/>
+        </p:nvSpPr>
+        <p:spPr>
+          <a:xfrm>
+            <a:off x="7205027" y="4168521"/>
+            <a:ext cx="274320" cy="231457"/>
           </a:xfrm>
           <a:prstGeom prst="rect">
             <a:avLst/>
@@ -22349,26 +22337,26 @@
             <a:r>
               <a:rPr sz="1350" b="0">
                 <a:solidFill>
-                  <a:srgbClr val="D8BB78"/>
-                </a:solidFill>
-                <a:latin typeface="Noto Sans SC"/>
-                <a:ea typeface="Noto Sans SC"/>
-              </a:rPr>
-              <a:t>−亲和度</a:t>
-            </a:r>
-          </a:p>
-        </p:txBody>
-      </p:sp>
-      <p:sp>
-        <p:nvSpPr>
-          <p:cNvPr id="62" name="TextBox 61"/>
-          <p:cNvSpPr txBox="1"/>
-          <p:nvPr/>
-        </p:nvSpPr>
-        <p:spPr>
-          <a:xfrm>
-            <a:off x="7219956" y="3762121"/>
-            <a:ext cx="607104" cy="231457"/>
+                  <a:srgbClr val="DFEADF"/>
+                </a:solidFill>
+                <a:latin typeface="Noto Sans SC"/>
+                <a:ea typeface="Noto Sans SC"/>
+              </a:rPr>
+              <a:t>：</a:t>
+            </a:r>
+          </a:p>
+        </p:txBody>
+      </p:sp>
+      <p:sp>
+        <p:nvSpPr>
+          <p:cNvPr id="70" name="TextBox 69"/>
+          <p:cNvSpPr txBox="1"/>
+          <p:nvPr/>
+        </p:nvSpPr>
+        <p:spPr>
+          <a:xfrm>
+            <a:off x="7376477" y="4168521"/>
+            <a:ext cx="394970" cy="231457"/>
           </a:xfrm>
           <a:prstGeom prst="rect">
             <a:avLst/>
@@ -22385,26 +22373,26 @@
             <a:r>
               <a:rPr sz="1350" b="0">
                 <a:solidFill>
-                  <a:srgbClr val="D8BB78"/>
-                </a:solidFill>
-                <a:latin typeface="Noto Sans SC"/>
-                <a:ea typeface="Noto Sans SC"/>
-              </a:rPr>
-              <a:t>, P, Q) </a:t>
-            </a:r>
-          </a:p>
-        </p:txBody>
-      </p:sp>
-      <p:sp>
-        <p:nvSpPr>
-          <p:cNvPr id="63" name="TextBox 62"/>
-          <p:cNvSpPr txBox="1"/>
-          <p:nvPr/>
-        </p:nvSpPr>
-        <p:spPr>
-          <a:xfrm>
-            <a:off x="7724190" y="3762121"/>
-            <a:ext cx="960119" cy="231457"/>
+                  <a:srgbClr val="DFEADF"/>
+                </a:solidFill>
+                <a:latin typeface="Noto Sans SC"/>
+                <a:ea typeface="Noto Sans SC"/>
+              </a:rPr>
+              <a:t>cut </a:t>
+            </a:r>
+          </a:p>
+        </p:txBody>
+      </p:sp>
+      <p:sp>
+        <p:nvSpPr>
+          <p:cNvPr id="71" name="TextBox 70"/>
+          <p:cNvSpPr txBox="1"/>
+          <p:nvPr/>
+        </p:nvSpPr>
+        <p:spPr>
+          <a:xfrm>
+            <a:off x="7668577" y="4168521"/>
+            <a:ext cx="1131570" cy="231457"/>
           </a:xfrm>
           <a:prstGeom prst="rect">
             <a:avLst/>
@@ -22421,26 +22409,26 @@
             <a:r>
               <a:rPr sz="1350" b="0">
                 <a:solidFill>
-                  <a:srgbClr val="D8BB78"/>
-                </a:solidFill>
-                <a:latin typeface="Noto Sans SC"/>
-                <a:ea typeface="Noto Sans SC"/>
-              </a:rPr>
-              <a:t>最小的一对</a:t>
-            </a:r>
-          </a:p>
-        </p:txBody>
-      </p:sp>
-      <p:sp>
-        <p:nvSpPr>
-          <p:cNvPr id="64" name="TextBox 63"/>
-          <p:cNvSpPr txBox="1"/>
-          <p:nvPr/>
-        </p:nvSpPr>
-        <p:spPr>
-          <a:xfrm>
-            <a:off x="5898832" y="4207383"/>
-            <a:ext cx="154019" cy="180022"/>
+                  <a:srgbClr val="DFEADF"/>
+                </a:solidFill>
+                <a:latin typeface="Noto Sans SC"/>
+                <a:ea typeface="Noto Sans SC"/>
+              </a:rPr>
+              <a:t>下降该亲和度</a:t>
+            </a:r>
+          </a:p>
+        </p:txBody>
+      </p:sp>
+      <p:sp>
+        <p:nvSpPr>
+          <p:cNvPr id="72" name="TextBox 71"/>
+          <p:cNvSpPr txBox="1"/>
+          <p:nvPr/>
+        </p:nvSpPr>
+        <p:spPr>
+          <a:xfrm>
+            <a:off x="5898832" y="4613783"/>
+            <a:ext cx="156210" cy="180022"/>
           </a:xfrm>
           <a:prstGeom prst="rect">
             <a:avLst/>
@@ -22462,295 +22450,7 @@
                 <a:latin typeface="Noto Sans SC"/>
                 <a:ea typeface="Noto Sans SC"/>
               </a:rPr>
-              <a:t>7</a:t>
-            </a:r>
-          </a:p>
-        </p:txBody>
-      </p:sp>
-      <p:sp>
-        <p:nvSpPr>
-          <p:cNvPr id="65" name="TextBox 64"/>
-          <p:cNvSpPr txBox="1"/>
-          <p:nvPr/>
-        </p:nvSpPr>
-        <p:spPr>
-          <a:xfrm>
-            <a:off x="6189027" y="4168521"/>
-            <a:ext cx="256489" cy="231457"/>
-          </a:xfrm>
-          <a:prstGeom prst="rect">
-            <a:avLst/>
-          </a:prstGeom>
-          <a:noFill/>
-        </p:spPr>
-        <p:txBody>
-          <a:bodyPr wrap="none" lIns="0" rIns="0" tIns="0" bIns="0">
-            <a:spAutoFit/>
-          </a:bodyPr>
-          <a:lstStyle/>
-          <a:p>
-            <a:pPr algn="l"/>
-            <a:r>
-              <a:rPr sz="1350" b="0">
-                <a:solidFill>
-                  <a:srgbClr val="DFEADF"/>
-                </a:solidFill>
-                <a:latin typeface="Noto Sans SC"/>
-                <a:ea typeface="Noto Sans SC"/>
-              </a:rPr>
-              <a:t>    </a:t>
-            </a:r>
-          </a:p>
-        </p:txBody>
-      </p:sp>
-      <p:sp>
-        <p:nvSpPr>
-          <p:cNvPr id="66" name="TextBox 65"/>
-          <p:cNvSpPr txBox="1"/>
-          <p:nvPr/>
-        </p:nvSpPr>
-        <p:spPr>
-          <a:xfrm>
-            <a:off x="6342646" y="4168521"/>
-            <a:ext cx="445770" cy="231457"/>
-          </a:xfrm>
-          <a:prstGeom prst="rect">
-            <a:avLst/>
-          </a:prstGeom>
-          <a:noFill/>
-        </p:spPr>
-        <p:txBody>
-          <a:bodyPr wrap="none" lIns="0" rIns="0" tIns="0" bIns="0">
-            <a:spAutoFit/>
-          </a:bodyPr>
-          <a:lstStyle/>
-          <a:p>
-            <a:pPr algn="l"/>
-            <a:r>
-              <a:rPr sz="1350" b="0">
-                <a:solidFill>
-                  <a:srgbClr val="DFEADF"/>
-                </a:solidFill>
-                <a:latin typeface="Noto Sans SC"/>
-                <a:ea typeface="Noto Sans SC"/>
-              </a:rPr>
-              <a:t>收缩</a:t>
-            </a:r>
-          </a:p>
-        </p:txBody>
-      </p:sp>
-      <p:sp>
-        <p:nvSpPr>
-          <p:cNvPr id="67" name="TextBox 66"/>
-          <p:cNvSpPr txBox="1"/>
-          <p:nvPr/>
-        </p:nvSpPr>
-        <p:spPr>
-          <a:xfrm>
-            <a:off x="6685546" y="4168521"/>
-            <a:ext cx="288207" cy="231457"/>
-          </a:xfrm>
-          <a:prstGeom prst="rect">
-            <a:avLst/>
-          </a:prstGeom>
-          <a:noFill/>
-        </p:spPr>
-        <p:txBody>
-          <a:bodyPr wrap="none" lIns="0" rIns="0" tIns="0" bIns="0">
-            <a:spAutoFit/>
-          </a:bodyPr>
-          <a:lstStyle/>
-          <a:p>
-            <a:pPr algn="l"/>
-            <a:r>
-              <a:rPr sz="1350" b="0">
-                <a:solidFill>
-                  <a:srgbClr val="DFEADF"/>
-                </a:solidFill>
-                <a:latin typeface="Noto Sans SC"/>
-                <a:ea typeface="Noto Sans SC"/>
-              </a:rPr>
-              <a:t> P </a:t>
-            </a:r>
-          </a:p>
-        </p:txBody>
-      </p:sp>
-      <p:sp>
-        <p:nvSpPr>
-          <p:cNvPr id="68" name="TextBox 67"/>
-          <p:cNvSpPr txBox="1"/>
-          <p:nvPr/>
-        </p:nvSpPr>
-        <p:spPr>
-          <a:xfrm>
-            <a:off x="6870884" y="4168521"/>
-            <a:ext cx="274320" cy="231457"/>
-          </a:xfrm>
-          <a:prstGeom prst="rect">
-            <a:avLst/>
-          </a:prstGeom>
-          <a:noFill/>
-        </p:spPr>
-        <p:txBody>
-          <a:bodyPr wrap="none" lIns="0" rIns="0" tIns="0" bIns="0">
-            <a:spAutoFit/>
-          </a:bodyPr>
-          <a:lstStyle/>
-          <a:p>
-            <a:pPr algn="l"/>
-            <a:r>
-              <a:rPr sz="1350" b="0">
-                <a:solidFill>
-                  <a:srgbClr val="DFEADF"/>
-                </a:solidFill>
-                <a:latin typeface="Noto Sans SC"/>
-                <a:ea typeface="Noto Sans SC"/>
-              </a:rPr>
-              <a:t>∪</a:t>
-            </a:r>
-          </a:p>
-        </p:txBody>
-      </p:sp>
-      <p:sp>
-        <p:nvSpPr>
-          <p:cNvPr id="69" name="TextBox 68"/>
-          <p:cNvSpPr txBox="1"/>
-          <p:nvPr/>
-        </p:nvSpPr>
-        <p:spPr>
-          <a:xfrm>
-            <a:off x="7042334" y="4168521"/>
-            <a:ext cx="268490" cy="231457"/>
-          </a:xfrm>
-          <a:prstGeom prst="rect">
-            <a:avLst/>
-          </a:prstGeom>
-          <a:noFill/>
-        </p:spPr>
-        <p:txBody>
-          <a:bodyPr wrap="none" lIns="0" rIns="0" tIns="0" bIns="0">
-            <a:spAutoFit/>
-          </a:bodyPr>
-          <a:lstStyle/>
-          <a:p>
-            <a:pPr algn="l"/>
-            <a:r>
-              <a:rPr sz="1350" b="0">
-                <a:solidFill>
-                  <a:srgbClr val="DFEADF"/>
-                </a:solidFill>
-                <a:latin typeface="Noto Sans SC"/>
-                <a:ea typeface="Noto Sans SC"/>
-              </a:rPr>
-              <a:t> Q</a:t>
-            </a:r>
-          </a:p>
-        </p:txBody>
-      </p:sp>
-      <p:sp>
-        <p:nvSpPr>
-          <p:cNvPr id="70" name="TextBox 69"/>
-          <p:cNvSpPr txBox="1"/>
-          <p:nvPr/>
-        </p:nvSpPr>
-        <p:spPr>
-          <a:xfrm>
-            <a:off x="7207954" y="4168521"/>
-            <a:ext cx="274320" cy="231457"/>
-          </a:xfrm>
-          <a:prstGeom prst="rect">
-            <a:avLst/>
-          </a:prstGeom>
-          <a:noFill/>
-        </p:spPr>
-        <p:txBody>
-          <a:bodyPr wrap="none" lIns="0" rIns="0" tIns="0" bIns="0">
-            <a:spAutoFit/>
-          </a:bodyPr>
-          <a:lstStyle/>
-          <a:p>
-            <a:pPr algn="l"/>
-            <a:r>
-              <a:rPr sz="1350" b="0">
-                <a:solidFill>
-                  <a:srgbClr val="DFEADF"/>
-                </a:solidFill>
-                <a:latin typeface="Noto Sans SC"/>
-                <a:ea typeface="Noto Sans SC"/>
-              </a:rPr>
-              <a:t>：</a:t>
-            </a:r>
-          </a:p>
-        </p:txBody>
-      </p:sp>
-      <p:sp>
-        <p:nvSpPr>
-          <p:cNvPr id="71" name="TextBox 70"/>
-          <p:cNvSpPr txBox="1"/>
-          <p:nvPr/>
-        </p:nvSpPr>
-        <p:spPr>
-          <a:xfrm>
-            <a:off x="7379404" y="4168521"/>
-            <a:ext cx="397421" cy="231457"/>
-          </a:xfrm>
-          <a:prstGeom prst="rect">
-            <a:avLst/>
-          </a:prstGeom>
-          <a:noFill/>
-        </p:spPr>
-        <p:txBody>
-          <a:bodyPr wrap="none" lIns="0" rIns="0" tIns="0" bIns="0">
-            <a:spAutoFit/>
-          </a:bodyPr>
-          <a:lstStyle/>
-          <a:p>
-            <a:pPr algn="l"/>
-            <a:r>
-              <a:rPr sz="1350" b="0">
-                <a:solidFill>
-                  <a:srgbClr val="DFEADF"/>
-                </a:solidFill>
-                <a:latin typeface="Noto Sans SC"/>
-                <a:ea typeface="Noto Sans SC"/>
-              </a:rPr>
-              <a:t>cut </a:t>
-            </a:r>
-          </a:p>
-        </p:txBody>
-      </p:sp>
-      <p:sp>
-        <p:nvSpPr>
-          <p:cNvPr id="72" name="TextBox 71"/>
-          <p:cNvSpPr txBox="1"/>
-          <p:nvPr/>
-        </p:nvSpPr>
-        <p:spPr>
-          <a:xfrm>
-            <a:off x="7673955" y="4168521"/>
-            <a:ext cx="1131570" cy="231457"/>
-          </a:xfrm>
-          <a:prstGeom prst="rect">
-            <a:avLst/>
-          </a:prstGeom>
-          <a:noFill/>
-        </p:spPr>
-        <p:txBody>
-          <a:bodyPr wrap="none" lIns="0" rIns="0" tIns="0" bIns="0">
-            <a:spAutoFit/>
-          </a:bodyPr>
-          <a:lstStyle/>
-          <a:p>
-            <a:pPr algn="l"/>
-            <a:r>
-              <a:rPr sz="1350" b="0">
-                <a:solidFill>
-                  <a:srgbClr val="DFEADF"/>
-                </a:solidFill>
-                <a:latin typeface="Noto Sans SC"/>
-                <a:ea typeface="Noto Sans SC"/>
-              </a:rPr>
-              <a:t>下降该亲和度</a:t>
+              <a:t>8</a:t>
             </a:r>
           </a:p>
         </p:txBody>
@@ -22758,42 +22458,6 @@
       <p:sp>
         <p:nvSpPr>
           <p:cNvPr id="73" name="TextBox 72"/>
-          <p:cNvSpPr txBox="1"/>
-          <p:nvPr/>
-        </p:nvSpPr>
-        <p:spPr>
-          <a:xfrm>
-            <a:off x="5898832" y="4613783"/>
-            <a:ext cx="154019" cy="180022"/>
-          </a:xfrm>
-          <a:prstGeom prst="rect">
-            <a:avLst/>
-          </a:prstGeom>
-          <a:noFill/>
-        </p:spPr>
-        <p:txBody>
-          <a:bodyPr wrap="none" lIns="0" rIns="0" tIns="0" bIns="0">
-            <a:spAutoFit/>
-          </a:bodyPr>
-          <a:lstStyle/>
-          <a:p>
-            <a:pPr algn="l"/>
-            <a:r>
-              <a:rPr sz="1050" b="0">
-                <a:solidFill>
-                  <a:srgbClr val="6F8F8F"/>
-                </a:solidFill>
-                <a:latin typeface="Noto Sans SC"/>
-                <a:ea typeface="Noto Sans SC"/>
-              </a:rPr>
-              <a:t>8</a:t>
-            </a:r>
-          </a:p>
-        </p:txBody>
-      </p:sp>
-      <p:sp>
-        <p:nvSpPr>
-          <p:cNvPr id="74" name="TextBox 73"/>
           <p:cNvSpPr txBox="1"/>
           <p:nvPr/>
         </p:nvSpPr>
@@ -22829,14 +22493,50 @@
       </p:sp>
       <p:sp>
         <p:nvSpPr>
+          <p:cNvPr id="74" name="TextBox 73"/>
+          <p:cNvSpPr txBox="1"/>
+          <p:nvPr/>
+        </p:nvSpPr>
+        <p:spPr>
+          <a:xfrm>
+            <a:off x="6531927" y="4574921"/>
+            <a:ext cx="140970" cy="231457"/>
+          </a:xfrm>
+          <a:prstGeom prst="rect">
+            <a:avLst/>
+          </a:prstGeom>
+          <a:noFill/>
+        </p:spPr>
+        <p:txBody>
+          <a:bodyPr wrap="none" lIns="0" rIns="0" tIns="0" bIns="0">
+            <a:spAutoFit/>
+          </a:bodyPr>
+          <a:lstStyle/>
+          <a:p>
+            <a:pPr algn="l"/>
+            <a:r>
+              <a:rPr sz="1350" b="0">
+                <a:solidFill>
+                  <a:srgbClr val="DFEADF"/>
+                </a:solidFill>
+                <a:latin typeface="Noto Sans SC"/>
+                <a:ea typeface="Noto Sans SC"/>
+              </a:rPr>
+              <a:t> </a:t>
+            </a:r>
+          </a:p>
+        </p:txBody>
+      </p:sp>
+      <p:sp>
+        <p:nvSpPr>
           <p:cNvPr id="75" name="TextBox 74"/>
           <p:cNvSpPr txBox="1"/>
           <p:nvPr/>
         </p:nvSpPr>
         <p:spPr>
           <a:xfrm>
-            <a:off x="6531927" y="4574921"/>
-            <a:ext cx="141274" cy="231457"/>
+            <a:off x="6570027" y="4574921"/>
+            <a:ext cx="445770" cy="231457"/>
           </a:xfrm>
           <a:prstGeom prst="rect">
             <a:avLst/>
@@ -22858,7 +22558,7 @@
                 <a:latin typeface="Noto Sans SC"/>
                 <a:ea typeface="Noto Sans SC"/>
               </a:rPr>
-              <a:t> </a:t>
+              <a:t>簇、</a:t>
             </a:r>
           </a:p>
         </p:txBody>
@@ -22871,8 +22571,8 @@
         </p:nvSpPr>
         <p:spPr>
           <a:xfrm>
-            <a:off x="6570332" y="4574921"/>
-            <a:ext cx="445770" cy="231457"/>
+            <a:off x="6912927" y="4574921"/>
+            <a:ext cx="356870" cy="231457"/>
           </a:xfrm>
           <a:prstGeom prst="rect">
             <a:avLst/>
@@ -22894,7 +22594,7 @@
                 <a:latin typeface="Noto Sans SC"/>
                 <a:ea typeface="Noto Sans SC"/>
               </a:rPr>
-              <a:t>簇、</a:t>
+              <a:t>cut</a:t>
             </a:r>
           </a:p>
         </p:txBody>
@@ -22907,8 +22607,8 @@
         </p:nvSpPr>
         <p:spPr>
           <a:xfrm>
-            <a:off x="6913232" y="4574921"/>
-            <a:ext cx="359016" cy="231457"/>
+            <a:off x="7166927" y="4574921"/>
+            <a:ext cx="960119" cy="231457"/>
           </a:xfrm>
           <a:prstGeom prst="rect">
             <a:avLst/>
@@ -22930,7 +22630,7 @@
                 <a:latin typeface="Noto Sans SC"/>
                 <a:ea typeface="Noto Sans SC"/>
               </a:rPr>
-              <a:t>cut</a:t>
+              <a:t>、是否达到</a:t>
             </a:r>
           </a:p>
         </p:txBody>
@@ -22943,8 +22643,8 @@
         </p:nvSpPr>
         <p:spPr>
           <a:xfrm>
-            <a:off x="7169378" y="4574921"/>
-            <a:ext cx="960119" cy="231457"/>
+            <a:off x="8024177" y="4574921"/>
+            <a:ext cx="248919" cy="231457"/>
           </a:xfrm>
           <a:prstGeom prst="rect">
             <a:avLst/>
@@ -22966,7 +22666,7 @@
                 <a:latin typeface="Noto Sans SC"/>
                 <a:ea typeface="Noto Sans SC"/>
               </a:rPr>
-              <a:t>、是否达到</a:t>
+              <a:t> K</a:t>
             </a:r>
           </a:p>
         </p:txBody>
@@ -22979,43 +22679,7 @@
         </p:nvSpPr>
         <p:spPr>
           <a:xfrm>
-            <a:off x="8026628" y="4574921"/>
-            <a:ext cx="252031" cy="231457"/>
-          </a:xfrm>
-          <a:prstGeom prst="rect">
-            <a:avLst/>
-          </a:prstGeom>
-          <a:noFill/>
-        </p:spPr>
-        <p:txBody>
-          <a:bodyPr wrap="none" lIns="0" rIns="0" tIns="0" bIns="0">
-            <a:spAutoFit/>
-          </a:bodyPr>
-          <a:lstStyle/>
-          <a:p>
-            <a:pPr algn="l"/>
-            <a:r>
-              <a:rPr sz="1350" b="0">
-                <a:solidFill>
-                  <a:srgbClr val="DFEADF"/>
-                </a:solidFill>
-                <a:latin typeface="Noto Sans SC"/>
-                <a:ea typeface="Noto Sans SC"/>
-              </a:rPr>
-              <a:t> K</a:t>
-            </a:r>
-          </a:p>
-        </p:txBody>
-      </p:sp>
-      <p:sp>
-        <p:nvSpPr>
-          <p:cNvPr id="80" name="TextBox 79"/>
-          <p:cNvSpPr txBox="1"/>
-          <p:nvPr/>
-        </p:nvSpPr>
-        <p:spPr>
-          <a:xfrm>
-            <a:off x="8175790" y="4574921"/>
+            <a:off x="8170227" y="4574921"/>
             <a:ext cx="960119" cy="231457"/>
           </a:xfrm>
           <a:prstGeom prst="rect">
